--- a/SIH2026_IDEA_Presentation_SIH26102.pptx
+++ b/SIH2026_IDEA_Presentation_SIH26102.pptx
@@ -3087,6 +3087,14 @@
 <file path=ppt/slides/slide1.xml><?xml version="1.0" encoding="utf-8"?>
 <p:sld xmlns:a="http://schemas.openxmlformats.org/drawingml/2006/main" xmlns:p="http://schemas.openxmlformats.org/presentationml/2006/main" xmlns:r="http://schemas.openxmlformats.org/officeDocument/2006/relationships">
   <p:cSld>
+    <p:bg>
+      <p:bgPr>
+        <a:solidFill>
+          <a:srgbClr val="FFFFFF"/>
+        </a:solidFill>
+        <a:effectLst/>
+      </p:bgPr>
+    </p:bg>
     <p:spTree>
       <p:nvGrpSpPr>
         <p:cNvPr id="1" name=""/>
@@ -3094,52 +3102,9 @@
         <p:nvPr/>
       </p:nvGrpSpPr>
       <p:grpSpPr/>
-      <p:sp>
-        <p:nvSpPr>
-          <p:cNvPr id="2" name="Rectangle 1"/>
-          <p:cNvSpPr/>
-          <p:nvPr/>
-        </p:nvSpPr>
-        <p:spPr>
-          <a:xfrm>
-            <a:off x="0" y="0"/>
-            <a:ext cx="12191695" cy="6858000"/>
-          </a:xfrm>
-          <a:prstGeom prst="rect">
-            <a:avLst/>
-          </a:prstGeom>
-          <a:solidFill>
-            <a:srgbClr val="FFFFFF"/>
-          </a:solidFill>
-          <a:ln>
-            <a:noFill/>
-          </a:ln>
-        </p:spPr>
-        <p:style>
-          <a:lnRef idx="1">
-            <a:schemeClr val="accent1"/>
-          </a:lnRef>
-          <a:fillRef idx="3">
-            <a:schemeClr val="accent1"/>
-          </a:fillRef>
-          <a:effectRef idx="2">
-            <a:schemeClr val="accent1"/>
-          </a:effectRef>
-          <a:fontRef idx="minor">
-            <a:schemeClr val="lt1"/>
-          </a:fontRef>
-        </p:style>
-        <p:txBody>
-          <a:bodyPr rtlCol="0" anchor="ctr"/>
-          <a:lstStyle/>
-          <a:p>
-            <a:pPr algn="ctr"/>
-          </a:p>
-        </p:txBody>
-      </p:sp>
       <p:pic>
         <p:nvPicPr>
-          <p:cNvPr id="3" name="Picture 2" descr="sih_logo.png"/>
+          <p:cNvPr id="2" name="Picture 1" descr="sih_logo_transparent.png"/>
           <p:cNvPicPr>
             <a:picLocks noChangeAspect="1"/>
           </p:cNvPicPr>
@@ -3153,8 +3118,8 @@
         </p:blipFill>
         <p:spPr>
           <a:xfrm>
-            <a:off x="9601200" y="228600"/>
-            <a:ext cx="2194560" cy="640080"/>
+            <a:off x="10789920" y="182880"/>
+            <a:ext cx="914400" cy="1508760"/>
           </a:xfrm>
           <a:prstGeom prst="rect">
             <a:avLst/>
@@ -3163,14 +3128,14 @@
       </p:pic>
       <p:sp>
         <p:nvSpPr>
-          <p:cNvPr id="4" name="TextBox 3"/>
+          <p:cNvPr id="3" name="TextBox 2"/>
           <p:cNvSpPr txBox="1"/>
           <p:nvPr/>
         </p:nvSpPr>
         <p:spPr>
           <a:xfrm>
-            <a:off x="1371600" y="365760"/>
-            <a:ext cx="8046720" cy="640080"/>
+            <a:off x="1371600" y="274320"/>
+            <a:ext cx="8412480" cy="685800"/>
           </a:xfrm>
           <a:prstGeom prst="rect">
             <a:avLst/>
@@ -3184,7 +3149,7 @@
           <a:lstStyle/>
           <a:p>
             <a:pPr algn="ctr">
-              <a:defRPr sz="2600" b="1">
+              <a:defRPr sz="2800" b="1">
                 <a:solidFill>
                   <a:srgbClr val="1D4477"/>
                 </a:solidFill>
@@ -3199,14 +3164,14 @@
       </p:sp>
       <p:sp>
         <p:nvSpPr>
-          <p:cNvPr id="5" name="TextBox 4"/>
+          <p:cNvPr id="4" name="TextBox 3"/>
           <p:cNvSpPr txBox="1"/>
           <p:nvPr/>
         </p:nvSpPr>
         <p:spPr>
           <a:xfrm>
-            <a:off x="2286000" y="1097280"/>
-            <a:ext cx="6217920" cy="548640"/>
+            <a:off x="2286000" y="960120"/>
+            <a:ext cx="6583680" cy="548640"/>
           </a:xfrm>
           <a:prstGeom prst="rect">
             <a:avLst/>
@@ -3220,7 +3185,7 @@
           <a:lstStyle/>
           <a:p>
             <a:pPr algn="ctr">
-              <a:defRPr sz="2000" b="1">
+              <a:defRPr sz="2200" b="1">
                 <a:solidFill>
                   <a:srgbClr val="000000"/>
                 </a:solidFill>
@@ -3235,7 +3200,7 @@
       </p:sp>
       <p:pic>
         <p:nvPicPr>
-          <p:cNvPr id="6" name="Picture 5" descr="sih_bulb_center.png"/>
+          <p:cNvPr id="5" name="Picture 4" descr="sih_bulb_center.png"/>
           <p:cNvPicPr>
             <a:picLocks noChangeAspect="1"/>
           </p:cNvPicPr>
@@ -3249,8 +3214,8 @@
         </p:blipFill>
         <p:spPr>
           <a:xfrm>
-            <a:off x="6858000" y="1463040"/>
-            <a:ext cx="4389120" cy="4389120"/>
+            <a:off x="7132320" y="1554480"/>
+            <a:ext cx="4206240" cy="4206240"/>
           </a:xfrm>
           <a:prstGeom prst="rect">
             <a:avLst/>
@@ -3259,14 +3224,14 @@
       </p:pic>
       <p:sp>
         <p:nvSpPr>
-          <p:cNvPr id="7" name="TextBox 6"/>
+          <p:cNvPr id="6" name="TextBox 5"/>
           <p:cNvSpPr txBox="1"/>
           <p:nvPr/>
         </p:nvSpPr>
         <p:spPr>
           <a:xfrm>
-            <a:off x="731520" y="1828800"/>
-            <a:ext cx="6217920" cy="4389120"/>
+            <a:off x="731520" y="1645920"/>
+            <a:ext cx="6400800" cy="4663440"/>
           </a:xfrm>
           <a:prstGeom prst="rect">
             <a:avLst/>
@@ -3281,11 +3246,11 @@
           <a:p>
             <a:pPr>
               <a:spcBef>
-                <a:spcPts val="1600"/>
+                <a:spcPts val="700"/>
               </a:spcBef>
             </a:pPr>
             <a:r>
-              <a:rPr b="1" sz="1700">
+              <a:rPr b="1" sz="1450">
                 <a:solidFill>
                   <a:srgbClr val="000000"/>
                 </a:solidFill>
@@ -3294,7 +3259,7 @@
               <a:t>• Problem Statement ID –</a:t>
             </a:r>
             <a:r>
-              <a:rPr b="0" sz="1600">
+              <a:rPr b="0" sz="1350">
                 <a:solidFill>
                   <a:srgbClr val="1E293B"/>
                 </a:solidFill>
@@ -3306,11 +3271,11 @@
           <a:p>
             <a:pPr>
               <a:spcBef>
-                <a:spcPts val="1600"/>
+                <a:spcPts val="700"/>
               </a:spcBef>
             </a:pPr>
             <a:r>
-              <a:rPr b="1" sz="1700">
+              <a:rPr b="1" sz="1450">
                 <a:solidFill>
                   <a:srgbClr val="000000"/>
                 </a:solidFill>
@@ -3319,7 +3284,7 @@
               <a:t>• Problem Statement Title-</a:t>
             </a:r>
             <a:r>
-              <a:rPr b="0" sz="1600">
+              <a:rPr b="0" sz="1350">
                 <a:solidFill>
                   <a:srgbClr val="1E293B"/>
                 </a:solidFill>
@@ -3331,11 +3296,11 @@
           <a:p>
             <a:pPr>
               <a:spcBef>
-                <a:spcPts val="1600"/>
+                <a:spcPts val="700"/>
               </a:spcBef>
             </a:pPr>
             <a:r>
-              <a:rPr b="1" sz="1700">
+              <a:rPr b="1" sz="1450">
                 <a:solidFill>
                   <a:srgbClr val="000000"/>
                 </a:solidFill>
@@ -3344,23 +3309,23 @@
               <a:t>• Theme-</a:t>
             </a:r>
             <a:r>
-              <a:rPr b="0" sz="1600">
+              <a:rPr b="0" sz="1350">
                 <a:solidFill>
                   <a:srgbClr val="1E293B"/>
                 </a:solidFill>
                 <a:latin typeface="Times New Roman"/>
               </a:rPr>
-              <a:t> Smart Governance &amp; Public Financial Surveillance</a:t>
+              <a:t> Smart Governance &amp; Public Financial Systems</a:t>
             </a:r>
           </a:p>
           <a:p>
             <a:pPr>
               <a:spcBef>
-                <a:spcPts val="1600"/>
+                <a:spcPts val="700"/>
               </a:spcBef>
             </a:pPr>
             <a:r>
-              <a:rPr b="1" sz="1700">
+              <a:rPr b="1" sz="1450">
                 <a:solidFill>
                   <a:srgbClr val="000000"/>
                 </a:solidFill>
@@ -3369,7 +3334,7 @@
               <a:t>• PS Category- Software/Hardware</a:t>
             </a:r>
             <a:r>
-              <a:rPr b="0" sz="1600">
+              <a:rPr b="0" sz="1350">
                 <a:solidFill>
                   <a:srgbClr val="1E293B"/>
                 </a:solidFill>
@@ -3381,11 +3346,11 @@
           <a:p>
             <a:pPr>
               <a:spcBef>
-                <a:spcPts val="1600"/>
+                <a:spcPts val="700"/>
               </a:spcBef>
             </a:pPr>
             <a:r>
-              <a:rPr b="1" sz="1700">
+              <a:rPr b="1" sz="1450">
                 <a:solidFill>
                   <a:srgbClr val="000000"/>
                 </a:solidFill>
@@ -3394,38 +3359,143 @@
               <a:t>• Team ID-</a:t>
             </a:r>
             <a:r>
-              <a:rPr b="0" sz="1600">
+              <a:rPr b="0" sz="1350">
                 <a:solidFill>
                   <a:srgbClr val="1E293B"/>
                 </a:solidFill>
                 <a:latin typeface="Times New Roman"/>
               </a:rPr>
-              <a:t> [Team ID]</a:t>
+              <a:t> T106</a:t>
             </a:r>
           </a:p>
           <a:p>
             <a:pPr>
               <a:spcBef>
-                <a:spcPts val="1600"/>
+                <a:spcPts val="700"/>
               </a:spcBef>
             </a:pPr>
             <a:r>
-              <a:rPr b="1" sz="1700">
+              <a:rPr b="1" sz="1450">
                 <a:solidFill>
                   <a:srgbClr val="000000"/>
                 </a:solidFill>
                 <a:latin typeface="Times New Roman"/>
               </a:rPr>
-              <a:t>• Team Name (Registered on portal)</a:t>
-            </a:r>
-            <a:r>
-              <a:rPr b="0" sz="1600">
+              <a:t>• Team Name (Registered on portal)-</a:t>
+            </a:r>
+            <a:r>
+              <a:rPr b="0" sz="1350">
                 <a:solidFill>
                   <a:srgbClr val="1E293B"/>
                 </a:solidFill>
                 <a:latin typeface="Times New Roman"/>
               </a:rPr>
-              <a:t> [Team Name]</a:t>
+              <a:t> RunTime Terror</a:t>
+            </a:r>
+          </a:p>
+          <a:p>
+            <a:pPr>
+              <a:spcBef>
+                <a:spcPts val="700"/>
+              </a:spcBef>
+            </a:pPr>
+            <a:r>
+              <a:rPr b="1" sz="1450">
+                <a:solidFill>
+                  <a:srgbClr val="000000"/>
+                </a:solidFill>
+                <a:latin typeface="Times New Roman"/>
+              </a:rPr>
+              <a:t>• Team Leader-</a:t>
+            </a:r>
+            <a:r>
+              <a:rPr b="0" sz="1350">
+                <a:solidFill>
+                  <a:srgbClr val="1E293B"/>
+                </a:solidFill>
+                <a:latin typeface="Times New Roman"/>
+              </a:rPr>
+              <a:t> Akshat Mittal</a:t>
+            </a:r>
+          </a:p>
+          <a:p>
+            <a:pPr>
+              <a:spcBef>
+                <a:spcPts val="700"/>
+              </a:spcBef>
+            </a:pPr>
+            <a:r>
+              <a:rPr b="1" sz="1450">
+                <a:solidFill>
+                  <a:srgbClr val="000000"/>
+                </a:solidFill>
+                <a:latin typeface="Times New Roman"/>
+              </a:rPr>
+              <a:t>• Team Members-</a:t>
+            </a:r>
+            <a:r>
+              <a:rPr b="0" sz="1350">
+                <a:solidFill>
+                  <a:srgbClr val="1E293B"/>
+                </a:solidFill>
+                <a:latin typeface="Times New Roman"/>
+              </a:rPr>
+              <a:t> Khushi, Aryan Shahi, Abhay Pratap, Gaurav Shukla, Shreya Srivastava</a:t>
+            </a:r>
+          </a:p>
+        </p:txBody>
+      </p:sp>
+      <p:sp>
+        <p:nvSpPr>
+          <p:cNvPr id="7" name="Rectangle 6"/>
+          <p:cNvSpPr/>
+          <p:nvPr/>
+        </p:nvSpPr>
+        <p:spPr>
+          <a:xfrm>
+            <a:off x="0" y="6446520"/>
+            <a:ext cx="12191695" cy="411480"/>
+          </a:xfrm>
+          <a:prstGeom prst="rect">
+            <a:avLst/>
+          </a:prstGeom>
+          <a:solidFill>
+            <a:srgbClr val="145DA0"/>
+          </a:solidFill>
+          <a:ln>
+            <a:solidFill>
+              <a:srgbClr val="145DA0"/>
+            </a:solidFill>
+          </a:ln>
+        </p:spPr>
+        <p:style>
+          <a:lnRef idx="1">
+            <a:schemeClr val="accent1"/>
+          </a:lnRef>
+          <a:fillRef idx="3">
+            <a:schemeClr val="accent1"/>
+          </a:fillRef>
+          <a:effectRef idx="2">
+            <a:schemeClr val="accent1"/>
+          </a:effectRef>
+          <a:fontRef idx="minor">
+            <a:schemeClr val="lt1"/>
+          </a:fontRef>
+        </p:style>
+        <p:txBody>
+          <a:bodyPr rtlCol="0" anchor="ctr" wrap="square"/>
+          <a:lstStyle/>
+          <a:p>
+            <a:pPr algn="l">
+              <a:defRPr sz="1100" b="1">
+                <a:solidFill>
+                  <a:srgbClr val="FFFFFF"/>
+                </a:solidFill>
+                <a:latin typeface="Arial"/>
+              </a:defRPr>
+            </a:pPr>
+            <a:r>
+              <a:t>Team ID: T106  |  Team Name: RunTime Terror                                                                                               1</a:t>
             </a:r>
           </a:p>
         </p:txBody>
@@ -3441,6 +3511,14 @@
 <file path=ppt/slides/slide2.xml><?xml version="1.0" encoding="utf-8"?>
 <p:sld xmlns:a="http://schemas.openxmlformats.org/drawingml/2006/main" xmlns:p="http://schemas.openxmlformats.org/presentationml/2006/main" xmlns:r="http://schemas.openxmlformats.org/officeDocument/2006/relationships">
   <p:cSld>
+    <p:bg>
+      <p:bgPr>
+        <a:solidFill>
+          <a:srgbClr val="FFFFFF"/>
+        </a:solidFill>
+        <a:effectLst/>
+      </p:bgPr>
+    </p:bg>
     <p:spTree>
       <p:nvGrpSpPr>
         <p:cNvPr id="1" name=""/>
@@ -3450,23 +3528,25 @@
       <p:grpSpPr/>
       <p:sp>
         <p:nvSpPr>
-          <p:cNvPr id="2" name="Rectangle 1"/>
+          <p:cNvPr id="2" name="Oval 1"/>
           <p:cNvSpPr/>
           <p:nvPr/>
         </p:nvSpPr>
         <p:spPr>
           <a:xfrm>
-            <a:off x="0" y="0"/>
-            <a:ext cx="12191695" cy="6858000"/>
-          </a:xfrm>
-          <a:prstGeom prst="rect">
+            <a:off x="548640" y="182880"/>
+            <a:ext cx="1280160" cy="960120"/>
+          </a:xfrm>
+          <a:prstGeom prst="ellipse">
             <a:avLst/>
           </a:prstGeom>
           <a:solidFill>
             <a:srgbClr val="FFFFFF"/>
           </a:solidFill>
-          <a:ln>
-            <a:noFill/>
+          <a:ln w="31750">
+            <a:solidFill>
+              <a:srgbClr val="5B21B6"/>
+            </a:solidFill>
           </a:ln>
         </p:spPr>
         <p:style>
@@ -3484,86 +3564,41 @@
           </a:fontRef>
         </p:style>
         <p:txBody>
-          <a:bodyPr rtlCol="0" anchor="ctr"/>
-          <a:lstStyle/>
-          <a:p>
-            <a:pPr algn="ctr"/>
-          </a:p>
-        </p:txBody>
-      </p:sp>
-      <p:sp>
-        <p:nvSpPr>
-          <p:cNvPr id="3" name="Oval 2"/>
-          <p:cNvSpPr/>
-          <p:nvPr/>
-        </p:nvSpPr>
-        <p:spPr>
-          <a:xfrm>
-            <a:off x="548640" y="320040"/>
-            <a:ext cx="1188720" cy="960120"/>
-          </a:xfrm>
-          <a:prstGeom prst="ellipse">
-            <a:avLst/>
-          </a:prstGeom>
-          <a:solidFill>
-            <a:srgbClr val="FFFFFF"/>
-          </a:solidFill>
-          <a:ln w="25400">
-            <a:solidFill>
-              <a:srgbClr val="5B3E84"/>
-            </a:solidFill>
-          </a:ln>
-        </p:spPr>
-        <p:style>
-          <a:lnRef idx="1">
-            <a:schemeClr val="accent1"/>
-          </a:lnRef>
-          <a:fillRef idx="3">
-            <a:schemeClr val="accent1"/>
-          </a:fillRef>
-          <a:effectRef idx="2">
-            <a:schemeClr val="accent1"/>
-          </a:effectRef>
-          <a:fontRef idx="minor">
-            <a:schemeClr val="lt1"/>
-          </a:fontRef>
-        </p:style>
-        <p:txBody>
           <a:bodyPr rtlCol="0" anchor="ctr" wrap="square"/>
           <a:lstStyle/>
           <a:p>
             <a:pPr algn="ctr">
-              <a:defRPr sz="1000">
-                <a:solidFill>
-                  <a:srgbClr val="0F172A"/>
-                </a:solidFill>
-                <a:latin typeface="Times New Roman"/>
-              </a:defRPr>
-            </a:pPr>
-            <a:r>
-              <a:t>Your</a:t>
+              <a:defRPr sz="950" b="1">
+                <a:solidFill>
+                  <a:srgbClr val="1E293B"/>
+                </a:solidFill>
+                <a:latin typeface="Times New Roman"/>
+              </a:defRPr>
+            </a:pPr>
+            <a:r>
+              <a:t>Team</a:t>
             </a:r>
             <a:br/>
             <a:r>
-              <a:t>Team</a:t>
+              <a:t>RunTime</a:t>
             </a:r>
             <a:br/>
             <a:r>
-              <a:t>Name</a:t>
-            </a:r>
-          </a:p>
-        </p:txBody>
-      </p:sp>
-      <p:sp>
-        <p:nvSpPr>
-          <p:cNvPr id="4" name="TextBox 3"/>
+              <a:t>Terror</a:t>
+            </a:r>
+          </a:p>
+        </p:txBody>
+      </p:sp>
+      <p:sp>
+        <p:nvSpPr>
+          <p:cNvPr id="3" name="TextBox 2"/>
           <p:cNvSpPr txBox="1"/>
           <p:nvPr/>
         </p:nvSpPr>
         <p:spPr>
           <a:xfrm>
-            <a:off x="2286000" y="365760"/>
-            <a:ext cx="6858000" cy="731520"/>
+            <a:off x="2011680" y="228600"/>
+            <a:ext cx="8046720" cy="822960"/>
           </a:xfrm>
           <a:prstGeom prst="rect">
             <a:avLst/>
@@ -3585,14 +3620,14 @@
               </a:defRPr>
             </a:pPr>
             <a:r>
-              <a:t>IDEA TITLE</a:t>
+              <a:t>IDEA TITLE / PROPOSED SOLUTION</a:t>
             </a:r>
           </a:p>
         </p:txBody>
       </p:sp>
       <p:pic>
         <p:nvPicPr>
-          <p:cNvPr id="5" name="Picture 4" descr="sih_logo.png"/>
+          <p:cNvPr id="4" name="Picture 3" descr="sih_logo_transparent.png"/>
           <p:cNvPicPr>
             <a:picLocks noChangeAspect="1"/>
           </p:cNvPicPr>
@@ -3606,8 +3641,8 @@
         </p:blipFill>
         <p:spPr>
           <a:xfrm>
-            <a:off x="9601200" y="228600"/>
-            <a:ext cx="2194560" cy="640080"/>
+            <a:off x="10881360" y="109728"/>
+            <a:ext cx="868680" cy="1371600"/>
           </a:xfrm>
           <a:prstGeom prst="rect">
             <a:avLst/>
@@ -3616,23 +3651,25 @@
       </p:pic>
       <p:sp>
         <p:nvSpPr>
-          <p:cNvPr id="6" name="Rectangle 5"/>
+          <p:cNvPr id="5" name="Rectangle 4"/>
           <p:cNvSpPr/>
           <p:nvPr/>
         </p:nvSpPr>
         <p:spPr>
           <a:xfrm>
-            <a:off x="0" y="6217920"/>
-            <a:ext cx="12191695" cy="640080"/>
+            <a:off x="0" y="6446520"/>
+            <a:ext cx="12191695" cy="411480"/>
           </a:xfrm>
           <a:prstGeom prst="rect">
             <a:avLst/>
           </a:prstGeom>
           <a:solidFill>
-            <a:srgbClr val="0F62AC"/>
+            <a:srgbClr val="145DA0"/>
           </a:solidFill>
           <a:ln>
-            <a:noFill/>
+            <a:solidFill>
+              <a:srgbClr val="145DA0"/>
+            </a:solidFill>
           </a:ln>
         </p:spPr>
         <p:style>
@@ -3650,139 +3687,43 @@
           </a:fontRef>
         </p:style>
         <p:txBody>
-          <a:bodyPr rtlCol="0" anchor="ctr"/>
-          <a:lstStyle/>
-          <a:p>
-            <a:pPr algn="ctr"/>
-          </a:p>
-        </p:txBody>
-      </p:sp>
-      <p:sp>
-        <p:nvSpPr>
-          <p:cNvPr id="7" name="TextBox 6"/>
-          <p:cNvSpPr txBox="1"/>
-          <p:nvPr/>
-        </p:nvSpPr>
-        <p:spPr>
-          <a:xfrm>
-            <a:off x="2743200" y="6291072"/>
-            <a:ext cx="6705295" cy="457200"/>
-          </a:xfrm>
-          <a:prstGeom prst="rect">
-            <a:avLst/>
-          </a:prstGeom>
-          <a:noFill/>
-        </p:spPr>
-        <p:txBody>
-          <a:bodyPr wrap="square">
-            <a:spAutoFit/>
-          </a:bodyPr>
-          <a:lstStyle/>
-          <a:p>
-            <a:pPr algn="ctr">
-              <a:defRPr sz="1100">
+          <a:bodyPr rtlCol="0" anchor="ctr" wrap="square"/>
+          <a:lstStyle/>
+          <a:p>
+            <a:pPr algn="l">
+              <a:defRPr sz="1100" b="1">
                 <a:solidFill>
                   <a:srgbClr val="FFFFFF"/>
                 </a:solidFill>
-              </a:defRPr>
-            </a:pPr>
-            <a:r>
-              <a:t>@SIH Idea submission- Template</a:t>
-            </a:r>
-          </a:p>
-        </p:txBody>
-      </p:sp>
-      <p:sp>
-        <p:nvSpPr>
-          <p:cNvPr id="8" name="TextBox 7"/>
-          <p:cNvSpPr txBox="1"/>
-          <p:nvPr/>
-        </p:nvSpPr>
-        <p:spPr>
-          <a:xfrm>
-            <a:off x="10972800" y="6291072"/>
-            <a:ext cx="914400" cy="457200"/>
-          </a:xfrm>
-          <a:prstGeom prst="rect">
-            <a:avLst/>
-          </a:prstGeom>
-          <a:noFill/>
-        </p:spPr>
-        <p:txBody>
-          <a:bodyPr wrap="none">
-            <a:spAutoFit/>
-          </a:bodyPr>
-          <a:lstStyle/>
-          <a:p>
-            <a:pPr algn="r">
-              <a:defRPr sz="1200" b="1">
-                <a:solidFill>
-                  <a:srgbClr val="FFFFFF"/>
-                </a:solidFill>
-              </a:defRPr>
-            </a:pPr>
-            <a:r>
-              <a:t>2</a:t>
-            </a:r>
-          </a:p>
-        </p:txBody>
-      </p:sp>
-      <p:sp>
-        <p:nvSpPr>
-          <p:cNvPr id="9" name="TextBox 8"/>
-          <p:cNvSpPr txBox="1"/>
-          <p:nvPr/>
-        </p:nvSpPr>
-        <p:spPr>
-          <a:xfrm>
-            <a:off x="548640" y="1371600"/>
-            <a:ext cx="10972800" cy="548640"/>
-          </a:xfrm>
-          <a:prstGeom prst="rect">
-            <a:avLst/>
-          </a:prstGeom>
-          <a:noFill/>
-        </p:spPr>
-        <p:txBody>
-          <a:bodyPr wrap="none">
-            <a:spAutoFit/>
-          </a:bodyPr>
-          <a:lstStyle/>
-          <a:p>
-            <a:pPr>
-              <a:defRPr sz="1800" b="1" u="sng">
-                <a:solidFill>
-                  <a:srgbClr val="1E5A99"/>
-                </a:solidFill>
-                <a:latin typeface="Times New Roman"/>
-              </a:defRPr>
-            </a:pPr>
-            <a:r>
-              <a:t>❖Proposed Solution (Describe your Idea/Solution/Prototype)</a:t>
-            </a:r>
-          </a:p>
-        </p:txBody>
-      </p:sp>
-      <p:sp>
-        <p:nvSpPr>
-          <p:cNvPr id="10" name="Rounded Rectangle 9"/>
+                <a:latin typeface="Arial"/>
+              </a:defRPr>
+            </a:pPr>
+            <a:r>
+              <a:t>Team ID: T106  |  Team Name: RunTime Terror                                                                                               2</a:t>
+            </a:r>
+          </a:p>
+        </p:txBody>
+      </p:sp>
+      <p:sp>
+        <p:nvSpPr>
+          <p:cNvPr id="6" name="Rounded Rectangle 5"/>
           <p:cNvSpPr/>
           <p:nvPr/>
         </p:nvSpPr>
         <p:spPr>
           <a:xfrm>
-            <a:off x="548640" y="2011680"/>
-            <a:ext cx="3566160" cy="3931920"/>
+            <a:off x="548640" y="1234440"/>
+            <a:ext cx="5303520" cy="365760"/>
           </a:xfrm>
           <a:prstGeom prst="roundRect">
             <a:avLst/>
           </a:prstGeom>
           <a:solidFill>
-            <a:srgbClr val="F8FAFC"/>
+            <a:srgbClr val="FFA053"/>
           </a:solidFill>
-          <a:ln w="12700">
+          <a:ln w="19050">
             <a:solidFill>
-              <a:srgbClr val="CBD5E1"/>
+              <a:srgbClr val="000000"/>
             </a:solidFill>
           </a:ln>
         </p:spPr>
@@ -3801,104 +3742,33 @@
           </a:fontRef>
         </p:style>
         <p:txBody>
-          <a:bodyPr rtlCol="0" anchor="ctr"/>
-          <a:lstStyle/>
-          <a:p>
-            <a:pPr algn="ctr"/>
-          </a:p>
-        </p:txBody>
-      </p:sp>
-      <p:sp>
-        <p:nvSpPr>
-          <p:cNvPr id="11" name="TextBox 10"/>
-          <p:cNvSpPr txBox="1"/>
-          <p:nvPr/>
-        </p:nvSpPr>
-        <p:spPr>
-          <a:xfrm>
-            <a:off x="685800" y="2148840"/>
-            <a:ext cx="3291840" cy="3657600"/>
-          </a:xfrm>
-          <a:prstGeom prst="rect">
-            <a:avLst/>
-          </a:prstGeom>
-          <a:noFill/>
-        </p:spPr>
-        <p:txBody>
-          <a:bodyPr wrap="square">
-            <a:spAutoFit/>
-          </a:bodyPr>
-          <a:lstStyle/>
-          <a:p>
-            <a:pPr>
+          <a:bodyPr rtlCol="0" anchor="ctr" wrap="square"/>
+          <a:lstStyle/>
+          <a:p>
+            <a:pPr algn="ctr">
               <a:defRPr sz="1200" b="1">
                 <a:solidFill>
-                  <a:srgbClr val="1D4477"/>
-                </a:solidFill>
-                <a:latin typeface="Times New Roman"/>
-              </a:defRPr>
-            </a:pPr>
-            <a:r>
-              <a:t>• Detailed explanation of the proposed solution:</a:t>
-            </a:r>
-          </a:p>
-          <a:p>
-            <a:pPr>
-              <a:spcBef>
-                <a:spcPts val="600"/>
-              </a:spcBef>
-              <a:defRPr sz="1050">
-                <a:solidFill>
-                  <a:srgbClr val="0F172A"/>
-                </a:solidFill>
-              </a:defRPr>
-            </a:pPr>
-            <a:r>
-              <a:t>  - Dual-Layer Hybrid Intelligence: Integrates a 3-model unsupervised ML ensemble (Isolation Forest 45%, Profile-Deduplicated LOF 35%, PCA 20%) with 5 codified CAG statutory rules.</a:t>
-            </a:r>
-          </a:p>
-          <a:p>
-            <a:pPr>
-              <a:spcBef>
-                <a:spcPts val="600"/>
-              </a:spcBef>
-              <a:defRPr sz="1050">
-                <a:solidFill>
-                  <a:srgbClr val="0F172A"/>
-                </a:solidFill>
-              </a:defRPr>
-            </a:pPr>
-            <a:r>
-              <a:t>  - Real-Time Pre-Sanction Surveillance: Screens 100% of public works transactions before funds leave the treasury, replacing delayed 2-year sample autopsies.</a:t>
-            </a:r>
-          </a:p>
-          <a:p>
-            <a:pPr>
-              <a:spcBef>
-                <a:spcPts val="600"/>
-              </a:spcBef>
-              <a:defRPr sz="1050">
-                <a:solidFill>
-                  <a:srgbClr val="0F172A"/>
-                </a:solidFill>
-              </a:defRPr>
-            </a:pPr>
-            <a:r>
-              <a:t>  - Full Pan-India Scope: Ingests 105,000 authentic civil works across all 33 States &amp; UTs (2019-2024), monitoring ₹6,260 Cr in scheme expenditure.</a:t>
-            </a:r>
-          </a:p>
-        </p:txBody>
-      </p:sp>
-      <p:sp>
-        <p:nvSpPr>
-          <p:cNvPr id="12" name="Rounded Rectangle 11"/>
+                  <a:srgbClr val="000000"/>
+                </a:solidFill>
+                <a:latin typeface="Arial"/>
+              </a:defRPr>
+            </a:pPr>
+            <a:r>
+              <a:t>Problem Statement</a:t>
+            </a:r>
+          </a:p>
+        </p:txBody>
+      </p:sp>
+      <p:sp>
+        <p:nvSpPr>
+          <p:cNvPr id="7" name="Rounded Rectangle 6"/>
           <p:cNvSpPr/>
           <p:nvPr/>
         </p:nvSpPr>
         <p:spPr>
           <a:xfrm>
-            <a:off x="4297680" y="2011680"/>
-            <a:ext cx="3566160" cy="3931920"/>
+            <a:off x="548640" y="1691640"/>
+            <a:ext cx="5303520" cy="2011680"/>
           </a:xfrm>
           <a:prstGeom prst="roundRect">
             <a:avLst/>
@@ -3906,7 +3776,7 @@
           <a:solidFill>
             <a:srgbClr val="F8FAFC"/>
           </a:solidFill>
-          <a:ln w="12700">
+          <a:ln w="15240">
             <a:solidFill>
               <a:srgbClr val="CBD5E1"/>
             </a:solidFill>
@@ -3936,14 +3806,14 @@
       </p:sp>
       <p:sp>
         <p:nvSpPr>
-          <p:cNvPr id="13" name="TextBox 12"/>
+          <p:cNvPr id="8" name="TextBox 7"/>
           <p:cNvSpPr txBox="1"/>
           <p:nvPr/>
         </p:nvSpPr>
         <p:spPr>
           <a:xfrm>
-            <a:off x="4434840" y="2148840"/>
-            <a:ext cx="3291840" cy="3657600"/>
+            <a:off x="640080" y="1737360"/>
+            <a:ext cx="5120640" cy="1920240"/>
           </a:xfrm>
           <a:prstGeom prst="rect">
             <a:avLst/>
@@ -3957,84 +3827,90 @@
           <a:lstStyle/>
           <a:p>
             <a:pPr>
-              <a:defRPr sz="1200" b="1">
-                <a:solidFill>
-                  <a:srgbClr val="1D4477"/>
-                </a:solidFill>
-                <a:latin typeface="Times New Roman"/>
-              </a:defRPr>
-            </a:pPr>
-            <a:r>
-              <a:t>• How it addresses the problem:</a:t>
+              <a:spcBef>
+                <a:spcPts val="400"/>
+              </a:spcBef>
+              <a:defRPr sz="950">
+                <a:solidFill>
+                  <a:srgbClr val="1E293B"/>
+                </a:solidFill>
+                <a:latin typeface="Arial"/>
+              </a:defRPr>
+            </a:pPr>
+            <a:r>
+              <a:t>• Massive Volume Blindspot: 105,000+ MPLADS works nationwide make exhaustive manual scrutiny mathematically impossible.</a:t>
             </a:r>
           </a:p>
           <a:p>
             <a:pPr>
               <a:spcBef>
-                <a:spcPts val="600"/>
+                <a:spcPts val="400"/>
               </a:spcBef>
-              <a:defRPr sz="1050">
-                <a:solidFill>
-                  <a:srgbClr val="0F172A"/>
-                </a:solidFill>
-              </a:defRPr>
-            </a:pPr>
-            <a:r>
-              <a:t>  - Solves Post-Facto Audit Blindspot: Traditional CAG audits inspect &lt;8% of works 12–24 months late; our system audits 100% in milliseconds (&lt;15ms).</a:t>
+              <a:defRPr sz="950">
+                <a:solidFill>
+                  <a:srgbClr val="1E293B"/>
+                </a:solidFill>
+                <a:latin typeface="Arial"/>
+              </a:defRPr>
+            </a:pPr>
+            <a:r>
+              <a:t>• Lagged Sample Autopsies: Sample-based reviews occur 12–24 months after fund disbursement when funds are already gone.</a:t>
             </a:r>
           </a:p>
           <a:p>
             <a:pPr>
               <a:spcBef>
-                <a:spcPts val="600"/>
+                <a:spcPts val="400"/>
               </a:spcBef>
-              <a:defRPr sz="1050">
-                <a:solidFill>
-                  <a:srgbClr val="0F172A"/>
-                </a:solidFill>
-              </a:defRPr>
-            </a:pPr>
-            <a:r>
-              <a:t>  - Eliminates GFR 149 Evasion: Flags procurement contract-splitting artificially priced just below ₹5L and ₹10L e-tender thresholds.</a:t>
+              <a:defRPr sz="950">
+                <a:solidFill>
+                  <a:srgbClr val="1E293B"/>
+                </a:solidFill>
+                <a:latin typeface="Arial"/>
+              </a:defRPr>
+            </a:pPr>
+            <a:r>
+              <a:t>• Data Siloing: Financial vouchers, execution milestone timelines, and contractor details live in disconnected databases.</a:t>
             </a:r>
           </a:p>
           <a:p>
             <a:pPr>
               <a:spcBef>
-                <a:spcPts val="600"/>
+                <a:spcPts val="400"/>
               </a:spcBef>
-              <a:defRPr sz="1050">
-                <a:solidFill>
-                  <a:srgbClr val="0F172A"/>
-                </a:solidFill>
-              </a:defRPr>
-            </a:pPr>
-            <a:r>
-              <a:t>  - Stops Ghost Village Re-Billing: Geospatial NLP cross-references identical works repeated in the same village/block to prevent double-invoicing.</a:t>
-            </a:r>
-          </a:p>
-        </p:txBody>
-      </p:sp>
-      <p:sp>
-        <p:nvSpPr>
-          <p:cNvPr id="14" name="Rounded Rectangle 13"/>
+              <a:defRPr sz="950">
+                <a:solidFill>
+                  <a:srgbClr val="1E293B"/>
+                </a:solidFill>
+                <a:latin typeface="Arial"/>
+              </a:defRPr>
+            </a:pPr>
+            <a:r>
+              <a:t>• Contextual Nuance: High expenditure alone is not misconduct; true anomaly detection requires multi-dimensional baseline benchmarking.</a:t>
+            </a:r>
+          </a:p>
+        </p:txBody>
+      </p:sp>
+      <p:sp>
+        <p:nvSpPr>
+          <p:cNvPr id="9" name="Rounded Rectangle 8"/>
           <p:cNvSpPr/>
           <p:nvPr/>
         </p:nvSpPr>
         <p:spPr>
           <a:xfrm>
-            <a:off x="8046720" y="2011680"/>
-            <a:ext cx="3566160" cy="3931920"/>
+            <a:off x="548640" y="3794760"/>
+            <a:ext cx="5303520" cy="365760"/>
           </a:xfrm>
           <a:prstGeom prst="roundRect">
             <a:avLst/>
           </a:prstGeom>
           <a:solidFill>
-            <a:srgbClr val="F8FAFC"/>
+            <a:srgbClr val="FFA053"/>
           </a:solidFill>
-          <a:ln w="12700">
+          <a:ln w="19050">
             <a:solidFill>
-              <a:srgbClr val="CBD5E1"/>
+              <a:srgbClr val="000000"/>
             </a:solidFill>
           </a:ln>
         </p:spPr>
@@ -4053,6 +3929,61 @@
           </a:fontRef>
         </p:style>
         <p:txBody>
+          <a:bodyPr rtlCol="0" anchor="ctr" wrap="square"/>
+          <a:lstStyle/>
+          <a:p>
+            <a:pPr algn="ctr">
+              <a:defRPr sz="1200" b="1">
+                <a:solidFill>
+                  <a:srgbClr val="000000"/>
+                </a:solidFill>
+                <a:latin typeface="Arial"/>
+              </a:defRPr>
+            </a:pPr>
+            <a:r>
+              <a:t>Why is it different?</a:t>
+            </a:r>
+          </a:p>
+        </p:txBody>
+      </p:sp>
+      <p:sp>
+        <p:nvSpPr>
+          <p:cNvPr id="10" name="Rounded Rectangle 9"/>
+          <p:cNvSpPr/>
+          <p:nvPr/>
+        </p:nvSpPr>
+        <p:spPr>
+          <a:xfrm>
+            <a:off x="548640" y="4251960"/>
+            <a:ext cx="5303520" cy="2057400"/>
+          </a:xfrm>
+          <a:prstGeom prst="roundRect">
+            <a:avLst/>
+          </a:prstGeom>
+          <a:solidFill>
+            <a:srgbClr val="F8FAFC"/>
+          </a:solidFill>
+          <a:ln w="15240">
+            <a:solidFill>
+              <a:srgbClr val="CBD5E1"/>
+            </a:solidFill>
+          </a:ln>
+        </p:spPr>
+        <p:style>
+          <a:lnRef idx="1">
+            <a:schemeClr val="accent1"/>
+          </a:lnRef>
+          <a:fillRef idx="3">
+            <a:schemeClr val="accent1"/>
+          </a:fillRef>
+          <a:effectRef idx="2">
+            <a:schemeClr val="accent1"/>
+          </a:effectRef>
+          <a:fontRef idx="minor">
+            <a:schemeClr val="lt1"/>
+          </a:fontRef>
+        </p:style>
+        <p:txBody>
           <a:bodyPr rtlCol="0" anchor="ctr"/>
           <a:lstStyle/>
           <a:p>
@@ -4062,14 +3993,14 @@
       </p:sp>
       <p:sp>
         <p:nvSpPr>
-          <p:cNvPr id="15" name="TextBox 14"/>
+          <p:cNvPr id="11" name="TextBox 10"/>
           <p:cNvSpPr txBox="1"/>
           <p:nvPr/>
         </p:nvSpPr>
         <p:spPr>
           <a:xfrm>
-            <a:off x="8183880" y="2148840"/>
-            <a:ext cx="3291840" cy="3657600"/>
+            <a:off x="640080" y="4297680"/>
+            <a:ext cx="5120640" cy="1965960"/>
           </a:xfrm>
           <a:prstGeom prst="rect">
             <a:avLst/>
@@ -4083,64 +4014,378 @@
           <a:lstStyle/>
           <a:p>
             <a:pPr>
-              <a:defRPr sz="1200" b="1">
-                <a:solidFill>
-                  <a:srgbClr val="1D4477"/>
-                </a:solidFill>
-                <a:latin typeface="Times New Roman"/>
-              </a:defRPr>
-            </a:pPr>
-            <a:r>
-              <a:t>• Innovation and uniqueness of the solution:</a:t>
+              <a:spcBef>
+                <a:spcPts val="400"/>
+              </a:spcBef>
+            </a:pPr>
+            <a:r>
+              <a:rPr b="1" sz="950">
+                <a:solidFill>
+                  <a:srgbClr val="EA580C"/>
+                </a:solidFill>
+                <a:latin typeface="Arial"/>
+              </a:rPr>
+              <a:t>• 🚨 March Rush Radar: </a:t>
+            </a:r>
+            <a:r>
+              <a:rPr b="0" sz="950">
+                <a:solidFill>
+                  <a:srgbClr val="1E293B"/>
+                </a:solidFill>
+                <a:latin typeface="Arial"/>
+              </a:rPr>
+              <a:t>World's first temporal forensics engine catching fiscal-dump sanction surges before March 31.</a:t>
             </a:r>
           </a:p>
           <a:p>
             <a:pPr>
               <a:spcBef>
-                <a:spcPts val="600"/>
+                <a:spcPts val="400"/>
               </a:spcBef>
-              <a:defRPr sz="1050">
-                <a:solidFill>
-                  <a:srgbClr val="0F172A"/>
-                </a:solidFill>
-              </a:defRPr>
-            </a:pPr>
-            <a:r>
-              <a:t>  - 🚨 The 'March Rush' Radar: First-ever longitudinal forensic engine detecting fiscal year-end fund dumping in March (3,111 works flagged).</a:t>
+            </a:pPr>
+            <a:r>
+              <a:rPr b="1" sz="950">
+                <a:solidFill>
+                  <a:srgbClr val="9333EA"/>
+                </a:solidFill>
+                <a:latin typeface="Arial"/>
+              </a:rPr>
+              <a:t>• ⏳ Chronic Dormancy Engine: </a:t>
+            </a:r>
+            <a:r>
+              <a:rPr b="0" sz="950">
+                <a:solidFill>
+                  <a:srgbClr val="1E293B"/>
+                </a:solidFill>
+                <a:latin typeface="Arial"/>
+              </a:rPr>
+              <a:t>Pinpoints long-stalled projects (&gt;3 years, ₹287 Cr) for immediate statutory clawback and reallocation.</a:t>
             </a:r>
           </a:p>
           <a:p>
             <a:pPr>
               <a:spcBef>
-                <a:spcPts val="600"/>
+                <a:spcPts val="400"/>
               </a:spcBef>
-              <a:defRPr sz="1050">
-                <a:solidFill>
-                  <a:srgbClr val="0F172A"/>
-                </a:solidFill>
-              </a:defRPr>
-            </a:pPr>
-            <a:r>
-              <a:t>  - ⏳ Chronic Dormancy Engine: Pinpointed ₹287 Cr in 5,960 works stalled &gt;3 years from 2019–2021 for fund clawback.</a:t>
+            </a:pPr>
+            <a:r>
+              <a:rPr b="1" sz="950">
+                <a:solidFill>
+                  <a:srgbClr val="0284C7"/>
+                </a:solidFill>
+                <a:latin typeface="Arial"/>
+              </a:rPr>
+              <a:t>• 📍 Duplicate / Cluster Signals: </a:t>
+            </a:r>
+            <a:r>
+              <a:rPr b="0" sz="950">
+                <a:solidFill>
+                  <a:srgbClr val="1E293B"/>
+                </a:solidFill>
+                <a:latin typeface="Arial"/>
+              </a:rPr>
+              <a:t>Geospatial NLP groups repeated works in identical villages to stop duplicate contractor billing.</a:t>
             </a:r>
           </a:p>
           <a:p>
             <a:pPr>
               <a:spcBef>
-                <a:spcPts val="600"/>
+                <a:spcPts val="400"/>
               </a:spcBef>
-              <a:defRPr sz="1050">
-                <a:solidFill>
-                  <a:srgbClr val="0F172A"/>
-                </a:solidFill>
-              </a:defRPr>
-            </a:pPr>
-            <a:r>
-              <a:t>  - 🇮🇳 Bilingual Usability: Converts math scores into plain English + सरल हिंदी directives with printable official CAG dossiers.</a:t>
-            </a:r>
-          </a:p>
-        </p:txBody>
-      </p:sp>
+            </a:pPr>
+            <a:r>
+              <a:rPr b="1" sz="950">
+                <a:solidFill>
+                  <a:srgbClr val="059669"/>
+                </a:solidFill>
+                <a:latin typeface="Arial"/>
+              </a:rPr>
+              <a:t>• 🗣️ Bilingual + Explainable: </a:t>
+            </a:r>
+            <a:r>
+              <a:rPr b="0" sz="950">
+                <a:solidFill>
+                  <a:srgbClr val="1E293B"/>
+                </a:solidFill>
+                <a:latin typeface="Arial"/>
+              </a:rPr>
+              <a:t>Translates complex AI math into plain legal English and सरल हिंदी directives with one-click CAG dossiers.</a:t>
+            </a:r>
+          </a:p>
+        </p:txBody>
+      </p:sp>
+      <p:sp>
+        <p:nvSpPr>
+          <p:cNvPr id="12" name="Rounded Rectangle 11"/>
+          <p:cNvSpPr/>
+          <p:nvPr/>
+        </p:nvSpPr>
+        <p:spPr>
+          <a:xfrm>
+            <a:off x="6217920" y="1234440"/>
+            <a:ext cx="5394960" cy="365760"/>
+          </a:xfrm>
+          <a:prstGeom prst="roundRect">
+            <a:avLst/>
+          </a:prstGeom>
+          <a:solidFill>
+            <a:srgbClr val="FFA053"/>
+          </a:solidFill>
+          <a:ln w="19050">
+            <a:solidFill>
+              <a:srgbClr val="000000"/>
+            </a:solidFill>
+          </a:ln>
+        </p:spPr>
+        <p:style>
+          <a:lnRef idx="1">
+            <a:schemeClr val="accent1"/>
+          </a:lnRef>
+          <a:fillRef idx="3">
+            <a:schemeClr val="accent1"/>
+          </a:fillRef>
+          <a:effectRef idx="2">
+            <a:schemeClr val="accent1"/>
+          </a:effectRef>
+          <a:fontRef idx="minor">
+            <a:schemeClr val="lt1"/>
+          </a:fontRef>
+        </p:style>
+        <p:txBody>
+          <a:bodyPr rtlCol="0" anchor="ctr" wrap="square"/>
+          <a:lstStyle/>
+          <a:p>
+            <a:pPr algn="ctr">
+              <a:defRPr sz="1200" b="1">
+                <a:solidFill>
+                  <a:srgbClr val="000000"/>
+                </a:solidFill>
+                <a:latin typeface="Arial"/>
+              </a:defRPr>
+            </a:pPr>
+            <a:r>
+              <a:t>Idea/Approach</a:t>
+            </a:r>
+          </a:p>
+        </p:txBody>
+      </p:sp>
+      <p:sp>
+        <p:nvSpPr>
+          <p:cNvPr id="13" name="Rounded Rectangle 12"/>
+          <p:cNvSpPr/>
+          <p:nvPr/>
+        </p:nvSpPr>
+        <p:spPr>
+          <a:xfrm>
+            <a:off x="6217920" y="1691640"/>
+            <a:ext cx="5394960" cy="2194560"/>
+          </a:xfrm>
+          <a:prstGeom prst="roundRect">
+            <a:avLst/>
+          </a:prstGeom>
+          <a:solidFill>
+            <a:srgbClr val="F8FAFC"/>
+          </a:solidFill>
+          <a:ln w="15240">
+            <a:solidFill>
+              <a:srgbClr val="CBD5E1"/>
+            </a:solidFill>
+          </a:ln>
+        </p:spPr>
+        <p:style>
+          <a:lnRef idx="1">
+            <a:schemeClr val="accent1"/>
+          </a:lnRef>
+          <a:fillRef idx="3">
+            <a:schemeClr val="accent1"/>
+          </a:fillRef>
+          <a:effectRef idx="2">
+            <a:schemeClr val="accent1"/>
+          </a:effectRef>
+          <a:fontRef idx="minor">
+            <a:schemeClr val="lt1"/>
+          </a:fontRef>
+        </p:style>
+        <p:txBody>
+          <a:bodyPr rtlCol="0" anchor="ctr"/>
+          <a:lstStyle/>
+          <a:p>
+            <a:pPr algn="ctr"/>
+          </a:p>
+        </p:txBody>
+      </p:sp>
+      <p:sp>
+        <p:nvSpPr>
+          <p:cNvPr id="14" name="TextBox 13"/>
+          <p:cNvSpPr txBox="1"/>
+          <p:nvPr/>
+        </p:nvSpPr>
+        <p:spPr>
+          <a:xfrm>
+            <a:off x="6309360" y="1737360"/>
+            <a:ext cx="5212080" cy="2103120"/>
+          </a:xfrm>
+          <a:prstGeom prst="rect">
+            <a:avLst/>
+          </a:prstGeom>
+          <a:noFill/>
+        </p:spPr>
+        <p:txBody>
+          <a:bodyPr wrap="square">
+            <a:spAutoFit/>
+          </a:bodyPr>
+          <a:lstStyle/>
+          <a:p>
+            <a:pPr>
+              <a:spcBef>
+                <a:spcPts val="300"/>
+              </a:spcBef>
+            </a:pPr>
+            <a:r>
+              <a:rPr b="1" sz="900">
+                <a:solidFill>
+                  <a:srgbClr val="2563EB"/>
+                </a:solidFill>
+                <a:latin typeface="Arial"/>
+              </a:rPr>
+              <a:t>[1 INGEST] </a:t>
+            </a:r>
+            <a:r>
+              <a:rPr b="0" sz="900">
+                <a:solidFill>
+                  <a:srgbClr val="1E293B"/>
+                </a:solidFill>
+                <a:latin typeface="Arial"/>
+              </a:rPr>
+              <a:t>MoSPI e-SAKSHI &amp; Public Records: Ingests 105,000 national works across all 33 States/UTs.</a:t>
+            </a:r>
+          </a:p>
+          <a:p>
+            <a:pPr>
+              <a:spcBef>
+                <a:spcPts val="300"/>
+              </a:spcBef>
+            </a:pPr>
+            <a:r>
+              <a:rPr b="1" sz="900">
+                <a:solidFill>
+                  <a:srgbClr val="0891B2"/>
+                </a:solidFill>
+                <a:latin typeface="Arial"/>
+              </a:rPr>
+              <a:t>[2 CLEAN] </a:t>
+            </a:r>
+            <a:r>
+              <a:rPr b="0" sz="900">
+                <a:solidFill>
+                  <a:srgbClr val="1E293B"/>
+                </a:solidFill>
+                <a:latin typeface="Arial"/>
+              </a:rPr>
+              <a:t>Feature Engineering: Computes cost-per-unit medians, GFR 149 proximity, and delay days.</a:t>
+            </a:r>
+          </a:p>
+          <a:p>
+            <a:pPr>
+              <a:spcBef>
+                <a:spcPts val="300"/>
+              </a:spcBef>
+            </a:pPr>
+            <a:r>
+              <a:rPr b="1" sz="900">
+                <a:solidFill>
+                  <a:srgbClr val="7C3AED"/>
+                </a:solidFill>
+                <a:latin typeface="Arial"/>
+              </a:rPr>
+              <a:t>[3 DETECT] </a:t>
+            </a:r>
+            <a:r>
+              <a:rPr b="0" sz="900">
+                <a:solidFill>
+                  <a:srgbClr val="1E293B"/>
+                </a:solidFill>
+                <a:latin typeface="Arial"/>
+              </a:rPr>
+              <a:t>Dual Hybrid Intelligence: Isolation Forest (45%), LOF (35%), PCA (20%) + 5 codified CAG rules.</a:t>
+            </a:r>
+          </a:p>
+          <a:p>
+            <a:pPr>
+              <a:spcBef>
+                <a:spcPts val="300"/>
+              </a:spcBef>
+            </a:pPr>
+            <a:r>
+              <a:rPr b="1" sz="900">
+                <a:solidFill>
+                  <a:srgbClr val="EA580C"/>
+                </a:solidFill>
+                <a:latin typeface="Arial"/>
+              </a:rPr>
+              <a:t>[4 PRIORITIZE] </a:t>
+            </a:r>
+            <a:r>
+              <a:rPr b="0" sz="900">
+                <a:solidFill>
+                  <a:srgbClr val="1E293B"/>
+                </a:solidFill>
+                <a:latin typeface="Arial"/>
+              </a:rPr>
+              <a:t>Explainable Risk Stratification: Calibrated 0-100 scores with concrete violation causes.</a:t>
+            </a:r>
+          </a:p>
+          <a:p>
+            <a:pPr>
+              <a:spcBef>
+                <a:spcPts val="300"/>
+              </a:spcBef>
+            </a:pPr>
+            <a:r>
+              <a:rPr b="1" sz="900">
+                <a:solidFill>
+                  <a:srgbClr val="16A34A"/>
+                </a:solidFill>
+                <a:latin typeface="Arial"/>
+              </a:rPr>
+              <a:t>[5 VERIFY] </a:t>
+            </a:r>
+            <a:r>
+              <a:rPr b="0" sz="900">
+                <a:solidFill>
+                  <a:srgbClr val="1E293B"/>
+                </a:solidFill>
+                <a:latin typeface="Arial"/>
+              </a:rPr>
+              <a:t>Officer Workflow &amp; CAG Dossier: Printable, court-admissible audit reports for vigilance officers.</a:t>
+            </a:r>
+          </a:p>
+        </p:txBody>
+      </p:sp>
+      <p:pic>
+        <p:nvPicPr>
+          <p:cNvPr id="15" name="Picture 14" descr="arch_hub.png"/>
+          <p:cNvPicPr>
+            <a:picLocks noChangeAspect="1"/>
+          </p:cNvPicPr>
+          <p:nvPr/>
+        </p:nvPicPr>
+        <p:blipFill>
+          <a:blip r:embed="rId3"/>
+          <a:stretch>
+            <a:fillRect/>
+          </a:stretch>
+        </p:blipFill>
+        <p:spPr>
+          <a:xfrm>
+            <a:off x="6217920" y="3977639"/>
+            <a:ext cx="5394960" cy="2331720"/>
+          </a:xfrm>
+          <a:prstGeom prst="rect">
+            <a:avLst/>
+          </a:prstGeom>
+        </p:spPr>
+      </p:pic>
     </p:spTree>
   </p:cSld>
   <p:clrMapOvr>
@@ -4152,6 +4397,14 @@
 <file path=ppt/slides/slide3.xml><?xml version="1.0" encoding="utf-8"?>
 <p:sld xmlns:a="http://schemas.openxmlformats.org/drawingml/2006/main" xmlns:p="http://schemas.openxmlformats.org/presentationml/2006/main" xmlns:r="http://schemas.openxmlformats.org/officeDocument/2006/relationships">
   <p:cSld>
+    <p:bg>
+      <p:bgPr>
+        <a:solidFill>
+          <a:srgbClr val="FFFFFF"/>
+        </a:solidFill>
+        <a:effectLst/>
+      </p:bgPr>
+    </p:bg>
     <p:spTree>
       <p:nvGrpSpPr>
         <p:cNvPr id="1" name=""/>
@@ -4161,23 +4414,25 @@
       <p:grpSpPr/>
       <p:sp>
         <p:nvSpPr>
-          <p:cNvPr id="2" name="Rectangle 1"/>
+          <p:cNvPr id="2" name="Oval 1"/>
           <p:cNvSpPr/>
           <p:nvPr/>
         </p:nvSpPr>
         <p:spPr>
           <a:xfrm>
-            <a:off x="0" y="0"/>
-            <a:ext cx="12191695" cy="6858000"/>
-          </a:xfrm>
-          <a:prstGeom prst="rect">
+            <a:off x="548640" y="182880"/>
+            <a:ext cx="1280160" cy="960120"/>
+          </a:xfrm>
+          <a:prstGeom prst="ellipse">
             <a:avLst/>
           </a:prstGeom>
           <a:solidFill>
             <a:srgbClr val="FFFFFF"/>
           </a:solidFill>
-          <a:ln>
-            <a:noFill/>
+          <a:ln w="31750">
+            <a:solidFill>
+              <a:srgbClr val="5B21B6"/>
+            </a:solidFill>
           </a:ln>
         </p:spPr>
         <p:style>
@@ -4195,86 +4450,41 @@
           </a:fontRef>
         </p:style>
         <p:txBody>
-          <a:bodyPr rtlCol="0" anchor="ctr"/>
-          <a:lstStyle/>
-          <a:p>
-            <a:pPr algn="ctr"/>
-          </a:p>
-        </p:txBody>
-      </p:sp>
-      <p:sp>
-        <p:nvSpPr>
-          <p:cNvPr id="3" name="Oval 2"/>
-          <p:cNvSpPr/>
-          <p:nvPr/>
-        </p:nvSpPr>
-        <p:spPr>
-          <a:xfrm>
-            <a:off x="548640" y="320040"/>
-            <a:ext cx="1188720" cy="960120"/>
-          </a:xfrm>
-          <a:prstGeom prst="ellipse">
-            <a:avLst/>
-          </a:prstGeom>
-          <a:solidFill>
-            <a:srgbClr val="FFFFFF"/>
-          </a:solidFill>
-          <a:ln w="25400">
-            <a:solidFill>
-              <a:srgbClr val="5B3E84"/>
-            </a:solidFill>
-          </a:ln>
-        </p:spPr>
-        <p:style>
-          <a:lnRef idx="1">
-            <a:schemeClr val="accent1"/>
-          </a:lnRef>
-          <a:fillRef idx="3">
-            <a:schemeClr val="accent1"/>
-          </a:fillRef>
-          <a:effectRef idx="2">
-            <a:schemeClr val="accent1"/>
-          </a:effectRef>
-          <a:fontRef idx="minor">
-            <a:schemeClr val="lt1"/>
-          </a:fontRef>
-        </p:style>
-        <p:txBody>
           <a:bodyPr rtlCol="0" anchor="ctr" wrap="square"/>
           <a:lstStyle/>
           <a:p>
             <a:pPr algn="ctr">
-              <a:defRPr sz="1000">
-                <a:solidFill>
-                  <a:srgbClr val="0F172A"/>
-                </a:solidFill>
-                <a:latin typeface="Times New Roman"/>
-              </a:defRPr>
-            </a:pPr>
-            <a:r>
-              <a:t>Your</a:t>
+              <a:defRPr sz="950" b="1">
+                <a:solidFill>
+                  <a:srgbClr val="1E293B"/>
+                </a:solidFill>
+                <a:latin typeface="Times New Roman"/>
+              </a:defRPr>
+            </a:pPr>
+            <a:r>
+              <a:t>Team</a:t>
             </a:r>
             <a:br/>
             <a:r>
-              <a:t>Team</a:t>
+              <a:t>RunTime</a:t>
             </a:r>
             <a:br/>
             <a:r>
-              <a:t>Name</a:t>
-            </a:r>
-          </a:p>
-        </p:txBody>
-      </p:sp>
-      <p:sp>
-        <p:nvSpPr>
-          <p:cNvPr id="4" name="TextBox 3"/>
+              <a:t>Terror</a:t>
+            </a:r>
+          </a:p>
+        </p:txBody>
+      </p:sp>
+      <p:sp>
+        <p:nvSpPr>
+          <p:cNvPr id="3" name="TextBox 2"/>
           <p:cNvSpPr txBox="1"/>
           <p:nvPr/>
         </p:nvSpPr>
         <p:spPr>
           <a:xfrm>
-            <a:off x="2286000" y="365760"/>
-            <a:ext cx="6858000" cy="731520"/>
+            <a:off x="2011680" y="228600"/>
+            <a:ext cx="8046720" cy="822960"/>
           </a:xfrm>
           <a:prstGeom prst="rect">
             <a:avLst/>
@@ -4303,7 +4513,7 @@
       </p:sp>
       <p:pic>
         <p:nvPicPr>
-          <p:cNvPr id="5" name="Picture 4" descr="sih_logo.png"/>
+          <p:cNvPr id="4" name="Picture 3" descr="sih_logo_transparent.png"/>
           <p:cNvPicPr>
             <a:picLocks noChangeAspect="1"/>
           </p:cNvPicPr>
@@ -4317,8 +4527,8 @@
         </p:blipFill>
         <p:spPr>
           <a:xfrm>
-            <a:off x="9601200" y="228600"/>
-            <a:ext cx="2194560" cy="640080"/>
+            <a:off x="10881360" y="109728"/>
+            <a:ext cx="868680" cy="1371600"/>
           </a:xfrm>
           <a:prstGeom prst="rect">
             <a:avLst/>
@@ -4327,23 +4537,25 @@
       </p:pic>
       <p:sp>
         <p:nvSpPr>
-          <p:cNvPr id="6" name="Rectangle 5"/>
+          <p:cNvPr id="5" name="Rectangle 4"/>
           <p:cNvSpPr/>
           <p:nvPr/>
         </p:nvSpPr>
         <p:spPr>
           <a:xfrm>
-            <a:off x="0" y="6217920"/>
-            <a:ext cx="12191695" cy="640080"/>
+            <a:off x="0" y="6446520"/>
+            <a:ext cx="12191695" cy="411480"/>
           </a:xfrm>
           <a:prstGeom prst="rect">
             <a:avLst/>
           </a:prstGeom>
           <a:solidFill>
-            <a:srgbClr val="0F62AC"/>
+            <a:srgbClr val="145DA0"/>
           </a:solidFill>
           <a:ln>
-            <a:noFill/>
+            <a:solidFill>
+              <a:srgbClr val="145DA0"/>
+            </a:solidFill>
           </a:ln>
         </p:spPr>
         <p:style>
@@ -4361,202 +4573,43 @@
           </a:fontRef>
         </p:style>
         <p:txBody>
-          <a:bodyPr rtlCol="0" anchor="ctr"/>
-          <a:lstStyle/>
-          <a:p>
-            <a:pPr algn="ctr"/>
-          </a:p>
-        </p:txBody>
-      </p:sp>
-      <p:sp>
-        <p:nvSpPr>
-          <p:cNvPr id="7" name="TextBox 6"/>
-          <p:cNvSpPr txBox="1"/>
-          <p:nvPr/>
-        </p:nvSpPr>
-        <p:spPr>
-          <a:xfrm>
-            <a:off x="2743200" y="6291072"/>
-            <a:ext cx="6705295" cy="457200"/>
-          </a:xfrm>
-          <a:prstGeom prst="rect">
-            <a:avLst/>
-          </a:prstGeom>
-          <a:noFill/>
-        </p:spPr>
-        <p:txBody>
-          <a:bodyPr wrap="square">
-            <a:spAutoFit/>
-          </a:bodyPr>
-          <a:lstStyle/>
-          <a:p>
-            <a:pPr algn="ctr">
-              <a:defRPr sz="1100">
+          <a:bodyPr rtlCol="0" anchor="ctr" wrap="square"/>
+          <a:lstStyle/>
+          <a:p>
+            <a:pPr algn="l">
+              <a:defRPr sz="1100" b="1">
                 <a:solidFill>
                   <a:srgbClr val="FFFFFF"/>
                 </a:solidFill>
-              </a:defRPr>
-            </a:pPr>
-            <a:r>
-              <a:t>@SIH Idea submission- Template</a:t>
-            </a:r>
-          </a:p>
-        </p:txBody>
-      </p:sp>
-      <p:sp>
-        <p:nvSpPr>
-          <p:cNvPr id="8" name="TextBox 7"/>
-          <p:cNvSpPr txBox="1"/>
-          <p:nvPr/>
-        </p:nvSpPr>
-        <p:spPr>
-          <a:xfrm>
-            <a:off x="10972800" y="6291072"/>
-            <a:ext cx="914400" cy="457200"/>
-          </a:xfrm>
-          <a:prstGeom prst="rect">
-            <a:avLst/>
-          </a:prstGeom>
-          <a:noFill/>
-        </p:spPr>
-        <p:txBody>
-          <a:bodyPr wrap="none">
-            <a:spAutoFit/>
-          </a:bodyPr>
-          <a:lstStyle/>
-          <a:p>
-            <a:pPr algn="r">
-              <a:defRPr sz="1200" b="1">
-                <a:solidFill>
-                  <a:srgbClr val="FFFFFF"/>
-                </a:solidFill>
-              </a:defRPr>
-            </a:pPr>
-            <a:r>
-              <a:t>3</a:t>
-            </a:r>
-          </a:p>
-        </p:txBody>
-      </p:sp>
-      <p:sp>
-        <p:nvSpPr>
-          <p:cNvPr id="9" name="TextBox 8"/>
-          <p:cNvSpPr txBox="1"/>
-          <p:nvPr/>
-        </p:nvSpPr>
-        <p:spPr>
-          <a:xfrm>
-            <a:off x="548640" y="1280160"/>
-            <a:ext cx="10972800" cy="1188720"/>
-          </a:xfrm>
-          <a:prstGeom prst="rect">
-            <a:avLst/>
-          </a:prstGeom>
-          <a:noFill/>
-        </p:spPr>
-        <p:txBody>
-          <a:bodyPr wrap="square">
-            <a:spAutoFit/>
-          </a:bodyPr>
-          <a:lstStyle/>
-          <a:p>
-            <a:pPr>
-              <a:defRPr sz="1500" b="1">
-                <a:solidFill>
-                  <a:srgbClr val="000000"/>
-                </a:solidFill>
-                <a:latin typeface="Times New Roman"/>
-              </a:defRPr>
-            </a:pPr>
-            <a:r>
-              <a:t>• Technologies to be used (programming languages, frameworks, hardware)</a:t>
-            </a:r>
-          </a:p>
-          <a:p>
-            <a:pPr>
-              <a:spcBef>
-                <a:spcPts val="400"/>
-              </a:spcBef>
-              <a:defRPr sz="1100">
-                <a:solidFill>
-                  <a:srgbClr val="0F172A"/>
-                </a:solidFill>
-              </a:defRPr>
-            </a:pPr>
-            <a:r>
-              <a:t>  - AI / ML Decision Engine: Scikit-learn (Isolation Forest, Profile-Deduplicated LOF, PCA SVD), Joblib, NumPy, Pandas</a:t>
-            </a:r>
-            <a:br/>
-            <a:r>
-              <a:t>  - Backend &amp; APIs: FastAPI (Asynchronous Python 3.12), SQLAlchemy ORM, Pydantic V2 schemas, Uvicorn</a:t>
-            </a:r>
-            <a:br/>
-            <a:r>
-              <a:t>  - Database &amp; Ingestion: PostgreSQL 16 (105k works, 557 seats), MoSPI e-SAKSHI live CDC scraper (REST API)</a:t>
-            </a:r>
-            <a:br/>
-            <a:r>
-              <a:t>  - Frontend &amp; GIS: React 18, Vite, Leaflet Geospatial GIS, Recharts Data Visualizer, Responsive CSS (100% Offline Demo)</a:t>
-            </a:r>
-          </a:p>
-        </p:txBody>
-      </p:sp>
-      <p:sp>
-        <p:nvSpPr>
-          <p:cNvPr id="10" name="TextBox 9"/>
-          <p:cNvSpPr txBox="1"/>
-          <p:nvPr/>
-        </p:nvSpPr>
-        <p:spPr>
-          <a:xfrm>
-            <a:off x="548640" y="2651760"/>
-            <a:ext cx="10972800" cy="457200"/>
-          </a:xfrm>
-          <a:prstGeom prst="rect">
-            <a:avLst/>
-          </a:prstGeom>
-          <a:noFill/>
-        </p:spPr>
-        <p:txBody>
-          <a:bodyPr wrap="none">
-            <a:spAutoFit/>
-          </a:bodyPr>
-          <a:lstStyle/>
-          <a:p>
-            <a:pPr>
-              <a:defRPr sz="1500" b="1">
-                <a:solidFill>
-                  <a:srgbClr val="000000"/>
-                </a:solidFill>
-                <a:latin typeface="Times New Roman"/>
-              </a:defRPr>
-            </a:pPr>
-            <a:r>
-              <a:t>• Methodology and process for implementation (Flow Charts / Architecture Workflow)</a:t>
-            </a:r>
-          </a:p>
-        </p:txBody>
-      </p:sp>
-      <p:sp>
-        <p:nvSpPr>
-          <p:cNvPr id="11" name="Rounded Rectangle 10"/>
+                <a:latin typeface="Arial"/>
+              </a:defRPr>
+            </a:pPr>
+            <a:r>
+              <a:t>Team ID: T106  |  Team Name: RunTime Terror                                                                                               3</a:t>
+            </a:r>
+          </a:p>
+        </p:txBody>
+      </p:sp>
+      <p:sp>
+        <p:nvSpPr>
+          <p:cNvPr id="6" name="Rounded Rectangle 5"/>
           <p:cNvSpPr/>
           <p:nvPr/>
         </p:nvSpPr>
         <p:spPr>
           <a:xfrm>
-            <a:off x="548640" y="3246120"/>
-            <a:ext cx="2057400" cy="2743200"/>
+            <a:off x="548640" y="1234440"/>
+            <a:ext cx="5303520" cy="365760"/>
           </a:xfrm>
           <a:prstGeom prst="roundRect">
             <a:avLst/>
           </a:prstGeom>
           <a:solidFill>
-            <a:srgbClr val="EEF5FF"/>
+            <a:srgbClr val="FFA053"/>
           </a:solidFill>
           <a:ln w="19050">
             <a:solidFill>
-              <a:srgbClr val="0F62AC"/>
+              <a:srgbClr val="000000"/>
             </a:solidFill>
           </a:ln>
         </p:spPr>
@@ -4575,94 +4628,92 @@
           </a:fontRef>
         </p:style>
         <p:txBody>
-          <a:bodyPr rtlCol="0" anchor="ctr"/>
-          <a:lstStyle/>
-          <a:p>
-            <a:pPr algn="ctr"/>
-          </a:p>
-        </p:txBody>
-      </p:sp>
-      <p:sp>
-        <p:nvSpPr>
-          <p:cNvPr id="12" name="TextBox 11"/>
-          <p:cNvSpPr txBox="1"/>
-          <p:nvPr/>
-        </p:nvSpPr>
-        <p:spPr>
-          <a:xfrm>
-            <a:off x="621792" y="3337560"/>
-            <a:ext cx="1911096" cy="2560320"/>
+          <a:bodyPr rtlCol="0" anchor="ctr" wrap="square"/>
+          <a:lstStyle/>
+          <a:p>
+            <a:pPr algn="ctr">
+              <a:defRPr sz="1200" b="1">
+                <a:solidFill>
+                  <a:srgbClr val="000000"/>
+                </a:solidFill>
+                <a:latin typeface="Arial"/>
+              </a:defRPr>
+            </a:pPr>
+            <a:r>
+              <a:t>Data Flow</a:t>
+            </a:r>
+          </a:p>
+        </p:txBody>
+      </p:sp>
+      <p:pic>
+        <p:nvPicPr>
+          <p:cNvPr id="7" name="Picture 6" descr="dataflow_pipeline.png"/>
+          <p:cNvPicPr>
+            <a:picLocks noChangeAspect="1"/>
+          </p:cNvPicPr>
+          <p:nvPr/>
+        </p:nvPicPr>
+        <p:blipFill>
+          <a:blip r:embed="rId3"/>
+          <a:stretch>
+            <a:fillRect/>
+          </a:stretch>
+        </p:blipFill>
+        <p:spPr>
+          <a:xfrm>
+            <a:off x="548640" y="1691640"/>
+            <a:ext cx="5303520" cy="2286000"/>
           </a:xfrm>
           <a:prstGeom prst="rect">
             <a:avLst/>
           </a:prstGeom>
-          <a:noFill/>
-        </p:spPr>
-        <p:txBody>
-          <a:bodyPr wrap="square">
-            <a:spAutoFit/>
-          </a:bodyPr>
-          <a:lstStyle/>
-          <a:p>
-            <a:pPr algn="ctr">
-              <a:defRPr sz="1050" b="1">
-                <a:solidFill>
-                  <a:srgbClr val="0F62AC"/>
-                </a:solidFill>
-              </a:defRPr>
-            </a:pPr>
-            <a:r>
-              <a:t>1. Data Ingestion &amp; Cleansing</a:t>
-            </a:r>
-          </a:p>
-          <a:p>
-            <a:pPr>
-              <a:spcBef>
-                <a:spcPts val="600"/>
-              </a:spcBef>
-              <a:defRPr sz="900">
-                <a:solidFill>
-                  <a:srgbClr val="0F172A"/>
-                </a:solidFill>
-              </a:defRPr>
-            </a:pPr>
-            <a:r>
-              <a:t>• MoSPI e-SAKSHI Portal API</a:t>
-            </a:r>
-            <a:br/>
-            <a:r>
-              <a:t>• 105,000 Real Works</a:t>
-            </a:r>
-            <a:br/>
-            <a:r>
-              <a:t>• Deduplication &amp; NLP</a:t>
-            </a:r>
-            <a:br/>
-            <a:r>
-              <a:t>• Completeness Scoring</a:t>
-            </a:r>
-          </a:p>
-        </p:txBody>
-      </p:sp>
-      <p:sp>
-        <p:nvSpPr>
-          <p:cNvPr id="13" name="Right Arrow 12"/>
+        </p:spPr>
+      </p:pic>
+      <p:pic>
+        <p:nvPicPr>
+          <p:cNvPr id="8" name="Picture 7" descr="ml_ensemble_flow.png"/>
+          <p:cNvPicPr>
+            <a:picLocks noChangeAspect="1"/>
+          </p:cNvPicPr>
+          <p:nvPr/>
+        </p:nvPicPr>
+        <p:blipFill>
+          <a:blip r:embed="rId4"/>
+          <a:stretch>
+            <a:fillRect/>
+          </a:stretch>
+        </p:blipFill>
+        <p:spPr>
+          <a:xfrm>
+            <a:off x="548640" y="4069080"/>
+            <a:ext cx="5303520" cy="2240280"/>
+          </a:xfrm>
+          <a:prstGeom prst="rect">
+            <a:avLst/>
+          </a:prstGeom>
+        </p:spPr>
+      </p:pic>
+      <p:sp>
+        <p:nvSpPr>
+          <p:cNvPr id="9" name="Rounded Rectangle 8"/>
           <p:cNvSpPr/>
           <p:nvPr/>
         </p:nvSpPr>
         <p:spPr>
           <a:xfrm>
-            <a:off x="2624328" y="4434840"/>
-            <a:ext cx="146304" cy="228600"/>
-          </a:xfrm>
-          <a:prstGeom prst="rightArrow">
+            <a:off x="6217920" y="1234440"/>
+            <a:ext cx="5394960" cy="365760"/>
+          </a:xfrm>
+          <a:prstGeom prst="roundRect">
             <a:avLst/>
           </a:prstGeom>
           <a:solidFill>
-            <a:srgbClr val="0F62AC"/>
+            <a:srgbClr val="FFA053"/>
           </a:solidFill>
-          <a:ln>
-            <a:noFill/>
+          <a:ln w="19050">
+            <a:solidFill>
+              <a:srgbClr val="000000"/>
+            </a:solidFill>
           </a:ln>
         </p:spPr>
         <p:style>
@@ -4680,33 +4731,67 @@
           </a:fontRef>
         </p:style>
         <p:txBody>
-          <a:bodyPr rtlCol="0" anchor="ctr"/>
-          <a:lstStyle/>
-          <a:p>
-            <a:pPr algn="ctr"/>
-          </a:p>
-        </p:txBody>
-      </p:sp>
-      <p:sp>
-        <p:nvSpPr>
-          <p:cNvPr id="14" name="Rounded Rectangle 13"/>
+          <a:bodyPr rtlCol="0" anchor="ctr" wrap="square"/>
+          <a:lstStyle/>
+          <a:p>
+            <a:pPr algn="ctr">
+              <a:defRPr sz="1200" b="1">
+                <a:solidFill>
+                  <a:srgbClr val="000000"/>
+                </a:solidFill>
+                <a:latin typeface="Arial"/>
+              </a:defRPr>
+            </a:pPr>
+            <a:r>
+              <a:t>Prototype</a:t>
+            </a:r>
+          </a:p>
+        </p:txBody>
+      </p:sp>
+      <p:pic>
+        <p:nvPicPr>
+          <p:cNvPr id="10" name="Picture 9" descr="proto_grid_4screens.png"/>
+          <p:cNvPicPr>
+            <a:picLocks noChangeAspect="1"/>
+          </p:cNvPicPr>
+          <p:nvPr/>
+        </p:nvPicPr>
+        <p:blipFill>
+          <a:blip r:embed="rId5"/>
+          <a:stretch>
+            <a:fillRect/>
+          </a:stretch>
+        </p:blipFill>
+        <p:spPr>
+          <a:xfrm>
+            <a:off x="6217920" y="1691640"/>
+            <a:ext cx="5394960" cy="2240280"/>
+          </a:xfrm>
+          <a:prstGeom prst="rect">
+            <a:avLst/>
+          </a:prstGeom>
+        </p:spPr>
+      </p:pic>
+      <p:sp>
+        <p:nvSpPr>
+          <p:cNvPr id="11" name="Rounded Rectangle 10"/>
           <p:cNvSpPr/>
           <p:nvPr/>
         </p:nvSpPr>
         <p:spPr>
           <a:xfrm>
-            <a:off x="2788920" y="3246120"/>
-            <a:ext cx="2057400" cy="2743200"/>
+            <a:off x="6217920" y="4005072"/>
+            <a:ext cx="5394960" cy="347472"/>
           </a:xfrm>
           <a:prstGeom prst="roundRect">
             <a:avLst/>
           </a:prstGeom>
           <a:solidFill>
-            <a:srgbClr val="F5F8FF"/>
+            <a:srgbClr val="FFA053"/>
           </a:solidFill>
           <a:ln w="19050">
             <a:solidFill>
-              <a:srgbClr val="0F62AC"/>
+              <a:srgbClr val="000000"/>
             </a:solidFill>
           </a:ln>
         </p:spPr>
@@ -4725,525 +4810,47 @@
           </a:fontRef>
         </p:style>
         <p:txBody>
-          <a:bodyPr rtlCol="0" anchor="ctr"/>
-          <a:lstStyle/>
-          <a:p>
-            <a:pPr algn="ctr"/>
-          </a:p>
-        </p:txBody>
-      </p:sp>
-      <p:sp>
-        <p:nvSpPr>
-          <p:cNvPr id="15" name="TextBox 14"/>
-          <p:cNvSpPr txBox="1"/>
-          <p:nvPr/>
-        </p:nvSpPr>
-        <p:spPr>
-          <a:xfrm>
-            <a:off x="2862072" y="3337560"/>
-            <a:ext cx="1911096" cy="2560320"/>
+          <a:bodyPr rtlCol="0" anchor="ctr" wrap="square"/>
+          <a:lstStyle/>
+          <a:p>
+            <a:pPr algn="ctr">
+              <a:defRPr sz="1200" b="1">
+                <a:solidFill>
+                  <a:srgbClr val="000000"/>
+                </a:solidFill>
+                <a:latin typeface="Arial"/>
+              </a:defRPr>
+            </a:pPr>
+            <a:r>
+              <a:t>Technology Stack</a:t>
+            </a:r>
+          </a:p>
+        </p:txBody>
+      </p:sp>
+      <p:pic>
+        <p:nvPicPr>
+          <p:cNvPr id="12" name="Picture 11" descr="tech_stack_hub.png"/>
+          <p:cNvPicPr>
+            <a:picLocks noChangeAspect="1"/>
+          </p:cNvPicPr>
+          <p:nvPr/>
+        </p:nvPicPr>
+        <p:blipFill>
+          <a:blip r:embed="rId6"/>
+          <a:stretch>
+            <a:fillRect/>
+          </a:stretch>
+        </p:blipFill>
+        <p:spPr>
+          <a:xfrm>
+            <a:off x="6217920" y="4389120"/>
+            <a:ext cx="5394960" cy="1965960"/>
           </a:xfrm>
           <a:prstGeom prst="rect">
             <a:avLst/>
           </a:prstGeom>
-          <a:noFill/>
-        </p:spPr>
-        <p:txBody>
-          <a:bodyPr wrap="square">
-            <a:spAutoFit/>
-          </a:bodyPr>
-          <a:lstStyle/>
-          <a:p>
-            <a:pPr algn="ctr">
-              <a:defRPr sz="1050" b="1">
-                <a:solidFill>
-                  <a:srgbClr val="0F62AC"/>
-                </a:solidFill>
-              </a:defRPr>
-            </a:pPr>
-            <a:r>
-              <a:t>2. Feature Engineering</a:t>
-            </a:r>
-          </a:p>
-          <a:p>
-            <a:pPr>
-              <a:spcBef>
-                <a:spcPts val="600"/>
-              </a:spcBef>
-              <a:defRPr sz="900">
-                <a:solidFill>
-                  <a:srgbClr val="0F172A"/>
-                </a:solidFill>
-              </a:defRPr>
-            </a:pPr>
-            <a:r>
-              <a:t>• Constituency Median Ratio</a:t>
-            </a:r>
-            <a:br/>
-            <a:r>
-              <a:t>• GFR 149 Proximity Flag</a:t>
-            </a:r>
-            <a:br/>
-            <a:r>
-              <a:t>• Village Cluster Matching</a:t>
-            </a:r>
-            <a:br/>
-            <a:r>
-              <a:t>• Days Since Recommendation</a:t>
-            </a:r>
-          </a:p>
-        </p:txBody>
-      </p:sp>
-      <p:sp>
-        <p:nvSpPr>
-          <p:cNvPr id="16" name="Right Arrow 15"/>
-          <p:cNvSpPr/>
-          <p:nvPr/>
-        </p:nvSpPr>
-        <p:spPr>
-          <a:xfrm>
-            <a:off x="4864608" y="4434840"/>
-            <a:ext cx="146304" cy="228600"/>
-          </a:xfrm>
-          <a:prstGeom prst="rightArrow">
-            <a:avLst/>
-          </a:prstGeom>
-          <a:solidFill>
-            <a:srgbClr val="0F62AC"/>
-          </a:solidFill>
-          <a:ln>
-            <a:noFill/>
-          </a:ln>
-        </p:spPr>
-        <p:style>
-          <a:lnRef idx="1">
-            <a:schemeClr val="accent1"/>
-          </a:lnRef>
-          <a:fillRef idx="3">
-            <a:schemeClr val="accent1"/>
-          </a:fillRef>
-          <a:effectRef idx="2">
-            <a:schemeClr val="accent1"/>
-          </a:effectRef>
-          <a:fontRef idx="minor">
-            <a:schemeClr val="lt1"/>
-          </a:fontRef>
-        </p:style>
-        <p:txBody>
-          <a:bodyPr rtlCol="0" anchor="ctr"/>
-          <a:lstStyle/>
-          <a:p>
-            <a:pPr algn="ctr"/>
-          </a:p>
-        </p:txBody>
-      </p:sp>
-      <p:sp>
-        <p:nvSpPr>
-          <p:cNvPr id="17" name="Rounded Rectangle 16"/>
-          <p:cNvSpPr/>
-          <p:nvPr/>
-        </p:nvSpPr>
-        <p:spPr>
-          <a:xfrm>
-            <a:off x="5029200" y="3246120"/>
-            <a:ext cx="2057400" cy="2743200"/>
-          </a:xfrm>
-          <a:prstGeom prst="roundRect">
-            <a:avLst/>
-          </a:prstGeom>
-          <a:solidFill>
-            <a:srgbClr val="EEF5FF"/>
-          </a:solidFill>
-          <a:ln w="19050">
-            <a:solidFill>
-              <a:srgbClr val="0F62AC"/>
-            </a:solidFill>
-          </a:ln>
-        </p:spPr>
-        <p:style>
-          <a:lnRef idx="1">
-            <a:schemeClr val="accent1"/>
-          </a:lnRef>
-          <a:fillRef idx="3">
-            <a:schemeClr val="accent1"/>
-          </a:fillRef>
-          <a:effectRef idx="2">
-            <a:schemeClr val="accent1"/>
-          </a:effectRef>
-          <a:fontRef idx="minor">
-            <a:schemeClr val="lt1"/>
-          </a:fontRef>
-        </p:style>
-        <p:txBody>
-          <a:bodyPr rtlCol="0" anchor="ctr"/>
-          <a:lstStyle/>
-          <a:p>
-            <a:pPr algn="ctr"/>
-          </a:p>
-        </p:txBody>
-      </p:sp>
-      <p:sp>
-        <p:nvSpPr>
-          <p:cNvPr id="18" name="TextBox 17"/>
-          <p:cNvSpPr txBox="1"/>
-          <p:nvPr/>
-        </p:nvSpPr>
-        <p:spPr>
-          <a:xfrm>
-            <a:off x="5102352" y="3337560"/>
-            <a:ext cx="1911096" cy="2560320"/>
-          </a:xfrm>
-          <a:prstGeom prst="rect">
-            <a:avLst/>
-          </a:prstGeom>
-          <a:noFill/>
-        </p:spPr>
-        <p:txBody>
-          <a:bodyPr wrap="square">
-            <a:spAutoFit/>
-          </a:bodyPr>
-          <a:lstStyle/>
-          <a:p>
-            <a:pPr algn="ctr">
-              <a:defRPr sz="1050" b="1">
-                <a:solidFill>
-                  <a:srgbClr val="0F62AC"/>
-                </a:solidFill>
-              </a:defRPr>
-            </a:pPr>
-            <a:r>
-              <a:t>3. Dual-Layer Hybrid Engine</a:t>
-            </a:r>
-          </a:p>
-          <a:p>
-            <a:pPr>
-              <a:spcBef>
-                <a:spcPts val="600"/>
-              </a:spcBef>
-              <a:defRPr sz="900">
-                <a:solidFill>
-                  <a:srgbClr val="0F172A"/>
-                </a:solidFill>
-              </a:defRPr>
-            </a:pPr>
-            <a:r>
-              <a:t>• Isolation Forest (45%)</a:t>
-            </a:r>
-            <a:br/>
-            <a:r>
-              <a:t>• Deduplicated LOF (35%)</a:t>
-            </a:r>
-            <a:br/>
-            <a:r>
-              <a:t>• PCA Reconstruction (20%)</a:t>
-            </a:r>
-            <a:br/>
-            <a:r>
-              <a:t>• 5 Codified CAG Rules</a:t>
-            </a:r>
-          </a:p>
-        </p:txBody>
-      </p:sp>
-      <p:sp>
-        <p:nvSpPr>
-          <p:cNvPr id="19" name="Right Arrow 18"/>
-          <p:cNvSpPr/>
-          <p:nvPr/>
-        </p:nvSpPr>
-        <p:spPr>
-          <a:xfrm>
-            <a:off x="7104888" y="4434840"/>
-            <a:ext cx="146304" cy="228600"/>
-          </a:xfrm>
-          <a:prstGeom prst="rightArrow">
-            <a:avLst/>
-          </a:prstGeom>
-          <a:solidFill>
-            <a:srgbClr val="0F62AC"/>
-          </a:solidFill>
-          <a:ln>
-            <a:noFill/>
-          </a:ln>
-        </p:spPr>
-        <p:style>
-          <a:lnRef idx="1">
-            <a:schemeClr val="accent1"/>
-          </a:lnRef>
-          <a:fillRef idx="3">
-            <a:schemeClr val="accent1"/>
-          </a:fillRef>
-          <a:effectRef idx="2">
-            <a:schemeClr val="accent1"/>
-          </a:effectRef>
-          <a:fontRef idx="minor">
-            <a:schemeClr val="lt1"/>
-          </a:fontRef>
-        </p:style>
-        <p:txBody>
-          <a:bodyPr rtlCol="0" anchor="ctr"/>
-          <a:lstStyle/>
-          <a:p>
-            <a:pPr algn="ctr"/>
-          </a:p>
-        </p:txBody>
-      </p:sp>
-      <p:sp>
-        <p:nvSpPr>
-          <p:cNvPr id="20" name="Rounded Rectangle 19"/>
-          <p:cNvSpPr/>
-          <p:nvPr/>
-        </p:nvSpPr>
-        <p:spPr>
-          <a:xfrm>
-            <a:off x="7269480" y="3246120"/>
-            <a:ext cx="2057400" cy="2743200"/>
-          </a:xfrm>
-          <a:prstGeom prst="roundRect">
-            <a:avLst/>
-          </a:prstGeom>
-          <a:solidFill>
-            <a:srgbClr val="F5F8FF"/>
-          </a:solidFill>
-          <a:ln w="19050">
-            <a:solidFill>
-              <a:srgbClr val="0F62AC"/>
-            </a:solidFill>
-          </a:ln>
-        </p:spPr>
-        <p:style>
-          <a:lnRef idx="1">
-            <a:schemeClr val="accent1"/>
-          </a:lnRef>
-          <a:fillRef idx="3">
-            <a:schemeClr val="accent1"/>
-          </a:fillRef>
-          <a:effectRef idx="2">
-            <a:schemeClr val="accent1"/>
-          </a:effectRef>
-          <a:fontRef idx="minor">
-            <a:schemeClr val="lt1"/>
-          </a:fontRef>
-        </p:style>
-        <p:txBody>
-          <a:bodyPr rtlCol="0" anchor="ctr"/>
-          <a:lstStyle/>
-          <a:p>
-            <a:pPr algn="ctr"/>
-          </a:p>
-        </p:txBody>
-      </p:sp>
-      <p:sp>
-        <p:nvSpPr>
-          <p:cNvPr id="21" name="TextBox 20"/>
-          <p:cNvSpPr txBox="1"/>
-          <p:nvPr/>
-        </p:nvSpPr>
-        <p:spPr>
-          <a:xfrm>
-            <a:off x="7342632" y="3337560"/>
-            <a:ext cx="1911096" cy="2560320"/>
-          </a:xfrm>
-          <a:prstGeom prst="rect">
-            <a:avLst/>
-          </a:prstGeom>
-          <a:noFill/>
-        </p:spPr>
-        <p:txBody>
-          <a:bodyPr wrap="square">
-            <a:spAutoFit/>
-          </a:bodyPr>
-          <a:lstStyle/>
-          <a:p>
-            <a:pPr algn="ctr">
-              <a:defRPr sz="1050" b="1">
-                <a:solidFill>
-                  <a:srgbClr val="0F62AC"/>
-                </a:solidFill>
-              </a:defRPr>
-            </a:pPr>
-            <a:r>
-              <a:t>4. Temporal Forensics</a:t>
-            </a:r>
-          </a:p>
-          <a:p>
-            <a:pPr>
-              <a:spcBef>
-                <a:spcPts val="600"/>
-              </a:spcBef>
-              <a:defRPr sz="900">
-                <a:solidFill>
-                  <a:srgbClr val="0F172A"/>
-                </a:solidFill>
-              </a:defRPr>
-            </a:pPr>
-            <a:r>
-              <a:t>• 'March Rush' Radar</a:t>
-            </a:r>
-            <a:br/>
-            <a:r>
-              <a:t>• Chronic Dormancy (&gt;3 Yrs)</a:t>
-            </a:r>
-            <a:br/>
-            <a:r>
-              <a:t>• Pre-Poll Election Surges</a:t>
-            </a:r>
-            <a:br/>
-            <a:r>
-              <a:t>• Longitudinal Normalization</a:t>
-            </a:r>
-          </a:p>
-        </p:txBody>
-      </p:sp>
-      <p:sp>
-        <p:nvSpPr>
-          <p:cNvPr id="22" name="Right Arrow 21"/>
-          <p:cNvSpPr/>
-          <p:nvPr/>
-        </p:nvSpPr>
-        <p:spPr>
-          <a:xfrm>
-            <a:off x="9345168" y="4434840"/>
-            <a:ext cx="146304" cy="228600"/>
-          </a:xfrm>
-          <a:prstGeom prst="rightArrow">
-            <a:avLst/>
-          </a:prstGeom>
-          <a:solidFill>
-            <a:srgbClr val="0F62AC"/>
-          </a:solidFill>
-          <a:ln>
-            <a:noFill/>
-          </a:ln>
-        </p:spPr>
-        <p:style>
-          <a:lnRef idx="1">
-            <a:schemeClr val="accent1"/>
-          </a:lnRef>
-          <a:fillRef idx="3">
-            <a:schemeClr val="accent1"/>
-          </a:fillRef>
-          <a:effectRef idx="2">
-            <a:schemeClr val="accent1"/>
-          </a:effectRef>
-          <a:fontRef idx="minor">
-            <a:schemeClr val="lt1"/>
-          </a:fontRef>
-        </p:style>
-        <p:txBody>
-          <a:bodyPr rtlCol="0" anchor="ctr"/>
-          <a:lstStyle/>
-          <a:p>
-            <a:pPr algn="ctr"/>
-          </a:p>
-        </p:txBody>
-      </p:sp>
-      <p:sp>
-        <p:nvSpPr>
-          <p:cNvPr id="23" name="Rounded Rectangle 22"/>
-          <p:cNvSpPr/>
-          <p:nvPr/>
-        </p:nvSpPr>
-        <p:spPr>
-          <a:xfrm>
-            <a:off x="9509760" y="3246120"/>
-            <a:ext cx="2057400" cy="2743200"/>
-          </a:xfrm>
-          <a:prstGeom prst="roundRect">
-            <a:avLst/>
-          </a:prstGeom>
-          <a:solidFill>
-            <a:srgbClr val="EEF5FF"/>
-          </a:solidFill>
-          <a:ln w="19050">
-            <a:solidFill>
-              <a:srgbClr val="0F62AC"/>
-            </a:solidFill>
-          </a:ln>
-        </p:spPr>
-        <p:style>
-          <a:lnRef idx="1">
-            <a:schemeClr val="accent1"/>
-          </a:lnRef>
-          <a:fillRef idx="3">
-            <a:schemeClr val="accent1"/>
-          </a:fillRef>
-          <a:effectRef idx="2">
-            <a:schemeClr val="accent1"/>
-          </a:effectRef>
-          <a:fontRef idx="minor">
-            <a:schemeClr val="lt1"/>
-          </a:fontRef>
-        </p:style>
-        <p:txBody>
-          <a:bodyPr rtlCol="0" anchor="ctr"/>
-          <a:lstStyle/>
-          <a:p>
-            <a:pPr algn="ctr"/>
-          </a:p>
-        </p:txBody>
-      </p:sp>
-      <p:sp>
-        <p:nvSpPr>
-          <p:cNvPr id="24" name="TextBox 23"/>
-          <p:cNvSpPr txBox="1"/>
-          <p:nvPr/>
-        </p:nvSpPr>
-        <p:spPr>
-          <a:xfrm>
-            <a:off x="9582912" y="3337560"/>
-            <a:ext cx="1911096" cy="2560320"/>
-          </a:xfrm>
-          <a:prstGeom prst="rect">
-            <a:avLst/>
-          </a:prstGeom>
-          <a:noFill/>
-        </p:spPr>
-        <p:txBody>
-          <a:bodyPr wrap="square">
-            <a:spAutoFit/>
-          </a:bodyPr>
-          <a:lstStyle/>
-          <a:p>
-            <a:pPr algn="ctr">
-              <a:defRPr sz="1050" b="1">
-                <a:solidFill>
-                  <a:srgbClr val="0F62AC"/>
-                </a:solidFill>
-              </a:defRPr>
-            </a:pPr>
-            <a:r>
-              <a:t>5. Bilingual Actionable Output</a:t>
-            </a:r>
-          </a:p>
-          <a:p>
-            <a:pPr>
-              <a:spcBef>
-                <a:spcPts val="600"/>
-              </a:spcBef>
-              <a:defRPr sz="900">
-                <a:solidFill>
-                  <a:srgbClr val="0F172A"/>
-                </a:solidFill>
-              </a:defRPr>
-            </a:pPr>
-            <a:r>
-              <a:t>• Easy English + सरल हिंदी</a:t>
-            </a:r>
-            <a:br/>
-            <a:r>
-              <a:t>• Statutory CAG Directives</a:t>
-            </a:r>
-            <a:br/>
-            <a:r>
-              <a:t>• Printable Audit Dossier</a:t>
-            </a:r>
-            <a:br/>
-            <a:r>
-              <a:t>• Live AI Simulator</a:t>
-            </a:r>
-          </a:p>
-        </p:txBody>
-      </p:sp>
+        </p:spPr>
+      </p:pic>
     </p:spTree>
   </p:cSld>
   <p:clrMapOvr>
@@ -5255,6 +4862,14 @@
 <file path=ppt/slides/slide4.xml><?xml version="1.0" encoding="utf-8"?>
 <p:sld xmlns:a="http://schemas.openxmlformats.org/drawingml/2006/main" xmlns:p="http://schemas.openxmlformats.org/presentationml/2006/main" xmlns:r="http://schemas.openxmlformats.org/officeDocument/2006/relationships">
   <p:cSld>
+    <p:bg>
+      <p:bgPr>
+        <a:solidFill>
+          <a:srgbClr val="FFFFFF"/>
+        </a:solidFill>
+        <a:effectLst/>
+      </p:bgPr>
+    </p:bg>
     <p:spTree>
       <p:nvGrpSpPr>
         <p:cNvPr id="1" name=""/>
@@ -5264,23 +4879,25 @@
       <p:grpSpPr/>
       <p:sp>
         <p:nvSpPr>
-          <p:cNvPr id="2" name="Rectangle 1"/>
+          <p:cNvPr id="2" name="Oval 1"/>
           <p:cNvSpPr/>
           <p:nvPr/>
         </p:nvSpPr>
         <p:spPr>
           <a:xfrm>
-            <a:off x="0" y="0"/>
-            <a:ext cx="12191695" cy="6858000"/>
-          </a:xfrm>
-          <a:prstGeom prst="rect">
+            <a:off x="548640" y="182880"/>
+            <a:ext cx="1280160" cy="960120"/>
+          </a:xfrm>
+          <a:prstGeom prst="ellipse">
             <a:avLst/>
           </a:prstGeom>
           <a:solidFill>
             <a:srgbClr val="FFFFFF"/>
           </a:solidFill>
-          <a:ln>
-            <a:noFill/>
+          <a:ln w="31750">
+            <a:solidFill>
+              <a:srgbClr val="5B21B6"/>
+            </a:solidFill>
           </a:ln>
         </p:spPr>
         <p:style>
@@ -5298,86 +4915,41 @@
           </a:fontRef>
         </p:style>
         <p:txBody>
-          <a:bodyPr rtlCol="0" anchor="ctr"/>
-          <a:lstStyle/>
-          <a:p>
-            <a:pPr algn="ctr"/>
-          </a:p>
-        </p:txBody>
-      </p:sp>
-      <p:sp>
-        <p:nvSpPr>
-          <p:cNvPr id="3" name="Oval 2"/>
-          <p:cNvSpPr/>
-          <p:nvPr/>
-        </p:nvSpPr>
-        <p:spPr>
-          <a:xfrm>
-            <a:off x="548640" y="320040"/>
-            <a:ext cx="1188720" cy="960120"/>
-          </a:xfrm>
-          <a:prstGeom prst="ellipse">
-            <a:avLst/>
-          </a:prstGeom>
-          <a:solidFill>
-            <a:srgbClr val="FFFFFF"/>
-          </a:solidFill>
-          <a:ln w="25400">
-            <a:solidFill>
-              <a:srgbClr val="5B3E84"/>
-            </a:solidFill>
-          </a:ln>
-        </p:spPr>
-        <p:style>
-          <a:lnRef idx="1">
-            <a:schemeClr val="accent1"/>
-          </a:lnRef>
-          <a:fillRef idx="3">
-            <a:schemeClr val="accent1"/>
-          </a:fillRef>
-          <a:effectRef idx="2">
-            <a:schemeClr val="accent1"/>
-          </a:effectRef>
-          <a:fontRef idx="minor">
-            <a:schemeClr val="lt1"/>
-          </a:fontRef>
-        </p:style>
-        <p:txBody>
           <a:bodyPr rtlCol="0" anchor="ctr" wrap="square"/>
           <a:lstStyle/>
           <a:p>
             <a:pPr algn="ctr">
-              <a:defRPr sz="1000">
-                <a:solidFill>
-                  <a:srgbClr val="0F172A"/>
-                </a:solidFill>
-                <a:latin typeface="Times New Roman"/>
-              </a:defRPr>
-            </a:pPr>
-            <a:r>
-              <a:t>Your</a:t>
+              <a:defRPr sz="950" b="1">
+                <a:solidFill>
+                  <a:srgbClr val="1E293B"/>
+                </a:solidFill>
+                <a:latin typeface="Times New Roman"/>
+              </a:defRPr>
+            </a:pPr>
+            <a:r>
+              <a:t>Team</a:t>
             </a:r>
             <a:br/>
             <a:r>
-              <a:t>Team</a:t>
+              <a:t>RunTime</a:t>
             </a:r>
             <a:br/>
             <a:r>
-              <a:t>Name</a:t>
-            </a:r>
-          </a:p>
-        </p:txBody>
-      </p:sp>
-      <p:sp>
-        <p:nvSpPr>
-          <p:cNvPr id="4" name="TextBox 3"/>
+              <a:t>Terror</a:t>
+            </a:r>
+          </a:p>
+        </p:txBody>
+      </p:sp>
+      <p:sp>
+        <p:nvSpPr>
+          <p:cNvPr id="3" name="TextBox 2"/>
           <p:cNvSpPr txBox="1"/>
           <p:nvPr/>
         </p:nvSpPr>
         <p:spPr>
           <a:xfrm>
-            <a:off x="2286000" y="365760"/>
-            <a:ext cx="6858000" cy="731520"/>
+            <a:off x="2011680" y="228600"/>
+            <a:ext cx="8046720" cy="822960"/>
           </a:xfrm>
           <a:prstGeom prst="rect">
             <a:avLst/>
@@ -5406,7 +4978,7 @@
       </p:sp>
       <p:pic>
         <p:nvPicPr>
-          <p:cNvPr id="5" name="Picture 4" descr="sih_logo.png"/>
+          <p:cNvPr id="4" name="Picture 3" descr="sih_logo_transparent.png"/>
           <p:cNvPicPr>
             <a:picLocks noChangeAspect="1"/>
           </p:cNvPicPr>
@@ -5420,8 +4992,8 @@
         </p:blipFill>
         <p:spPr>
           <a:xfrm>
-            <a:off x="9601200" y="228600"/>
-            <a:ext cx="2194560" cy="640080"/>
+            <a:off x="10881360" y="109728"/>
+            <a:ext cx="868680" cy="1371600"/>
           </a:xfrm>
           <a:prstGeom prst="rect">
             <a:avLst/>
@@ -5430,23 +5002,25 @@
       </p:pic>
       <p:sp>
         <p:nvSpPr>
-          <p:cNvPr id="6" name="Rectangle 5"/>
+          <p:cNvPr id="5" name="Rectangle 4"/>
           <p:cNvSpPr/>
           <p:nvPr/>
         </p:nvSpPr>
         <p:spPr>
           <a:xfrm>
-            <a:off x="0" y="6217920"/>
-            <a:ext cx="12191695" cy="640080"/>
+            <a:off x="0" y="6446520"/>
+            <a:ext cx="12191695" cy="411480"/>
           </a:xfrm>
           <a:prstGeom prst="rect">
             <a:avLst/>
           </a:prstGeom>
           <a:solidFill>
-            <a:srgbClr val="0F62AC"/>
+            <a:srgbClr val="145DA0"/>
           </a:solidFill>
           <a:ln>
-            <a:noFill/>
+            <a:solidFill>
+              <a:srgbClr val="145DA0"/>
+            </a:solidFill>
           </a:ln>
         </p:spPr>
         <p:style>
@@ -5464,23 +5038,33 @@
           </a:fontRef>
         </p:style>
         <p:txBody>
-          <a:bodyPr rtlCol="0" anchor="ctr"/>
-          <a:lstStyle/>
-          <a:p>
-            <a:pPr algn="ctr"/>
-          </a:p>
-        </p:txBody>
-      </p:sp>
-      <p:sp>
-        <p:nvSpPr>
-          <p:cNvPr id="7" name="TextBox 6"/>
+          <a:bodyPr rtlCol="0" anchor="ctr" wrap="square"/>
+          <a:lstStyle/>
+          <a:p>
+            <a:pPr algn="l">
+              <a:defRPr sz="1100" b="1">
+                <a:solidFill>
+                  <a:srgbClr val="FFFFFF"/>
+                </a:solidFill>
+                <a:latin typeface="Arial"/>
+              </a:defRPr>
+            </a:pPr>
+            <a:r>
+              <a:t>Team ID: T106  |  Team Name: RunTime Terror                                                                                               4</a:t>
+            </a:r>
+          </a:p>
+        </p:txBody>
+      </p:sp>
+      <p:sp>
+        <p:nvSpPr>
+          <p:cNvPr id="6" name="TextBox 5"/>
           <p:cNvSpPr txBox="1"/>
           <p:nvPr/>
         </p:nvSpPr>
         <p:spPr>
           <a:xfrm>
-            <a:off x="2743200" y="6291072"/>
-            <a:ext cx="6705295" cy="457200"/>
+            <a:off x="548640" y="1280160"/>
+            <a:ext cx="11064240" cy="1600200"/>
           </a:xfrm>
           <a:prstGeom prst="rect">
             <a:avLst/>
@@ -5493,78 +5077,8 @@
           </a:bodyPr>
           <a:lstStyle/>
           <a:p>
-            <a:pPr algn="ctr">
-              <a:defRPr sz="1100">
-                <a:solidFill>
-                  <a:srgbClr val="FFFFFF"/>
-                </a:solidFill>
-              </a:defRPr>
-            </a:pPr>
-            <a:r>
-              <a:t>@SIH Idea submission- Template</a:t>
-            </a:r>
-          </a:p>
-        </p:txBody>
-      </p:sp>
-      <p:sp>
-        <p:nvSpPr>
-          <p:cNvPr id="8" name="TextBox 7"/>
-          <p:cNvSpPr txBox="1"/>
-          <p:nvPr/>
-        </p:nvSpPr>
-        <p:spPr>
-          <a:xfrm>
-            <a:off x="10972800" y="6291072"/>
-            <a:ext cx="914400" cy="457200"/>
-          </a:xfrm>
-          <a:prstGeom prst="rect">
-            <a:avLst/>
-          </a:prstGeom>
-          <a:noFill/>
-        </p:spPr>
-        <p:txBody>
-          <a:bodyPr wrap="none">
-            <a:spAutoFit/>
-          </a:bodyPr>
-          <a:lstStyle/>
-          <a:p>
-            <a:pPr algn="r">
-              <a:defRPr sz="1200" b="1">
-                <a:solidFill>
-                  <a:srgbClr val="FFFFFF"/>
-                </a:solidFill>
-              </a:defRPr>
-            </a:pPr>
-            <a:r>
-              <a:t>4</a:t>
-            </a:r>
-          </a:p>
-        </p:txBody>
-      </p:sp>
-      <p:sp>
-        <p:nvSpPr>
-          <p:cNvPr id="9" name="TextBox 8"/>
-          <p:cNvSpPr txBox="1"/>
-          <p:nvPr/>
-        </p:nvSpPr>
-        <p:spPr>
-          <a:xfrm>
-            <a:off x="548640" y="1371600"/>
-            <a:ext cx="10972800" cy="1463040"/>
-          </a:xfrm>
-          <a:prstGeom prst="rect">
-            <a:avLst/>
-          </a:prstGeom>
-          <a:noFill/>
-        </p:spPr>
-        <p:txBody>
-          <a:bodyPr wrap="square">
-            <a:spAutoFit/>
-          </a:bodyPr>
-          <a:lstStyle/>
-          <a:p>
             <a:pPr>
-              <a:defRPr sz="1400" b="1">
+              <a:defRPr sz="1500" b="1">
                 <a:solidFill>
                   <a:srgbClr val="000000"/>
                 </a:solidFill>
@@ -5580,14 +5094,24 @@
               <a:spcBef>
                 <a:spcPts val="300"/>
               </a:spcBef>
-              <a:defRPr sz="1100">
-                <a:solidFill>
-                  <a:srgbClr val="0F172A"/>
-                </a:solidFill>
-              </a:defRPr>
-            </a:pPr>
-            <a:r>
-              <a:t>  - Data Feasibility: 100% validated on real authenticated MoSPI data (60,359 baseline works expanded to 105,000 multi-year records spanning 2019-2024 across all 33 States/UTs).</a:t>
+            </a:pPr>
+            <a:r>
+              <a:rPr b="1" sz="1150">
+                <a:solidFill>
+                  <a:srgbClr val="1D4477"/>
+                </a:solidFill>
+                <a:latin typeface="Times New Roman"/>
+              </a:rPr>
+              <a:t>  - Data Feasibility: </a:t>
+            </a:r>
+            <a:r>
+              <a:rPr b="0" sz="1150">
+                <a:solidFill>
+                  <a:srgbClr val="1E293B"/>
+                </a:solidFill>
+                <a:latin typeface="Times New Roman"/>
+              </a:rPr>
+              <a:t>100% validated on authentic MoSPI datasets (expanded to 105,000 multi-year records spanning 2019-2024 across all 33 States/UTs).</a:t>
             </a:r>
           </a:p>
           <a:p>
@@ -5595,14 +5119,24 @@
               <a:spcBef>
                 <a:spcPts val="300"/>
               </a:spcBef>
-              <a:defRPr sz="1100">
-                <a:solidFill>
-                  <a:srgbClr val="0F172A"/>
-                </a:solidFill>
-              </a:defRPr>
-            </a:pPr>
-            <a:r>
-              <a:t>  - Technical Scalability: Sub-second latency (&lt;15ms per work inference), allowing instant pre-sanction screening as a live middleware plugin inside e-SAKSHI.</a:t>
+            </a:pPr>
+            <a:r>
+              <a:rPr b="1" sz="1150">
+                <a:solidFill>
+                  <a:srgbClr val="1D4477"/>
+                </a:solidFill>
+                <a:latin typeface="Times New Roman"/>
+              </a:rPr>
+              <a:t>  - Technical Scalability: </a:t>
+            </a:r>
+            <a:r>
+              <a:rPr b="0" sz="1150">
+                <a:solidFill>
+                  <a:srgbClr val="1E293B"/>
+                </a:solidFill>
+                <a:latin typeface="Times New Roman"/>
+              </a:rPr>
+              <a:t>Sub-second inference (&lt;15ms per work), allowing seamless real-time pre-sanction screening as a plug-in inside e-SAKSHI.</a:t>
             </a:r>
           </a:p>
           <a:p>
@@ -5610,28 +5144,38 @@
               <a:spcBef>
                 <a:spcPts val="300"/>
               </a:spcBef>
-              <a:defRPr sz="1100">
-                <a:solidFill>
-                  <a:srgbClr val="0F172A"/>
-                </a:solidFill>
-              </a:defRPr>
-            </a:pPr>
-            <a:r>
-              <a:t>  - Zero Operational Friction: AI model operates exclusively on mandatory fields already submitted by MPs and district authorities (no additional forms required).</a:t>
-            </a:r>
-          </a:p>
-        </p:txBody>
-      </p:sp>
-      <p:sp>
-        <p:nvSpPr>
-          <p:cNvPr id="10" name="TextBox 9"/>
+            </a:pPr>
+            <a:r>
+              <a:rPr b="1" sz="1150">
+                <a:solidFill>
+                  <a:srgbClr val="1D4477"/>
+                </a:solidFill>
+                <a:latin typeface="Times New Roman"/>
+              </a:rPr>
+              <a:t>  - Zero Extra Burden: </a:t>
+            </a:r>
+            <a:r>
+              <a:rPr b="0" sz="1150">
+                <a:solidFill>
+                  <a:srgbClr val="1E293B"/>
+                </a:solidFill>
+                <a:latin typeface="Times New Roman"/>
+              </a:rPr>
+              <a:t>Requires zero additional manual forms from MPs or district officers; extracts existing mandatory data fields.</a:t>
+            </a:r>
+          </a:p>
+        </p:txBody>
+      </p:sp>
+      <p:sp>
+        <p:nvSpPr>
+          <p:cNvPr id="7" name="TextBox 6"/>
           <p:cNvSpPr txBox="1"/>
           <p:nvPr/>
         </p:nvSpPr>
         <p:spPr>
           <a:xfrm>
-            <a:off x="548640" y="2926080"/>
-            <a:ext cx="10972800" cy="1463040"/>
+            <a:off x="548640" y="2971800"/>
+            <a:ext cx="11064240" cy="1600200"/>
           </a:xfrm>
           <a:prstGeom prst="rect">
             <a:avLst/>
@@ -5645,7 +5189,7 @@
           <a:lstStyle/>
           <a:p>
             <a:pPr>
-              <a:defRPr sz="1400" b="1">
+              <a:defRPr sz="1500" b="1">
                 <a:solidFill>
                   <a:srgbClr val="000000"/>
                 </a:solidFill>
@@ -5661,14 +5205,24 @@
               <a:spcBef>
                 <a:spcPts val="300"/>
               </a:spcBef>
-              <a:defRPr sz="1100">
-                <a:solidFill>
-                  <a:srgbClr val="0F172A"/>
-                </a:solidFill>
-              </a:defRPr>
-            </a:pPr>
-            <a:r>
-              <a:t>  - Algorithmic Risk (Zero-Distance KNN Collapse): Public works data contains thousands of identical civil works (e.g. ₹1.5L handpumps) that distort standard neighborhood density metrics.</a:t>
+            </a:pPr>
+            <a:r>
+              <a:rPr b="1" sz="1150">
+                <a:solidFill>
+                  <a:srgbClr val="1D4477"/>
+                </a:solidFill>
+                <a:latin typeface="Times New Roman"/>
+              </a:rPr>
+              <a:t>  - Algorithmic Risk (Zero-Distance KNN Collapse): </a:t>
+            </a:r>
+            <a:r>
+              <a:rPr b="0" sz="1150">
+                <a:solidFill>
+                  <a:srgbClr val="1E293B"/>
+                </a:solidFill>
+                <a:latin typeface="Times New Roman"/>
+              </a:rPr>
+              <a:t>Public works have thousands of identical repetitive civil works that distort standard KNN distance calculations.</a:t>
             </a:r>
           </a:p>
           <a:p>
@@ -5676,14 +5230,24 @@
               <a:spcBef>
                 <a:spcPts val="300"/>
               </a:spcBef>
-              <a:defRPr sz="1100">
-                <a:solidFill>
-                  <a:srgbClr val="0F172A"/>
-                </a:solidFill>
-              </a:defRPr>
-            </a:pPr>
-            <a:r>
-              <a:t>  - Operational Risk (Field Officer Resistance): District vigilance officers reject black-box AI algorithms because they cannot legally justify scores in parliamentary reviews.</a:t>
+            </a:pPr>
+            <a:r>
+              <a:rPr b="1" sz="1150">
+                <a:solidFill>
+                  <a:srgbClr val="1D4477"/>
+                </a:solidFill>
+                <a:latin typeface="Times New Roman"/>
+              </a:rPr>
+              <a:t>  - Operational Risk (Auditor Adoption): </a:t>
+            </a:r>
+            <a:r>
+              <a:rPr b="0" sz="1150">
+                <a:solidFill>
+                  <a:srgbClr val="1E293B"/>
+                </a:solidFill>
+                <a:latin typeface="Times New Roman"/>
+              </a:rPr>
+              <a:t>District vigilance officers reject black-box AI algorithms because they cannot legally justify scores in parliamentary reviews.</a:t>
             </a:r>
           </a:p>
           <a:p>
@@ -5691,28 +5255,38 @@
               <a:spcBef>
                 <a:spcPts val="300"/>
               </a:spcBef>
-              <a:defRPr sz="1100">
-                <a:solidFill>
-                  <a:srgbClr val="0F172A"/>
-                </a:solidFill>
-              </a:defRPr>
-            </a:pPr>
-            <a:r>
-              <a:t>  - False Positive Risk: Megaprojects (e.g. ₹2 Cr regional trauma center) appear as extreme statistical outliers despite being 100% legitimate and authorized.</a:t>
-            </a:r>
-          </a:p>
-        </p:txBody>
-      </p:sp>
-      <p:sp>
-        <p:nvSpPr>
-          <p:cNvPr id="11" name="TextBox 10"/>
+            </a:pPr>
+            <a:r>
+              <a:rPr b="1" sz="1150">
+                <a:solidFill>
+                  <a:srgbClr val="1D4477"/>
+                </a:solidFill>
+                <a:latin typeface="Times New Roman"/>
+              </a:rPr>
+              <a:t>  - False Positive Risk: </a:t>
+            </a:r>
+            <a:r>
+              <a:rPr b="0" sz="1150">
+                <a:solidFill>
+                  <a:srgbClr val="1E293B"/>
+                </a:solidFill>
+                <a:latin typeface="Times New Roman"/>
+              </a:rPr>
+              <a:t>Legitimate mega-projects (e.g. ₹2 Cr trauma center) look like extreme statistical outliers despite being completely genuine.</a:t>
+            </a:r>
+          </a:p>
+        </p:txBody>
+      </p:sp>
+      <p:sp>
+        <p:nvSpPr>
+          <p:cNvPr id="8" name="TextBox 7"/>
           <p:cNvSpPr txBox="1"/>
           <p:nvPr/>
         </p:nvSpPr>
         <p:spPr>
           <a:xfrm>
-            <a:off x="548640" y="4480560"/>
-            <a:ext cx="10972800" cy="1463040"/>
+            <a:off x="548640" y="4663440"/>
+            <a:ext cx="11064240" cy="1600200"/>
           </a:xfrm>
           <a:prstGeom prst="rect">
             <a:avLst/>
@@ -5726,7 +5300,7 @@
           <a:lstStyle/>
           <a:p>
             <a:pPr>
-              <a:defRPr sz="1400" b="1">
+              <a:defRPr sz="1500" b="1">
                 <a:solidFill>
                   <a:srgbClr val="000000"/>
                 </a:solidFill>
@@ -5742,14 +5316,24 @@
               <a:spcBef>
                 <a:spcPts val="300"/>
               </a:spcBef>
-              <a:defRPr sz="1100">
-                <a:solidFill>
-                  <a:srgbClr val="0F172A"/>
-                </a:solidFill>
-              </a:defRPr>
-            </a:pPr>
-            <a:r>
-              <a:t>  - Profile-Deduplicated LOF: Canonical feature grouping deduplicates repetitive civil works before distance calculations, preserving true neighborhood integrity.</a:t>
+            </a:pPr>
+            <a:r>
+              <a:rPr b="1" sz="1150">
+                <a:solidFill>
+                  <a:srgbClr val="1D4477"/>
+                </a:solidFill>
+                <a:latin typeface="Times New Roman"/>
+              </a:rPr>
+              <a:t>  - Profile-Deduplicated LOF: </a:t>
+            </a:r>
+            <a:r>
+              <a:rPr b="0" sz="1150">
+                <a:solidFill>
+                  <a:srgbClr val="1E293B"/>
+                </a:solidFill>
+                <a:latin typeface="Times New Roman"/>
+              </a:rPr>
+              <a:t>Groups identical civil works profiles into canonical representations before KNN, preserving true neighborhood reachability density.</a:t>
             </a:r>
           </a:p>
           <a:p>
@@ -5757,14 +5341,24 @@
               <a:spcBef>
                 <a:spcPts val="300"/>
               </a:spcBef>
-              <a:defRPr sz="1100">
-                <a:solidFill>
-                  <a:srgbClr val="0F172A"/>
-                </a:solidFill>
-              </a:defRPr>
-            </a:pPr>
-            <a:r>
-              <a:t>  - Bilingual Plain-Language Explainability: Translates mathematical metrics into plain English and सरल हिंदी with exact CAG statutory references (GFR 149, Para 5.2).</a:t>
+            </a:pPr>
+            <a:r>
+              <a:rPr b="1" sz="1150">
+                <a:solidFill>
+                  <a:srgbClr val="1D4477"/>
+                </a:solidFill>
+                <a:latin typeface="Times New Roman"/>
+              </a:rPr>
+              <a:t>  - Bilingual Plain-Language Diagnostics: </a:t>
+            </a:r>
+            <a:r>
+              <a:rPr b="0" sz="1150">
+                <a:solidFill>
+                  <a:srgbClr val="1E293B"/>
+                </a:solidFill>
+                <a:latin typeface="Times New Roman"/>
+              </a:rPr>
+              <a:t>Translates mathematical metrics into plain English and सरल हिंदी with exact statutory CAG citations (GFR 149, Para 5.2).</a:t>
             </a:r>
           </a:p>
           <a:p>
@@ -5772,14 +5366,24 @@
               <a:spcBef>
                 <a:spcPts val="300"/>
               </a:spcBef>
-              <a:defRPr sz="1100">
-                <a:solidFill>
-                  <a:srgbClr val="0F172A"/>
-                </a:solidFill>
-              </a:defRPr>
-            </a:pPr>
-            <a:r>
-              <a:t>  - Dual-Layer Hybrid Logic &amp; Feedback Loop: Statistically extreme legitimate works pass through CAG rules; human auditor resolutions dynamically calibrate decision thresholds.</a:t>
+            </a:pPr>
+            <a:r>
+              <a:rPr b="1" sz="1150">
+                <a:solidFill>
+                  <a:srgbClr val="1D4477"/>
+                </a:solidFill>
+                <a:latin typeface="Times New Roman"/>
+              </a:rPr>
+              <a:t>  - Dual-Layer Hybrid Logic &amp; Feedback Loop: </a:t>
+            </a:r>
+            <a:r>
+              <a:rPr b="0" sz="1150">
+                <a:solidFill>
+                  <a:srgbClr val="1E293B"/>
+                </a:solidFill>
+                <a:latin typeface="Times New Roman"/>
+              </a:rPr>
+              <a:t>Statutory rules validate legitimate high-budget works; human officer resolutions dynamically calibrate decision thresholds.</a:t>
             </a:r>
           </a:p>
         </p:txBody>
@@ -5795,6 +5399,14 @@
 <file path=ppt/slides/slide5.xml><?xml version="1.0" encoding="utf-8"?>
 <p:sld xmlns:a="http://schemas.openxmlformats.org/drawingml/2006/main" xmlns:p="http://schemas.openxmlformats.org/presentationml/2006/main" xmlns:r="http://schemas.openxmlformats.org/officeDocument/2006/relationships">
   <p:cSld>
+    <p:bg>
+      <p:bgPr>
+        <a:solidFill>
+          <a:srgbClr val="FFFFFF"/>
+        </a:solidFill>
+        <a:effectLst/>
+      </p:bgPr>
+    </p:bg>
     <p:spTree>
       <p:nvGrpSpPr>
         <p:cNvPr id="1" name=""/>
@@ -5804,23 +5416,25 @@
       <p:grpSpPr/>
       <p:sp>
         <p:nvSpPr>
-          <p:cNvPr id="2" name="Rectangle 1"/>
+          <p:cNvPr id="2" name="Oval 1"/>
           <p:cNvSpPr/>
           <p:nvPr/>
         </p:nvSpPr>
         <p:spPr>
           <a:xfrm>
-            <a:off x="0" y="0"/>
-            <a:ext cx="12191695" cy="6858000"/>
-          </a:xfrm>
-          <a:prstGeom prst="rect">
+            <a:off x="548640" y="182880"/>
+            <a:ext cx="1280160" cy="960120"/>
+          </a:xfrm>
+          <a:prstGeom prst="ellipse">
             <a:avLst/>
           </a:prstGeom>
           <a:solidFill>
             <a:srgbClr val="FFFFFF"/>
           </a:solidFill>
-          <a:ln>
-            <a:noFill/>
+          <a:ln w="31750">
+            <a:solidFill>
+              <a:srgbClr val="5B21B6"/>
+            </a:solidFill>
           </a:ln>
         </p:spPr>
         <p:style>
@@ -5838,86 +5452,41 @@
           </a:fontRef>
         </p:style>
         <p:txBody>
-          <a:bodyPr rtlCol="0" anchor="ctr"/>
-          <a:lstStyle/>
-          <a:p>
-            <a:pPr algn="ctr"/>
-          </a:p>
-        </p:txBody>
-      </p:sp>
-      <p:sp>
-        <p:nvSpPr>
-          <p:cNvPr id="3" name="Oval 2"/>
-          <p:cNvSpPr/>
-          <p:nvPr/>
-        </p:nvSpPr>
-        <p:spPr>
-          <a:xfrm>
-            <a:off x="548640" y="320040"/>
-            <a:ext cx="1188720" cy="960120"/>
-          </a:xfrm>
-          <a:prstGeom prst="ellipse">
-            <a:avLst/>
-          </a:prstGeom>
-          <a:solidFill>
-            <a:srgbClr val="FFFFFF"/>
-          </a:solidFill>
-          <a:ln w="25400">
-            <a:solidFill>
-              <a:srgbClr val="5B3E84"/>
-            </a:solidFill>
-          </a:ln>
-        </p:spPr>
-        <p:style>
-          <a:lnRef idx="1">
-            <a:schemeClr val="accent1"/>
-          </a:lnRef>
-          <a:fillRef idx="3">
-            <a:schemeClr val="accent1"/>
-          </a:fillRef>
-          <a:effectRef idx="2">
-            <a:schemeClr val="accent1"/>
-          </a:effectRef>
-          <a:fontRef idx="minor">
-            <a:schemeClr val="lt1"/>
-          </a:fontRef>
-        </p:style>
-        <p:txBody>
           <a:bodyPr rtlCol="0" anchor="ctr" wrap="square"/>
           <a:lstStyle/>
           <a:p>
             <a:pPr algn="ctr">
-              <a:defRPr sz="1000">
-                <a:solidFill>
-                  <a:srgbClr val="0F172A"/>
-                </a:solidFill>
-                <a:latin typeface="Times New Roman"/>
-              </a:defRPr>
-            </a:pPr>
-            <a:r>
-              <a:t>Your</a:t>
+              <a:defRPr sz="950" b="1">
+                <a:solidFill>
+                  <a:srgbClr val="1E293B"/>
+                </a:solidFill>
+                <a:latin typeface="Times New Roman"/>
+              </a:defRPr>
+            </a:pPr>
+            <a:r>
+              <a:t>Team</a:t>
             </a:r>
             <a:br/>
             <a:r>
-              <a:t>Team</a:t>
+              <a:t>RunTime</a:t>
             </a:r>
             <a:br/>
             <a:r>
-              <a:t>Name</a:t>
-            </a:r>
-          </a:p>
-        </p:txBody>
-      </p:sp>
-      <p:sp>
-        <p:nvSpPr>
-          <p:cNvPr id="4" name="TextBox 3"/>
+              <a:t>Terror</a:t>
+            </a:r>
+          </a:p>
+        </p:txBody>
+      </p:sp>
+      <p:sp>
+        <p:nvSpPr>
+          <p:cNvPr id="3" name="TextBox 2"/>
           <p:cNvSpPr txBox="1"/>
           <p:nvPr/>
         </p:nvSpPr>
         <p:spPr>
           <a:xfrm>
-            <a:off x="2286000" y="365760"/>
-            <a:ext cx="6858000" cy="731520"/>
+            <a:off x="2011680" y="228600"/>
+            <a:ext cx="8046720" cy="822960"/>
           </a:xfrm>
           <a:prstGeom prst="rect">
             <a:avLst/>
@@ -5946,7 +5515,7 @@
       </p:sp>
       <p:pic>
         <p:nvPicPr>
-          <p:cNvPr id="5" name="Picture 4" descr="sih_logo.png"/>
+          <p:cNvPr id="4" name="Picture 3" descr="sih_logo_transparent.png"/>
           <p:cNvPicPr>
             <a:picLocks noChangeAspect="1"/>
           </p:cNvPicPr>
@@ -5960,8 +5529,8 @@
         </p:blipFill>
         <p:spPr>
           <a:xfrm>
-            <a:off x="9601200" y="228600"/>
-            <a:ext cx="2194560" cy="640080"/>
+            <a:off x="10881360" y="109728"/>
+            <a:ext cx="868680" cy="1371600"/>
           </a:xfrm>
           <a:prstGeom prst="rect">
             <a:avLst/>
@@ -5970,23 +5539,25 @@
       </p:pic>
       <p:sp>
         <p:nvSpPr>
-          <p:cNvPr id="6" name="Rectangle 5"/>
+          <p:cNvPr id="5" name="Rectangle 4"/>
           <p:cNvSpPr/>
           <p:nvPr/>
         </p:nvSpPr>
         <p:spPr>
           <a:xfrm>
-            <a:off x="0" y="6217920"/>
-            <a:ext cx="12191695" cy="640080"/>
+            <a:off x="0" y="6446520"/>
+            <a:ext cx="12191695" cy="411480"/>
           </a:xfrm>
           <a:prstGeom prst="rect">
             <a:avLst/>
           </a:prstGeom>
           <a:solidFill>
-            <a:srgbClr val="0F62AC"/>
+            <a:srgbClr val="145DA0"/>
           </a:solidFill>
           <a:ln>
-            <a:noFill/>
+            <a:solidFill>
+              <a:srgbClr val="145DA0"/>
+            </a:solidFill>
           </a:ln>
         </p:spPr>
         <p:style>
@@ -6004,23 +5575,33 @@
           </a:fontRef>
         </p:style>
         <p:txBody>
-          <a:bodyPr rtlCol="0" anchor="ctr"/>
-          <a:lstStyle/>
-          <a:p>
-            <a:pPr algn="ctr"/>
-          </a:p>
-        </p:txBody>
-      </p:sp>
-      <p:sp>
-        <p:nvSpPr>
-          <p:cNvPr id="7" name="TextBox 6"/>
+          <a:bodyPr rtlCol="0" anchor="ctr" wrap="square"/>
+          <a:lstStyle/>
+          <a:p>
+            <a:pPr algn="l">
+              <a:defRPr sz="1100" b="1">
+                <a:solidFill>
+                  <a:srgbClr val="FFFFFF"/>
+                </a:solidFill>
+                <a:latin typeface="Arial"/>
+              </a:defRPr>
+            </a:pPr>
+            <a:r>
+              <a:t>Team ID: T106  |  Team Name: RunTime Terror                                                                                               5</a:t>
+            </a:r>
+          </a:p>
+        </p:txBody>
+      </p:sp>
+      <p:sp>
+        <p:nvSpPr>
+          <p:cNvPr id="6" name="TextBox 5"/>
           <p:cNvSpPr txBox="1"/>
           <p:nvPr/>
         </p:nvSpPr>
         <p:spPr>
           <a:xfrm>
-            <a:off x="2743200" y="6291072"/>
-            <a:ext cx="6705295" cy="457200"/>
+            <a:off x="548640" y="1280160"/>
+            <a:ext cx="11064240" cy="2377440"/>
           </a:xfrm>
           <a:prstGeom prst="rect">
             <a:avLst/>
@@ -6033,64 +5614,130 @@
           </a:bodyPr>
           <a:lstStyle/>
           <a:p>
-            <a:pPr algn="ctr">
-              <a:defRPr sz="1100">
-                <a:solidFill>
-                  <a:srgbClr val="FFFFFF"/>
-                </a:solidFill>
-              </a:defRPr>
-            </a:pPr>
-            <a:r>
-              <a:t>@SIH Idea submission- Template</a:t>
-            </a:r>
-          </a:p>
-        </p:txBody>
-      </p:sp>
-      <p:sp>
-        <p:nvSpPr>
-          <p:cNvPr id="8" name="TextBox 7"/>
+            <a:pPr>
+              <a:defRPr sz="1550" b="1">
+                <a:solidFill>
+                  <a:srgbClr val="000000"/>
+                </a:solidFill>
+                <a:latin typeface="Times New Roman"/>
+              </a:defRPr>
+            </a:pPr>
+            <a:r>
+              <a:t>• Potential impact on the target audience</a:t>
+            </a:r>
+          </a:p>
+          <a:p>
+            <a:pPr>
+              <a:spcBef>
+                <a:spcPts val="400"/>
+              </a:spcBef>
+            </a:pPr>
+            <a:r>
+              <a:rPr b="1" sz="1150">
+                <a:solidFill>
+                  <a:srgbClr val="1D4477"/>
+                </a:solidFill>
+                <a:latin typeface="Times New Roman"/>
+              </a:rPr>
+              <a:t>  - MoSPI National Oversight: </a:t>
+            </a:r>
+            <a:r>
+              <a:rPr b="0" sz="1150">
+                <a:solidFill>
+                  <a:srgbClr val="1E293B"/>
+                </a:solidFill>
+                <a:latin typeface="Times New Roman"/>
+              </a:rPr>
+              <a:t>Transforms national scheme surveillance from periodic sample autopsies into automated, 100% continuous oversight.</a:t>
+            </a:r>
+          </a:p>
+          <a:p>
+            <a:pPr>
+              <a:spcBef>
+                <a:spcPts val="400"/>
+              </a:spcBef>
+            </a:pPr>
+            <a:r>
+              <a:rPr b="1" sz="1150">
+                <a:solidFill>
+                  <a:srgbClr val="1D4477"/>
+                </a:solidFill>
+                <a:latin typeface="Times New Roman"/>
+              </a:rPr>
+              <a:t>  - District Authorities &amp; IDAs: </a:t>
+            </a:r>
+            <a:r>
+              <a:rPr b="0" sz="1150">
+                <a:solidFill>
+                  <a:srgbClr val="1E293B"/>
+                </a:solidFill>
+                <a:latin typeface="Times New Roman"/>
+              </a:rPr>
+              <a:t>Instant pre-sanction gatekeeping prevents illegal tender splitting before vouchers are signed or payments disbursed.</a:t>
+            </a:r>
+          </a:p>
+          <a:p>
+            <a:pPr>
+              <a:spcBef>
+                <a:spcPts val="400"/>
+              </a:spcBef>
+            </a:pPr>
+            <a:r>
+              <a:rPr b="1" sz="1150">
+                <a:solidFill>
+                  <a:srgbClr val="1D4477"/>
+                </a:solidFill>
+                <a:latin typeface="Times New Roman"/>
+              </a:rPr>
+              <a:t>  - CAG &amp; State AGs: </a:t>
+            </a:r>
+            <a:r>
+              <a:rPr b="0" sz="1150">
+                <a:solidFill>
+                  <a:srgbClr val="1E293B"/>
+                </a:solidFill>
+                <a:latin typeface="Times New Roman"/>
+              </a:rPr>
+              <a:t>Replaces tedious manual voucher sampling with prioritized, high-probability anomaly dossiers and pre-compiled legal checklists.</a:t>
+            </a:r>
+          </a:p>
+          <a:p>
+            <a:pPr>
+              <a:spcBef>
+                <a:spcPts val="400"/>
+              </a:spcBef>
+            </a:pPr>
+            <a:r>
+              <a:rPr b="1" sz="1150">
+                <a:solidFill>
+                  <a:srgbClr val="1D4477"/>
+                </a:solidFill>
+                <a:latin typeface="Times New Roman"/>
+              </a:rPr>
+              <a:t>  - Rural Citizens &amp; Constituents: </a:t>
+            </a:r>
+            <a:r>
+              <a:rPr b="0" sz="1150">
+                <a:solidFill>
+                  <a:srgbClr val="1E293B"/>
+                </a:solidFill>
+                <a:latin typeface="Times New Roman"/>
+              </a:rPr>
+              <a:t>Ensures promised community assets (drinking water, schools, primary health) are physically delivered without ghost diversion.</a:t>
+            </a:r>
+          </a:p>
+        </p:txBody>
+      </p:sp>
+      <p:sp>
+        <p:nvSpPr>
+          <p:cNvPr id="7" name="TextBox 6"/>
           <p:cNvSpPr txBox="1"/>
           <p:nvPr/>
         </p:nvSpPr>
         <p:spPr>
           <a:xfrm>
-            <a:off x="10972800" y="6291072"/>
-            <a:ext cx="914400" cy="457200"/>
-          </a:xfrm>
-          <a:prstGeom prst="rect">
-            <a:avLst/>
-          </a:prstGeom>
-          <a:noFill/>
-        </p:spPr>
-        <p:txBody>
-          <a:bodyPr wrap="none">
-            <a:spAutoFit/>
-          </a:bodyPr>
-          <a:lstStyle/>
-          <a:p>
-            <a:pPr algn="r">
-              <a:defRPr sz="1200" b="1">
-                <a:solidFill>
-                  <a:srgbClr val="FFFFFF"/>
-                </a:solidFill>
-              </a:defRPr>
-            </a:pPr>
-            <a:r>
-              <a:t>5</a:t>
-            </a:r>
-          </a:p>
-        </p:txBody>
-      </p:sp>
-      <p:sp>
-        <p:nvSpPr>
-          <p:cNvPr id="9" name="TextBox 8"/>
-          <p:cNvSpPr txBox="1"/>
-          <p:nvPr/>
-        </p:nvSpPr>
-        <p:spPr>
-          <a:xfrm>
-            <a:off x="548640" y="1463040"/>
-            <a:ext cx="10972800" cy="2194560"/>
+            <a:off x="548640" y="3749040"/>
+            <a:ext cx="11064240" cy="2377440"/>
           </a:xfrm>
           <a:prstGeom prst="rect">
             <a:avLst/>
@@ -6104,7 +5751,7 @@
           <a:lstStyle/>
           <a:p>
             <a:pPr>
-              <a:defRPr sz="1500" b="1">
+              <a:defRPr sz="1550" b="1">
                 <a:solidFill>
                   <a:srgbClr val="000000"/>
                 </a:solidFill>
@@ -6112,163 +5759,107 @@
               </a:defRPr>
             </a:pPr>
             <a:r>
-              <a:t>• Potential impact on the target audience</a:t>
+              <a:t>• Benefits of the solution (social, economic, environmental, etc.)</a:t>
             </a:r>
           </a:p>
           <a:p>
             <a:pPr>
               <a:spcBef>
-                <a:spcPts val="500"/>
+                <a:spcPts val="400"/>
               </a:spcBef>
-              <a:defRPr sz="1100">
-                <a:solidFill>
-                  <a:srgbClr val="0F172A"/>
-                </a:solidFill>
-              </a:defRPr>
-            </a:pPr>
-            <a:r>
-              <a:t>  - Ministry of Statistics &amp; Programme Implementation (MoSPI): Transforms scheme administration from periodic sample reviews into automated, 100% continuous national fund surveillance.</a:t>
+            </a:pPr>
+            <a:r>
+              <a:rPr b="1" sz="1150">
+                <a:solidFill>
+                  <a:srgbClr val="1D4477"/>
+                </a:solidFill>
+                <a:latin typeface="Times New Roman"/>
+              </a:rPr>
+              <a:t>  - Economic Benefits: </a:t>
+            </a:r>
+            <a:r>
+              <a:rPr b="0" sz="1150">
+                <a:solidFill>
+                  <a:srgbClr val="1E293B"/>
+                </a:solidFill>
+                <a:latin typeface="Times New Roman"/>
+              </a:rPr>
+              <a:t>Screens ₹4,000+ Cr annual scheme flow. Caught ₹432.5 Cr in high-risk works and ₹287 Cr in frozen capital. Estimated ₹100–₹200 Crore annual taxpayer savings.</a:t>
             </a:r>
           </a:p>
           <a:p>
             <a:pPr>
               <a:spcBef>
-                <a:spcPts val="500"/>
+                <a:spcPts val="400"/>
               </a:spcBef>
-              <a:defRPr sz="1100">
-                <a:solidFill>
-                  <a:srgbClr val="0F172A"/>
-                </a:solidFill>
-              </a:defRPr>
-            </a:pPr>
-            <a:r>
-              <a:t>  - District Authorities &amp; Implementing District Authorities (IDAs): Instant pre-sanction gatekeeping prevents illegal tender splitting before vouchers are signed or payments disbursed.</a:t>
+            </a:pPr>
+            <a:r>
+              <a:rPr b="1" sz="1150">
+                <a:solidFill>
+                  <a:srgbClr val="1D4477"/>
+                </a:solidFill>
+                <a:latin typeface="Times New Roman"/>
+              </a:rPr>
+              <a:t>  - Social &amp; Governance: </a:t>
+            </a:r>
+            <a:r>
+              <a:rPr b="0" sz="1150">
+                <a:solidFill>
+                  <a:srgbClr val="1E293B"/>
+                </a:solidFill>
+                <a:latin typeface="Times New Roman"/>
+              </a:rPr>
+              <a:t>Eliminates political patronage cartels; builds citizen trust through transparent, public-facing constituency spending scorecards.</a:t>
             </a:r>
           </a:p>
           <a:p>
             <a:pPr>
               <a:spcBef>
-                <a:spcPts val="500"/>
+                <a:spcPts val="400"/>
               </a:spcBef>
-              <a:defRPr sz="1100">
-                <a:solidFill>
-                  <a:srgbClr val="0F172A"/>
-                </a:solidFill>
-              </a:defRPr>
-            </a:pPr>
-            <a:r>
-              <a:t>  - Comptroller and Auditor General (CAG) &amp; State AGs: Replaces tedious manual voucher sampling with prioritized, high-probability anomaly dossiers and pre-compiled legal checklists.</a:t>
+            </a:pPr>
+            <a:r>
+              <a:rPr b="1" sz="1150">
+                <a:solidFill>
+                  <a:srgbClr val="1D4477"/>
+                </a:solidFill>
+                <a:latin typeface="Times New Roman"/>
+              </a:rPr>
+              <a:t>  - Operational Efficiency: </a:t>
+            </a:r>
+            <a:r>
+              <a:rPr b="0" sz="1150">
+                <a:solidFill>
+                  <a:srgbClr val="1E293B"/>
+                </a:solidFill>
+                <a:latin typeface="Times New Roman"/>
+              </a:rPr>
+              <a:t>Reduces audit lead-time from 12–24 months to under 15 milliseconds, eliminating 95% of manual file-checking drudgery.</a:t>
             </a:r>
           </a:p>
           <a:p>
             <a:pPr>
               <a:spcBef>
-                <a:spcPts val="500"/>
+                <a:spcPts val="400"/>
               </a:spcBef>
-              <a:defRPr sz="1100">
-                <a:solidFill>
-                  <a:srgbClr val="0F172A"/>
-                </a:solidFill>
-              </a:defRPr>
-            </a:pPr>
-            <a:r>
-              <a:t>  - Rural Citizens &amp; Constituents: Ensures promised community assets (drinking water borewells, school additions, primary health centres) are physically delivered without ghost diversion.</a:t>
-            </a:r>
-          </a:p>
-        </p:txBody>
-      </p:sp>
-      <p:sp>
-        <p:nvSpPr>
-          <p:cNvPr id="10" name="TextBox 9"/>
-          <p:cNvSpPr txBox="1"/>
-          <p:nvPr/>
-        </p:nvSpPr>
-        <p:spPr>
-          <a:xfrm>
-            <a:off x="548640" y="3794760"/>
-            <a:ext cx="10972800" cy="2194560"/>
-          </a:xfrm>
-          <a:prstGeom prst="rect">
-            <a:avLst/>
-          </a:prstGeom>
-          <a:noFill/>
-        </p:spPr>
-        <p:txBody>
-          <a:bodyPr wrap="square">
-            <a:spAutoFit/>
-          </a:bodyPr>
-          <a:lstStyle/>
-          <a:p>
-            <a:pPr>
-              <a:defRPr sz="1500" b="1">
-                <a:solidFill>
-                  <a:srgbClr val="000000"/>
-                </a:solidFill>
-                <a:latin typeface="Times New Roman"/>
-              </a:defRPr>
-            </a:pPr>
-            <a:r>
-              <a:t>• Benefits of the solution (social, economic, environmental, etc.)</a:t>
-            </a:r>
-          </a:p>
-          <a:p>
-            <a:pPr>
-              <a:spcBef>
-                <a:spcPts val="500"/>
-              </a:spcBef>
-              <a:defRPr sz="1100">
-                <a:solidFill>
-                  <a:srgbClr val="0F172A"/>
-                </a:solidFill>
-              </a:defRPr>
-            </a:pPr>
-            <a:r>
-              <a:t>  - Economic Benefits: Screens ₹4,000+ Cr annual scheme flow. Caught ₹432.5 Cr in high-risk works and ₹287 Cr in frozen capital. Estimated ₹100–₹200 Crore annual taxpayer savings.</a:t>
-            </a:r>
-          </a:p>
-          <a:p>
-            <a:pPr>
-              <a:spcBef>
-                <a:spcPts val="500"/>
-              </a:spcBef>
-              <a:defRPr sz="1100">
-                <a:solidFill>
-                  <a:srgbClr val="0F172A"/>
-                </a:solidFill>
-              </a:defRPr>
-            </a:pPr>
-            <a:r>
-              <a:t>  - Social &amp; Governance Benefits: Eliminates political patronage cartels; builds citizen trust through transparent, public-facing constituency spending scorecards.</a:t>
-            </a:r>
-          </a:p>
-          <a:p>
-            <a:pPr>
-              <a:spcBef>
-                <a:spcPts val="500"/>
-              </a:spcBef>
-              <a:defRPr sz="1100">
-                <a:solidFill>
-                  <a:srgbClr val="0F172A"/>
-                </a:solidFill>
-              </a:defRPr>
-            </a:pPr>
-            <a:r>
-              <a:t>  - Operational &amp; Time Efficiency: Reduces audit lead-time from 12–24 months to under 15 milliseconds, while eliminating 95% of manual file-checking drudgery for district collectors.</a:t>
-            </a:r>
-          </a:p>
-          <a:p>
-            <a:pPr>
-              <a:spcBef>
-                <a:spcPts val="500"/>
-              </a:spcBef>
-              <a:defRPr sz="1100">
-                <a:solidFill>
-                  <a:srgbClr val="0F172A"/>
-                </a:solidFill>
-              </a:defRPr>
-            </a:pPr>
-            <a:r>
-              <a:t>  - Environmental &amp; Infrastructure Integrity: Fast-tracks pending rural solar electrification, wastewater drainage, and flood protection works delayed by administrative dormancy.</a:t>
+            </a:pPr>
+            <a:r>
+              <a:rPr b="1" sz="1150">
+                <a:solidFill>
+                  <a:srgbClr val="1D4477"/>
+                </a:solidFill>
+                <a:latin typeface="Times New Roman"/>
+              </a:rPr>
+              <a:t>  - Infrastructure Integrity: </a:t>
+            </a:r>
+            <a:r>
+              <a:rPr b="0" sz="1150">
+                <a:solidFill>
+                  <a:srgbClr val="1E293B"/>
+                </a:solidFill>
+                <a:latin typeface="Times New Roman"/>
+              </a:rPr>
+              <a:t>Fast-tracks pending rural solar electrification, wastewater drainage, and flood protection works delayed by administrative dormancy.</a:t>
             </a:r>
           </a:p>
         </p:txBody>
@@ -6284,6 +5875,14 @@
 <file path=ppt/slides/slide6.xml><?xml version="1.0" encoding="utf-8"?>
 <p:sld xmlns:a="http://schemas.openxmlformats.org/drawingml/2006/main" xmlns:p="http://schemas.openxmlformats.org/presentationml/2006/main" xmlns:r="http://schemas.openxmlformats.org/officeDocument/2006/relationships">
   <p:cSld>
+    <p:bg>
+      <p:bgPr>
+        <a:solidFill>
+          <a:srgbClr val="FFFFFF"/>
+        </a:solidFill>
+        <a:effectLst/>
+      </p:bgPr>
+    </p:bg>
     <p:spTree>
       <p:nvGrpSpPr>
         <p:cNvPr id="1" name=""/>
@@ -6293,23 +5892,25 @@
       <p:grpSpPr/>
       <p:sp>
         <p:nvSpPr>
-          <p:cNvPr id="2" name="Rectangle 1"/>
+          <p:cNvPr id="2" name="Oval 1"/>
           <p:cNvSpPr/>
           <p:nvPr/>
         </p:nvSpPr>
         <p:spPr>
           <a:xfrm>
-            <a:off x="0" y="0"/>
-            <a:ext cx="12191695" cy="6858000"/>
-          </a:xfrm>
-          <a:prstGeom prst="rect">
+            <a:off x="548640" y="182880"/>
+            <a:ext cx="1280160" cy="960120"/>
+          </a:xfrm>
+          <a:prstGeom prst="ellipse">
             <a:avLst/>
           </a:prstGeom>
           <a:solidFill>
             <a:srgbClr val="FFFFFF"/>
           </a:solidFill>
-          <a:ln>
-            <a:noFill/>
+          <a:ln w="31750">
+            <a:solidFill>
+              <a:srgbClr val="5B21B6"/>
+            </a:solidFill>
           </a:ln>
         </p:spPr>
         <p:style>
@@ -6327,86 +5928,41 @@
           </a:fontRef>
         </p:style>
         <p:txBody>
-          <a:bodyPr rtlCol="0" anchor="ctr"/>
-          <a:lstStyle/>
-          <a:p>
-            <a:pPr algn="ctr"/>
-          </a:p>
-        </p:txBody>
-      </p:sp>
-      <p:sp>
-        <p:nvSpPr>
-          <p:cNvPr id="3" name="Oval 2"/>
-          <p:cNvSpPr/>
-          <p:nvPr/>
-        </p:nvSpPr>
-        <p:spPr>
-          <a:xfrm>
-            <a:off x="548640" y="320040"/>
-            <a:ext cx="1188720" cy="960120"/>
-          </a:xfrm>
-          <a:prstGeom prst="ellipse">
-            <a:avLst/>
-          </a:prstGeom>
-          <a:solidFill>
-            <a:srgbClr val="FFFFFF"/>
-          </a:solidFill>
-          <a:ln w="25400">
-            <a:solidFill>
-              <a:srgbClr val="5B3E84"/>
-            </a:solidFill>
-          </a:ln>
-        </p:spPr>
-        <p:style>
-          <a:lnRef idx="1">
-            <a:schemeClr val="accent1"/>
-          </a:lnRef>
-          <a:fillRef idx="3">
-            <a:schemeClr val="accent1"/>
-          </a:fillRef>
-          <a:effectRef idx="2">
-            <a:schemeClr val="accent1"/>
-          </a:effectRef>
-          <a:fontRef idx="minor">
-            <a:schemeClr val="lt1"/>
-          </a:fontRef>
-        </p:style>
-        <p:txBody>
           <a:bodyPr rtlCol="0" anchor="ctr" wrap="square"/>
           <a:lstStyle/>
           <a:p>
             <a:pPr algn="ctr">
-              <a:defRPr sz="1000">
-                <a:solidFill>
-                  <a:srgbClr val="0F172A"/>
-                </a:solidFill>
-                <a:latin typeface="Times New Roman"/>
-              </a:defRPr>
-            </a:pPr>
-            <a:r>
-              <a:t>Your</a:t>
+              <a:defRPr sz="950" b="1">
+                <a:solidFill>
+                  <a:srgbClr val="1E293B"/>
+                </a:solidFill>
+                <a:latin typeface="Times New Roman"/>
+              </a:defRPr>
+            </a:pPr>
+            <a:r>
+              <a:t>Team</a:t>
             </a:r>
             <a:br/>
             <a:r>
-              <a:t>Team</a:t>
+              <a:t>RunTime</a:t>
             </a:r>
             <a:br/>
             <a:r>
-              <a:t>Name</a:t>
-            </a:r>
-          </a:p>
-        </p:txBody>
-      </p:sp>
-      <p:sp>
-        <p:nvSpPr>
-          <p:cNvPr id="4" name="TextBox 3"/>
+              <a:t>Terror</a:t>
+            </a:r>
+          </a:p>
+        </p:txBody>
+      </p:sp>
+      <p:sp>
+        <p:nvSpPr>
+          <p:cNvPr id="3" name="TextBox 2"/>
           <p:cNvSpPr txBox="1"/>
           <p:nvPr/>
         </p:nvSpPr>
         <p:spPr>
           <a:xfrm>
-            <a:off x="2286000" y="365760"/>
-            <a:ext cx="6858000" cy="731520"/>
+            <a:off x="2011680" y="228600"/>
+            <a:ext cx="8046720" cy="822960"/>
           </a:xfrm>
           <a:prstGeom prst="rect">
             <a:avLst/>
@@ -6428,14 +5984,27 @@
               </a:defRPr>
             </a:pPr>
             <a:r>
-              <a:t>RESEARCH AND REFERENCES</a:t>
+              <a:t>OFFICER / AUDITOR WORKFLOW</a:t>
+            </a:r>
+          </a:p>
+          <a:p>
+            <a:pPr algn="ctr">
+              <a:defRPr sz="1000">
+                <a:solidFill>
+                  <a:srgbClr val="475569"/>
+                </a:solidFill>
+                <a:latin typeface="Arial"/>
+              </a:defRPr>
+            </a:pPr>
+            <a:r>
+              <a:t>How a district vigilance officer or auditor moves from a national signal to a CAG-ready case</a:t>
             </a:r>
           </a:p>
         </p:txBody>
       </p:sp>
       <p:pic>
         <p:nvPicPr>
-          <p:cNvPr id="5" name="Picture 4" descr="sih_logo.png"/>
+          <p:cNvPr id="4" name="Picture 3" descr="sih_logo_transparent.png"/>
           <p:cNvPicPr>
             <a:picLocks noChangeAspect="1"/>
           </p:cNvPicPr>
@@ -6449,8 +6018,8 @@
         </p:blipFill>
         <p:spPr>
           <a:xfrm>
-            <a:off x="9601200" y="228600"/>
-            <a:ext cx="2194560" cy="640080"/>
+            <a:off x="10881360" y="109728"/>
+            <a:ext cx="868680" cy="1371600"/>
           </a:xfrm>
           <a:prstGeom prst="rect">
             <a:avLst/>
@@ -6459,23 +6028,25 @@
       </p:pic>
       <p:sp>
         <p:nvSpPr>
-          <p:cNvPr id="6" name="Rectangle 5"/>
+          <p:cNvPr id="5" name="Rectangle 4"/>
           <p:cNvSpPr/>
           <p:nvPr/>
         </p:nvSpPr>
         <p:spPr>
           <a:xfrm>
-            <a:off x="0" y="6217920"/>
-            <a:ext cx="12191695" cy="640080"/>
+            <a:off x="0" y="6446520"/>
+            <a:ext cx="12191695" cy="411480"/>
           </a:xfrm>
           <a:prstGeom prst="rect">
             <a:avLst/>
           </a:prstGeom>
           <a:solidFill>
-            <a:srgbClr val="0F62AC"/>
+            <a:srgbClr val="145DA0"/>
           </a:solidFill>
           <a:ln>
-            <a:noFill/>
+            <a:solidFill>
+              <a:srgbClr val="145DA0"/>
+            </a:solidFill>
           </a:ln>
         </p:spPr>
         <p:style>
@@ -6493,6 +6064,61 @@
           </a:fontRef>
         </p:style>
         <p:txBody>
+          <a:bodyPr rtlCol="0" anchor="ctr" wrap="square"/>
+          <a:lstStyle/>
+          <a:p>
+            <a:pPr algn="l">
+              <a:defRPr sz="1100" b="1">
+                <a:solidFill>
+                  <a:srgbClr val="FFFFFF"/>
+                </a:solidFill>
+                <a:latin typeface="Arial"/>
+              </a:defRPr>
+            </a:pPr>
+            <a:r>
+              <a:t>Team ID: T106  |  Team Name: RunTime Terror                                                                                               6</a:t>
+            </a:r>
+          </a:p>
+        </p:txBody>
+      </p:sp>
+      <p:sp>
+        <p:nvSpPr>
+          <p:cNvPr id="6" name="Rounded Rectangle 5"/>
+          <p:cNvSpPr/>
+          <p:nvPr/>
+        </p:nvSpPr>
+        <p:spPr>
+          <a:xfrm>
+            <a:off x="548640" y="1371600"/>
+            <a:ext cx="1499616" cy="3200400"/>
+          </a:xfrm>
+          <a:prstGeom prst="roundRect">
+            <a:avLst/>
+          </a:prstGeom>
+          <a:solidFill>
+            <a:srgbClr val="F0F9FF"/>
+          </a:solidFill>
+          <a:ln w="19050">
+            <a:solidFill>
+              <a:srgbClr val="0284C7"/>
+            </a:solidFill>
+          </a:ln>
+        </p:spPr>
+        <p:style>
+          <a:lnRef idx="1">
+            <a:schemeClr val="accent1"/>
+          </a:lnRef>
+          <a:fillRef idx="3">
+            <a:schemeClr val="accent1"/>
+          </a:fillRef>
+          <a:effectRef idx="2">
+            <a:schemeClr val="accent1"/>
+          </a:effectRef>
+          <a:fontRef idx="minor">
+            <a:schemeClr val="lt1"/>
+          </a:fontRef>
+        </p:style>
+        <p:txBody>
           <a:bodyPr rtlCol="0" anchor="ctr"/>
           <a:lstStyle/>
           <a:p>
@@ -6502,14 +6128,68 @@
       </p:sp>
       <p:sp>
         <p:nvSpPr>
-          <p:cNvPr id="7" name="TextBox 6"/>
+          <p:cNvPr id="7" name="Oval 6"/>
+          <p:cNvSpPr/>
+          <p:nvPr/>
+        </p:nvSpPr>
+        <p:spPr>
+          <a:xfrm>
+            <a:off x="1024128" y="1554480"/>
+            <a:ext cx="548640" cy="548640"/>
+          </a:xfrm>
+          <a:prstGeom prst="ellipse">
+            <a:avLst/>
+          </a:prstGeom>
+          <a:solidFill>
+            <a:srgbClr val="0284C7"/>
+          </a:solidFill>
+          <a:ln>
+            <a:solidFill>
+              <a:srgbClr val="0284C7"/>
+            </a:solidFill>
+          </a:ln>
+        </p:spPr>
+        <p:style>
+          <a:lnRef idx="1">
+            <a:schemeClr val="accent1"/>
+          </a:lnRef>
+          <a:fillRef idx="3">
+            <a:schemeClr val="accent1"/>
+          </a:fillRef>
+          <a:effectRef idx="2">
+            <a:schemeClr val="accent1"/>
+          </a:effectRef>
+          <a:fontRef idx="minor">
+            <a:schemeClr val="lt1"/>
+          </a:fontRef>
+        </p:style>
+        <p:txBody>
+          <a:bodyPr rtlCol="0" anchor="ctr"/>
+          <a:lstStyle/>
+          <a:p>
+            <a:pPr algn="ctr">
+              <a:defRPr sz="1100" b="1">
+                <a:solidFill>
+                  <a:srgbClr val="FFFFFF"/>
+                </a:solidFill>
+              </a:defRPr>
+            </a:pPr>
+            <a:r>
+              <a:t>1</a:t>
+            </a:r>
+          </a:p>
+        </p:txBody>
+      </p:sp>
+      <p:sp>
+        <p:nvSpPr>
+          <p:cNvPr id="8" name="TextBox 7"/>
           <p:cNvSpPr txBox="1"/>
           <p:nvPr/>
         </p:nvSpPr>
         <p:spPr>
           <a:xfrm>
-            <a:off x="2743200" y="6291072"/>
-            <a:ext cx="6705295" cy="457200"/>
+            <a:off x="594360" y="2194560"/>
+            <a:ext cx="1408176" cy="2194560"/>
           </a:xfrm>
           <a:prstGeom prst="rect">
             <a:avLst/>
@@ -6523,28 +6203,146 @@
           <a:lstStyle/>
           <a:p>
             <a:pPr algn="ctr">
-              <a:defRPr sz="1100">
+              <a:defRPr sz="1000" b="1">
+                <a:solidFill>
+                  <a:srgbClr val="0284C7"/>
+                </a:solidFill>
+              </a:defRPr>
+            </a:pPr>
+            <a:r>
+              <a:t>LOGIN</a:t>
+            </a:r>
+          </a:p>
+          <a:p>
+            <a:pPr algn="ctr">
+              <a:spcBef>
+                <a:spcPts val="600"/>
+              </a:spcBef>
+              <a:defRPr sz="850">
+                <a:solidFill>
+                  <a:srgbClr val="475569"/>
+                </a:solidFill>
+              </a:defRPr>
+            </a:pPr>
+            <a:r>
+              <a:t>Secure role-based</a:t>
+            </a:r>
+            <a:br/>
+            <a:r>
+              <a:t>auditor access</a:t>
+            </a:r>
+          </a:p>
+        </p:txBody>
+      </p:sp>
+      <p:sp>
+        <p:nvSpPr>
+          <p:cNvPr id="9" name="Rounded Rectangle 8"/>
+          <p:cNvSpPr/>
+          <p:nvPr/>
+        </p:nvSpPr>
+        <p:spPr>
+          <a:xfrm>
+            <a:off x="2139696" y="1371600"/>
+            <a:ext cx="1499616" cy="3200400"/>
+          </a:xfrm>
+          <a:prstGeom prst="roundRect">
+            <a:avLst/>
+          </a:prstGeom>
+          <a:solidFill>
+            <a:srgbClr val="ECFEFF"/>
+          </a:solidFill>
+          <a:ln w="19050">
+            <a:solidFill>
+              <a:srgbClr val="0891B2"/>
+            </a:solidFill>
+          </a:ln>
+        </p:spPr>
+        <p:style>
+          <a:lnRef idx="1">
+            <a:schemeClr val="accent1"/>
+          </a:lnRef>
+          <a:fillRef idx="3">
+            <a:schemeClr val="accent1"/>
+          </a:fillRef>
+          <a:effectRef idx="2">
+            <a:schemeClr val="accent1"/>
+          </a:effectRef>
+          <a:fontRef idx="minor">
+            <a:schemeClr val="lt1"/>
+          </a:fontRef>
+        </p:style>
+        <p:txBody>
+          <a:bodyPr rtlCol="0" anchor="ctr"/>
+          <a:lstStyle/>
+          <a:p>
+            <a:pPr algn="ctr"/>
+          </a:p>
+        </p:txBody>
+      </p:sp>
+      <p:sp>
+        <p:nvSpPr>
+          <p:cNvPr id="10" name="Oval 9"/>
+          <p:cNvSpPr/>
+          <p:nvPr/>
+        </p:nvSpPr>
+        <p:spPr>
+          <a:xfrm>
+            <a:off x="2615184" y="1554480"/>
+            <a:ext cx="548640" cy="548640"/>
+          </a:xfrm>
+          <a:prstGeom prst="ellipse">
+            <a:avLst/>
+          </a:prstGeom>
+          <a:solidFill>
+            <a:srgbClr val="0891B2"/>
+          </a:solidFill>
+          <a:ln>
+            <a:solidFill>
+              <a:srgbClr val="0891B2"/>
+            </a:solidFill>
+          </a:ln>
+        </p:spPr>
+        <p:style>
+          <a:lnRef idx="1">
+            <a:schemeClr val="accent1"/>
+          </a:lnRef>
+          <a:fillRef idx="3">
+            <a:schemeClr val="accent1"/>
+          </a:fillRef>
+          <a:effectRef idx="2">
+            <a:schemeClr val="accent1"/>
+          </a:effectRef>
+          <a:fontRef idx="minor">
+            <a:schemeClr val="lt1"/>
+          </a:fontRef>
+        </p:style>
+        <p:txBody>
+          <a:bodyPr rtlCol="0" anchor="ctr"/>
+          <a:lstStyle/>
+          <a:p>
+            <a:pPr algn="ctr">
+              <a:defRPr sz="1100" b="1">
                 <a:solidFill>
                   <a:srgbClr val="FFFFFF"/>
                 </a:solidFill>
               </a:defRPr>
             </a:pPr>
             <a:r>
-              <a:t>@SIH Idea submission- Template</a:t>
-            </a:r>
-          </a:p>
-        </p:txBody>
-      </p:sp>
-      <p:sp>
-        <p:nvSpPr>
-          <p:cNvPr id="8" name="TextBox 7"/>
+              <a:t>2</a:t>
+            </a:r>
+          </a:p>
+        </p:txBody>
+      </p:sp>
+      <p:sp>
+        <p:nvSpPr>
+          <p:cNvPr id="11" name="TextBox 10"/>
           <p:cNvSpPr txBox="1"/>
           <p:nvPr/>
         </p:nvSpPr>
         <p:spPr>
           <a:xfrm>
-            <a:off x="10972800" y="6291072"/>
-            <a:ext cx="914400" cy="457200"/>
+            <a:off x="2185416" y="2194560"/>
+            <a:ext cx="1408176" cy="2194560"/>
           </a:xfrm>
           <a:prstGeom prst="rect">
             <a:avLst/>
@@ -6552,34 +6350,152 @@
           <a:noFill/>
         </p:spPr>
         <p:txBody>
-          <a:bodyPr wrap="none">
+          <a:bodyPr wrap="square">
             <a:spAutoFit/>
           </a:bodyPr>
           <a:lstStyle/>
           <a:p>
-            <a:pPr algn="r">
-              <a:defRPr sz="1200" b="1">
+            <a:pPr algn="ctr">
+              <a:defRPr sz="1000" b="1">
+                <a:solidFill>
+                  <a:srgbClr val="0891B2"/>
+                </a:solidFill>
+              </a:defRPr>
+            </a:pPr>
+            <a:r>
+              <a:t>GIS HEATMAP</a:t>
+            </a:r>
+          </a:p>
+          <a:p>
+            <a:pPr algn="ctr">
+              <a:spcBef>
+                <a:spcPts val="600"/>
+              </a:spcBef>
+              <a:defRPr sz="850">
+                <a:solidFill>
+                  <a:srgbClr val="475569"/>
+                </a:solidFill>
+              </a:defRPr>
+            </a:pPr>
+            <a:r>
+              <a:t>See risk intensity</a:t>
+            </a:r>
+            <a:br/>
+            <a:r>
+              <a:t>across 33 States</a:t>
+            </a:r>
+          </a:p>
+        </p:txBody>
+      </p:sp>
+      <p:sp>
+        <p:nvSpPr>
+          <p:cNvPr id="12" name="Rounded Rectangle 11"/>
+          <p:cNvSpPr/>
+          <p:nvPr/>
+        </p:nvSpPr>
+        <p:spPr>
+          <a:xfrm>
+            <a:off x="3730752" y="1371600"/>
+            <a:ext cx="1499616" cy="3200400"/>
+          </a:xfrm>
+          <a:prstGeom prst="roundRect">
+            <a:avLst/>
+          </a:prstGeom>
+          <a:solidFill>
+            <a:srgbClr val="F0FDFA"/>
+          </a:solidFill>
+          <a:ln w="19050">
+            <a:solidFill>
+              <a:srgbClr val="0D9488"/>
+            </a:solidFill>
+          </a:ln>
+        </p:spPr>
+        <p:style>
+          <a:lnRef idx="1">
+            <a:schemeClr val="accent1"/>
+          </a:lnRef>
+          <a:fillRef idx="3">
+            <a:schemeClr val="accent1"/>
+          </a:fillRef>
+          <a:effectRef idx="2">
+            <a:schemeClr val="accent1"/>
+          </a:effectRef>
+          <a:fontRef idx="minor">
+            <a:schemeClr val="lt1"/>
+          </a:fontRef>
+        </p:style>
+        <p:txBody>
+          <a:bodyPr rtlCol="0" anchor="ctr"/>
+          <a:lstStyle/>
+          <a:p>
+            <a:pPr algn="ctr"/>
+          </a:p>
+        </p:txBody>
+      </p:sp>
+      <p:sp>
+        <p:nvSpPr>
+          <p:cNvPr id="13" name="Oval 12"/>
+          <p:cNvSpPr/>
+          <p:nvPr/>
+        </p:nvSpPr>
+        <p:spPr>
+          <a:xfrm>
+            <a:off x="4206240" y="1554480"/>
+            <a:ext cx="548640" cy="548640"/>
+          </a:xfrm>
+          <a:prstGeom prst="ellipse">
+            <a:avLst/>
+          </a:prstGeom>
+          <a:solidFill>
+            <a:srgbClr val="0D9488"/>
+          </a:solidFill>
+          <a:ln>
+            <a:solidFill>
+              <a:srgbClr val="0D9488"/>
+            </a:solidFill>
+          </a:ln>
+        </p:spPr>
+        <p:style>
+          <a:lnRef idx="1">
+            <a:schemeClr val="accent1"/>
+          </a:lnRef>
+          <a:fillRef idx="3">
+            <a:schemeClr val="accent1"/>
+          </a:fillRef>
+          <a:effectRef idx="2">
+            <a:schemeClr val="accent1"/>
+          </a:effectRef>
+          <a:fontRef idx="minor">
+            <a:schemeClr val="lt1"/>
+          </a:fontRef>
+        </p:style>
+        <p:txBody>
+          <a:bodyPr rtlCol="0" anchor="ctr"/>
+          <a:lstStyle/>
+          <a:p>
+            <a:pPr algn="ctr">
+              <a:defRPr sz="1100" b="1">
                 <a:solidFill>
                   <a:srgbClr val="FFFFFF"/>
                 </a:solidFill>
               </a:defRPr>
             </a:pPr>
             <a:r>
-              <a:t>6</a:t>
-            </a:r>
-          </a:p>
-        </p:txBody>
-      </p:sp>
-      <p:sp>
-        <p:nvSpPr>
-          <p:cNvPr id="9" name="TextBox 8"/>
+              <a:t>3</a:t>
+            </a:r>
+          </a:p>
+        </p:txBody>
+      </p:sp>
+      <p:sp>
+        <p:nvSpPr>
+          <p:cNvPr id="14" name="TextBox 13"/>
           <p:cNvSpPr txBox="1"/>
           <p:nvPr/>
         </p:nvSpPr>
         <p:spPr>
           <a:xfrm>
-            <a:off x="548640" y="1371600"/>
-            <a:ext cx="10972800" cy="457200"/>
+            <a:off x="3776472" y="2194560"/>
+            <a:ext cx="1408176" cy="2194560"/>
           </a:xfrm>
           <a:prstGeom prst="rect">
             <a:avLst/>
@@ -6587,35 +6503,749 @@
           <a:noFill/>
         </p:spPr>
         <p:txBody>
-          <a:bodyPr wrap="none">
+          <a:bodyPr wrap="square">
             <a:spAutoFit/>
           </a:bodyPr>
           <a:lstStyle/>
           <a:p>
-            <a:pPr>
-              <a:defRPr sz="1600" b="1">
-                <a:solidFill>
-                  <a:srgbClr val="000000"/>
-                </a:solidFill>
-                <a:latin typeface="Times New Roman"/>
-              </a:defRPr>
-            </a:pPr>
-            <a:r>
-              <a:t>• Details / Links of the references and research work</a:t>
-            </a:r>
-          </a:p>
-        </p:txBody>
-      </p:sp>
-      <p:sp>
-        <p:nvSpPr>
-          <p:cNvPr id="10" name="Rounded Rectangle 9"/>
+            <a:pPr algn="ctr">
+              <a:defRPr sz="1000" b="1">
+                <a:solidFill>
+                  <a:srgbClr val="0D9488"/>
+                </a:solidFill>
+              </a:defRPr>
+            </a:pPr>
+            <a:r>
+              <a:t>EXPLORER</a:t>
+            </a:r>
+          </a:p>
+          <a:p>
+            <a:pPr algn="ctr">
+              <a:spcBef>
+                <a:spcPts val="600"/>
+              </a:spcBef>
+              <a:defRPr sz="850">
+                <a:solidFill>
+                  <a:srgbClr val="475569"/>
+                </a:solidFill>
+              </a:defRPr>
+            </a:pPr>
+            <a:r>
+              <a:t>Search, filter &amp;</a:t>
+            </a:r>
+            <a:br/>
+            <a:r>
+              <a:t>compare scores</a:t>
+            </a:r>
+          </a:p>
+        </p:txBody>
+      </p:sp>
+      <p:sp>
+        <p:nvSpPr>
+          <p:cNvPr id="15" name="Rounded Rectangle 14"/>
           <p:cNvSpPr/>
           <p:nvPr/>
         </p:nvSpPr>
         <p:spPr>
           <a:xfrm>
-            <a:off x="548640" y="2011680"/>
-            <a:ext cx="10972800" cy="621792"/>
+            <a:off x="5321807" y="1371600"/>
+            <a:ext cx="1499616" cy="3200400"/>
+          </a:xfrm>
+          <a:prstGeom prst="roundRect">
+            <a:avLst/>
+          </a:prstGeom>
+          <a:solidFill>
+            <a:srgbClr val="FFF7ED"/>
+          </a:solidFill>
+          <a:ln w="19050">
+            <a:solidFill>
+              <a:srgbClr val="EA580C"/>
+            </a:solidFill>
+          </a:ln>
+        </p:spPr>
+        <p:style>
+          <a:lnRef idx="1">
+            <a:schemeClr val="accent1"/>
+          </a:lnRef>
+          <a:fillRef idx="3">
+            <a:schemeClr val="accent1"/>
+          </a:fillRef>
+          <a:effectRef idx="2">
+            <a:schemeClr val="accent1"/>
+          </a:effectRef>
+          <a:fontRef idx="minor">
+            <a:schemeClr val="lt1"/>
+          </a:fontRef>
+        </p:style>
+        <p:txBody>
+          <a:bodyPr rtlCol="0" anchor="ctr"/>
+          <a:lstStyle/>
+          <a:p>
+            <a:pPr algn="ctr"/>
+          </a:p>
+        </p:txBody>
+      </p:sp>
+      <p:sp>
+        <p:nvSpPr>
+          <p:cNvPr id="16" name="Oval 15"/>
+          <p:cNvSpPr/>
+          <p:nvPr/>
+        </p:nvSpPr>
+        <p:spPr>
+          <a:xfrm>
+            <a:off x="5797295" y="1554480"/>
+            <a:ext cx="548640" cy="548640"/>
+          </a:xfrm>
+          <a:prstGeom prst="ellipse">
+            <a:avLst/>
+          </a:prstGeom>
+          <a:solidFill>
+            <a:srgbClr val="EA580C"/>
+          </a:solidFill>
+          <a:ln>
+            <a:solidFill>
+              <a:srgbClr val="EA580C"/>
+            </a:solidFill>
+          </a:ln>
+        </p:spPr>
+        <p:style>
+          <a:lnRef idx="1">
+            <a:schemeClr val="accent1"/>
+          </a:lnRef>
+          <a:fillRef idx="3">
+            <a:schemeClr val="accent1"/>
+          </a:fillRef>
+          <a:effectRef idx="2">
+            <a:schemeClr val="accent1"/>
+          </a:effectRef>
+          <a:fontRef idx="minor">
+            <a:schemeClr val="lt1"/>
+          </a:fontRef>
+        </p:style>
+        <p:txBody>
+          <a:bodyPr rtlCol="0" anchor="ctr"/>
+          <a:lstStyle/>
+          <a:p>
+            <a:pPr algn="ctr">
+              <a:defRPr sz="1100" b="1">
+                <a:solidFill>
+                  <a:srgbClr val="FFFFFF"/>
+                </a:solidFill>
+              </a:defRPr>
+            </a:pPr>
+            <a:r>
+              <a:t>4</a:t>
+            </a:r>
+          </a:p>
+        </p:txBody>
+      </p:sp>
+      <p:sp>
+        <p:nvSpPr>
+          <p:cNvPr id="17" name="TextBox 16"/>
+          <p:cNvSpPr txBox="1"/>
+          <p:nvPr/>
+        </p:nvSpPr>
+        <p:spPr>
+          <a:xfrm>
+            <a:off x="5367527" y="2194560"/>
+            <a:ext cx="1408176" cy="2194560"/>
+          </a:xfrm>
+          <a:prstGeom prst="rect">
+            <a:avLst/>
+          </a:prstGeom>
+          <a:noFill/>
+        </p:spPr>
+        <p:txBody>
+          <a:bodyPr wrap="square">
+            <a:spAutoFit/>
+          </a:bodyPr>
+          <a:lstStyle/>
+          <a:p>
+            <a:pPr algn="ctr">
+              <a:defRPr sz="1000" b="1">
+                <a:solidFill>
+                  <a:srgbClr val="EA580C"/>
+                </a:solidFill>
+              </a:defRPr>
+            </a:pPr>
+            <a:r>
+              <a:t>FLAGGED WORK</a:t>
+            </a:r>
+          </a:p>
+          <a:p>
+            <a:pPr algn="ctr">
+              <a:spcBef>
+                <a:spcPts val="600"/>
+              </a:spcBef>
+              <a:defRPr sz="850">
+                <a:solidFill>
+                  <a:srgbClr val="475569"/>
+                </a:solidFill>
+              </a:defRPr>
+            </a:pPr>
+            <a:r>
+              <a:t>Drill into the</a:t>
+            </a:r>
+            <a:br/>
+            <a:r>
+              <a:t>work-level evidence</a:t>
+            </a:r>
+          </a:p>
+        </p:txBody>
+      </p:sp>
+      <p:sp>
+        <p:nvSpPr>
+          <p:cNvPr id="18" name="Rounded Rectangle 17"/>
+          <p:cNvSpPr/>
+          <p:nvPr/>
+        </p:nvSpPr>
+        <p:spPr>
+          <a:xfrm>
+            <a:off x="6912864" y="1371600"/>
+            <a:ext cx="1499616" cy="3200400"/>
+          </a:xfrm>
+          <a:prstGeom prst="roundRect">
+            <a:avLst/>
+          </a:prstGeom>
+          <a:solidFill>
+            <a:srgbClr val="FEFCE8"/>
+          </a:solidFill>
+          <a:ln w="19050">
+            <a:solidFill>
+              <a:srgbClr val="CA8A04"/>
+            </a:solidFill>
+          </a:ln>
+        </p:spPr>
+        <p:style>
+          <a:lnRef idx="1">
+            <a:schemeClr val="accent1"/>
+          </a:lnRef>
+          <a:fillRef idx="3">
+            <a:schemeClr val="accent1"/>
+          </a:fillRef>
+          <a:effectRef idx="2">
+            <a:schemeClr val="accent1"/>
+          </a:effectRef>
+          <a:fontRef idx="minor">
+            <a:schemeClr val="lt1"/>
+          </a:fontRef>
+        </p:style>
+        <p:txBody>
+          <a:bodyPr rtlCol="0" anchor="ctr"/>
+          <a:lstStyle/>
+          <a:p>
+            <a:pPr algn="ctr"/>
+          </a:p>
+        </p:txBody>
+      </p:sp>
+      <p:sp>
+        <p:nvSpPr>
+          <p:cNvPr id="19" name="Oval 18"/>
+          <p:cNvSpPr/>
+          <p:nvPr/>
+        </p:nvSpPr>
+        <p:spPr>
+          <a:xfrm>
+            <a:off x="7388352" y="1554480"/>
+            <a:ext cx="548640" cy="548640"/>
+          </a:xfrm>
+          <a:prstGeom prst="ellipse">
+            <a:avLst/>
+          </a:prstGeom>
+          <a:solidFill>
+            <a:srgbClr val="CA8A04"/>
+          </a:solidFill>
+          <a:ln>
+            <a:solidFill>
+              <a:srgbClr val="CA8A04"/>
+            </a:solidFill>
+          </a:ln>
+        </p:spPr>
+        <p:style>
+          <a:lnRef idx="1">
+            <a:schemeClr val="accent1"/>
+          </a:lnRef>
+          <a:fillRef idx="3">
+            <a:schemeClr val="accent1"/>
+          </a:fillRef>
+          <a:effectRef idx="2">
+            <a:schemeClr val="accent1"/>
+          </a:effectRef>
+          <a:fontRef idx="minor">
+            <a:schemeClr val="lt1"/>
+          </a:fontRef>
+        </p:style>
+        <p:txBody>
+          <a:bodyPr rtlCol="0" anchor="ctr"/>
+          <a:lstStyle/>
+          <a:p>
+            <a:pPr algn="ctr">
+              <a:defRPr sz="1100" b="1">
+                <a:solidFill>
+                  <a:srgbClr val="FFFFFF"/>
+                </a:solidFill>
+              </a:defRPr>
+            </a:pPr>
+            <a:r>
+              <a:t>5</a:t>
+            </a:r>
+          </a:p>
+        </p:txBody>
+      </p:sp>
+      <p:sp>
+        <p:nvSpPr>
+          <p:cNvPr id="20" name="TextBox 19"/>
+          <p:cNvSpPr txBox="1"/>
+          <p:nvPr/>
+        </p:nvSpPr>
+        <p:spPr>
+          <a:xfrm>
+            <a:off x="6958584" y="2194560"/>
+            <a:ext cx="1408176" cy="2194560"/>
+          </a:xfrm>
+          <a:prstGeom prst="rect">
+            <a:avLst/>
+          </a:prstGeom>
+          <a:noFill/>
+        </p:spPr>
+        <p:txBody>
+          <a:bodyPr wrap="square">
+            <a:spAutoFit/>
+          </a:bodyPr>
+          <a:lstStyle/>
+          <a:p>
+            <a:pPr algn="ctr">
+              <a:defRPr sz="1000" b="1">
+                <a:solidFill>
+                  <a:srgbClr val="CA8A04"/>
+                </a:solidFill>
+              </a:defRPr>
+            </a:pPr>
+            <a:r>
+              <a:t>AI SIMULATOR</a:t>
+            </a:r>
+          </a:p>
+          <a:p>
+            <a:pPr algn="ctr">
+              <a:spcBef>
+                <a:spcPts val="600"/>
+              </a:spcBef>
+              <a:defRPr sz="850">
+                <a:solidFill>
+                  <a:srgbClr val="475569"/>
+                </a:solidFill>
+              </a:defRPr>
+            </a:pPr>
+            <a:r>
+              <a:t>Test budget, delay</a:t>
+            </a:r>
+            <a:br/>
+            <a:r>
+              <a:t>&amp; village what-ifs</a:t>
+            </a:r>
+          </a:p>
+        </p:txBody>
+      </p:sp>
+      <p:sp>
+        <p:nvSpPr>
+          <p:cNvPr id="21" name="Rounded Rectangle 20"/>
+          <p:cNvSpPr/>
+          <p:nvPr/>
+        </p:nvSpPr>
+        <p:spPr>
+          <a:xfrm>
+            <a:off x="8503919" y="1371600"/>
+            <a:ext cx="1499616" cy="3200400"/>
+          </a:xfrm>
+          <a:prstGeom prst="roundRect">
+            <a:avLst/>
+          </a:prstGeom>
+          <a:solidFill>
+            <a:srgbClr val="FAF5FF"/>
+          </a:solidFill>
+          <a:ln w="19050">
+            <a:solidFill>
+              <a:srgbClr val="9333EA"/>
+            </a:solidFill>
+          </a:ln>
+        </p:spPr>
+        <p:style>
+          <a:lnRef idx="1">
+            <a:schemeClr val="accent1"/>
+          </a:lnRef>
+          <a:fillRef idx="3">
+            <a:schemeClr val="accent1"/>
+          </a:fillRef>
+          <a:effectRef idx="2">
+            <a:schemeClr val="accent1"/>
+          </a:effectRef>
+          <a:fontRef idx="minor">
+            <a:schemeClr val="lt1"/>
+          </a:fontRef>
+        </p:style>
+        <p:txBody>
+          <a:bodyPr rtlCol="0" anchor="ctr"/>
+          <a:lstStyle/>
+          <a:p>
+            <a:pPr algn="ctr"/>
+          </a:p>
+        </p:txBody>
+      </p:sp>
+      <p:sp>
+        <p:nvSpPr>
+          <p:cNvPr id="22" name="Oval 21"/>
+          <p:cNvSpPr/>
+          <p:nvPr/>
+        </p:nvSpPr>
+        <p:spPr>
+          <a:xfrm>
+            <a:off x="8979407" y="1554480"/>
+            <a:ext cx="548640" cy="548640"/>
+          </a:xfrm>
+          <a:prstGeom prst="ellipse">
+            <a:avLst/>
+          </a:prstGeom>
+          <a:solidFill>
+            <a:srgbClr val="9333EA"/>
+          </a:solidFill>
+          <a:ln>
+            <a:solidFill>
+              <a:srgbClr val="9333EA"/>
+            </a:solidFill>
+          </a:ln>
+        </p:spPr>
+        <p:style>
+          <a:lnRef idx="1">
+            <a:schemeClr val="accent1"/>
+          </a:lnRef>
+          <a:fillRef idx="3">
+            <a:schemeClr val="accent1"/>
+          </a:fillRef>
+          <a:effectRef idx="2">
+            <a:schemeClr val="accent1"/>
+          </a:effectRef>
+          <a:fontRef idx="minor">
+            <a:schemeClr val="lt1"/>
+          </a:fontRef>
+        </p:style>
+        <p:txBody>
+          <a:bodyPr rtlCol="0" anchor="ctr"/>
+          <a:lstStyle/>
+          <a:p>
+            <a:pPr algn="ctr">
+              <a:defRPr sz="1100" b="1">
+                <a:solidFill>
+                  <a:srgbClr val="FFFFFF"/>
+                </a:solidFill>
+              </a:defRPr>
+            </a:pPr>
+            <a:r>
+              <a:t>6</a:t>
+            </a:r>
+          </a:p>
+        </p:txBody>
+      </p:sp>
+      <p:sp>
+        <p:nvSpPr>
+          <p:cNvPr id="23" name="TextBox 22"/>
+          <p:cNvSpPr txBox="1"/>
+          <p:nvPr/>
+        </p:nvSpPr>
+        <p:spPr>
+          <a:xfrm>
+            <a:off x="8549639" y="2194560"/>
+            <a:ext cx="1408176" cy="2194560"/>
+          </a:xfrm>
+          <a:prstGeom prst="rect">
+            <a:avLst/>
+          </a:prstGeom>
+          <a:noFill/>
+        </p:spPr>
+        <p:txBody>
+          <a:bodyPr wrap="square">
+            <a:spAutoFit/>
+          </a:bodyPr>
+          <a:lstStyle/>
+          <a:p>
+            <a:pPr algn="ctr">
+              <a:defRPr sz="1000" b="1">
+                <a:solidFill>
+                  <a:srgbClr val="9333EA"/>
+                </a:solidFill>
+              </a:defRPr>
+            </a:pPr>
+            <a:r>
+              <a:t>CASE QUEUE</a:t>
+            </a:r>
+          </a:p>
+          <a:p>
+            <a:pPr algn="ctr">
+              <a:spcBef>
+                <a:spcPts val="600"/>
+              </a:spcBef>
+              <a:defRPr sz="850">
+                <a:solidFill>
+                  <a:srgbClr val="475569"/>
+                </a:solidFill>
+              </a:defRPr>
+            </a:pPr>
+            <a:r>
+              <a:t>Update status +</a:t>
+            </a:r>
+            <a:br/>
+            <a:r>
+              <a:t>record observations</a:t>
+            </a:r>
+          </a:p>
+        </p:txBody>
+      </p:sp>
+      <p:sp>
+        <p:nvSpPr>
+          <p:cNvPr id="24" name="Rounded Rectangle 23"/>
+          <p:cNvSpPr/>
+          <p:nvPr/>
+        </p:nvSpPr>
+        <p:spPr>
+          <a:xfrm>
+            <a:off x="10094976" y="1371600"/>
+            <a:ext cx="1499616" cy="3200400"/>
+          </a:xfrm>
+          <a:prstGeom prst="roundRect">
+            <a:avLst/>
+          </a:prstGeom>
+          <a:solidFill>
+            <a:srgbClr val="F0FDF4"/>
+          </a:solidFill>
+          <a:ln w="19050">
+            <a:solidFill>
+              <a:srgbClr val="16A34A"/>
+            </a:solidFill>
+          </a:ln>
+        </p:spPr>
+        <p:style>
+          <a:lnRef idx="1">
+            <a:schemeClr val="accent1"/>
+          </a:lnRef>
+          <a:fillRef idx="3">
+            <a:schemeClr val="accent1"/>
+          </a:fillRef>
+          <a:effectRef idx="2">
+            <a:schemeClr val="accent1"/>
+          </a:effectRef>
+          <a:fontRef idx="minor">
+            <a:schemeClr val="lt1"/>
+          </a:fontRef>
+        </p:style>
+        <p:txBody>
+          <a:bodyPr rtlCol="0" anchor="ctr"/>
+          <a:lstStyle/>
+          <a:p>
+            <a:pPr algn="ctr"/>
+          </a:p>
+        </p:txBody>
+      </p:sp>
+      <p:sp>
+        <p:nvSpPr>
+          <p:cNvPr id="25" name="Oval 24"/>
+          <p:cNvSpPr/>
+          <p:nvPr/>
+        </p:nvSpPr>
+        <p:spPr>
+          <a:xfrm>
+            <a:off x="10570464" y="1554480"/>
+            <a:ext cx="548640" cy="548640"/>
+          </a:xfrm>
+          <a:prstGeom prst="ellipse">
+            <a:avLst/>
+          </a:prstGeom>
+          <a:solidFill>
+            <a:srgbClr val="16A34A"/>
+          </a:solidFill>
+          <a:ln>
+            <a:solidFill>
+              <a:srgbClr val="16A34A"/>
+            </a:solidFill>
+          </a:ln>
+        </p:spPr>
+        <p:style>
+          <a:lnRef idx="1">
+            <a:schemeClr val="accent1"/>
+          </a:lnRef>
+          <a:fillRef idx="3">
+            <a:schemeClr val="accent1"/>
+          </a:fillRef>
+          <a:effectRef idx="2">
+            <a:schemeClr val="accent1"/>
+          </a:effectRef>
+          <a:fontRef idx="minor">
+            <a:schemeClr val="lt1"/>
+          </a:fontRef>
+        </p:style>
+        <p:txBody>
+          <a:bodyPr rtlCol="0" anchor="ctr"/>
+          <a:lstStyle/>
+          <a:p>
+            <a:pPr algn="ctr">
+              <a:defRPr sz="1100" b="1">
+                <a:solidFill>
+                  <a:srgbClr val="FFFFFF"/>
+                </a:solidFill>
+              </a:defRPr>
+            </a:pPr>
+            <a:r>
+              <a:t>7</a:t>
+            </a:r>
+          </a:p>
+        </p:txBody>
+      </p:sp>
+      <p:sp>
+        <p:nvSpPr>
+          <p:cNvPr id="26" name="TextBox 25"/>
+          <p:cNvSpPr txBox="1"/>
+          <p:nvPr/>
+        </p:nvSpPr>
+        <p:spPr>
+          <a:xfrm>
+            <a:off x="10140696" y="2194560"/>
+            <a:ext cx="1408176" cy="2194560"/>
+          </a:xfrm>
+          <a:prstGeom prst="rect">
+            <a:avLst/>
+          </a:prstGeom>
+          <a:noFill/>
+        </p:spPr>
+        <p:txBody>
+          <a:bodyPr wrap="square">
+            <a:spAutoFit/>
+          </a:bodyPr>
+          <a:lstStyle/>
+          <a:p>
+            <a:pPr algn="ctr">
+              <a:defRPr sz="1000" b="1">
+                <a:solidFill>
+                  <a:srgbClr val="16A34A"/>
+                </a:solidFill>
+              </a:defRPr>
+            </a:pPr>
+            <a:r>
+              <a:t>CAG DOSSIER</a:t>
+            </a:r>
+          </a:p>
+          <a:p>
+            <a:pPr algn="ctr">
+              <a:spcBef>
+                <a:spcPts val="600"/>
+              </a:spcBef>
+              <a:defRPr sz="850">
+                <a:solidFill>
+                  <a:srgbClr val="475569"/>
+                </a:solidFill>
+              </a:defRPr>
+            </a:pPr>
+            <a:r>
+              <a:t>Generate / print</a:t>
+            </a:r>
+            <a:br/>
+            <a:r>
+              <a:t>formal screening</a:t>
+            </a:r>
+          </a:p>
+        </p:txBody>
+      </p:sp>
+      <p:sp>
+        <p:nvSpPr>
+          <p:cNvPr id="27" name="Rounded Rectangle 26"/>
+          <p:cNvSpPr/>
+          <p:nvPr/>
+        </p:nvSpPr>
+        <p:spPr>
+          <a:xfrm>
+            <a:off x="548640" y="4754880"/>
+            <a:ext cx="11064240" cy="1463040"/>
+          </a:xfrm>
+          <a:prstGeom prst="roundRect">
+            <a:avLst/>
+          </a:prstGeom>
+          <a:solidFill>
+            <a:srgbClr val="FFFFFF"/>
+          </a:solidFill>
+          <a:ln w="25400">
+            <a:solidFill>
+              <a:srgbClr val="145DA0"/>
+            </a:solidFill>
+          </a:ln>
+        </p:spPr>
+        <p:style>
+          <a:lnRef idx="1">
+            <a:schemeClr val="accent1"/>
+          </a:lnRef>
+          <a:fillRef idx="3">
+            <a:schemeClr val="accent1"/>
+          </a:fillRef>
+          <a:effectRef idx="2">
+            <a:schemeClr val="accent1"/>
+          </a:effectRef>
+          <a:fontRef idx="minor">
+            <a:schemeClr val="lt1"/>
+          </a:fontRef>
+        </p:style>
+        <p:txBody>
+          <a:bodyPr rtlCol="0" anchor="ctr"/>
+          <a:lstStyle/>
+          <a:p>
+            <a:pPr algn="ctr"/>
+          </a:p>
+        </p:txBody>
+      </p:sp>
+      <p:sp>
+        <p:nvSpPr>
+          <p:cNvPr id="28" name="TextBox 27"/>
+          <p:cNvSpPr txBox="1"/>
+          <p:nvPr/>
+        </p:nvSpPr>
+        <p:spPr>
+          <a:xfrm>
+            <a:off x="731520" y="4892040"/>
+            <a:ext cx="2011680" cy="1188720"/>
+          </a:xfrm>
+          <a:prstGeom prst="rect">
+            <a:avLst/>
+          </a:prstGeom>
+          <a:noFill/>
+        </p:spPr>
+        <p:txBody>
+          <a:bodyPr wrap="square">
+            <a:spAutoFit/>
+          </a:bodyPr>
+          <a:lstStyle/>
+          <a:p>
+            <a:pPr algn="ctr">
+              <a:defRPr sz="1100" b="1">
+                <a:solidFill>
+                  <a:srgbClr val="145DA0"/>
+                </a:solidFill>
+              </a:defRPr>
+            </a:pPr>
+            <a:r>
+              <a:t>LIVE PROTOTYPE</a:t>
+            </a:r>
+            <a:br/>
+            <a:r>
+              <a:t>CALLOUT</a:t>
+            </a:r>
+          </a:p>
+        </p:txBody>
+      </p:sp>
+      <p:sp>
+        <p:nvSpPr>
+          <p:cNvPr id="29" name="Rounded Rectangle 28"/>
+          <p:cNvSpPr/>
+          <p:nvPr/>
+        </p:nvSpPr>
+        <p:spPr>
+          <a:xfrm>
+            <a:off x="2926080" y="4892040"/>
+            <a:ext cx="1600200" cy="1188720"/>
           </a:xfrm>
           <a:prstGeom prst="roundRect">
             <a:avLst/>
@@ -6653,14 +7283,14 @@
       </p:sp>
       <p:sp>
         <p:nvSpPr>
-          <p:cNvPr id="11" name="TextBox 10"/>
+          <p:cNvPr id="30" name="TextBox 29"/>
           <p:cNvSpPr txBox="1"/>
           <p:nvPr/>
         </p:nvSpPr>
         <p:spPr>
           <a:xfrm>
-            <a:off x="685800" y="2048256"/>
-            <a:ext cx="10698480" cy="548640"/>
+            <a:off x="2971800" y="4965192"/>
+            <a:ext cx="1508760" cy="1042416"/>
           </a:xfrm>
           <a:prstGeom prst="rect">
             <a:avLst/>
@@ -6673,45 +7303,48 @@
           </a:bodyPr>
           <a:lstStyle/>
           <a:p>
-            <a:pPr>
-              <a:defRPr sz="1100" b="1">
-                <a:solidFill>
-                  <a:srgbClr val="1D4477"/>
-                </a:solidFill>
-                <a:latin typeface="Times New Roman"/>
-              </a:defRPr>
-            </a:pPr>
-            <a:r>
-              <a:t>1. Ministry of Statistics and Programme Implementation (MoSPI), Government of India</a:t>
-            </a:r>
-          </a:p>
-          <a:p>
-            <a:pPr>
+            <a:pPr algn="ctr">
+              <a:defRPr sz="950" b="1">
+                <a:solidFill>
+                  <a:srgbClr val="145DA0"/>
+                </a:solidFill>
+              </a:defRPr>
+            </a:pPr>
+            <a:r>
+              <a:t>GIS</a:t>
+            </a:r>
+          </a:p>
+          <a:p>
+            <a:pPr algn="ctr">
               <a:spcBef>
-                <a:spcPts val="100"/>
+                <a:spcPts val="300"/>
               </a:spcBef>
-              <a:defRPr sz="950">
-                <a:solidFill>
-                  <a:srgbClr val="0F172A"/>
-                </a:solidFill>
-              </a:defRPr>
-            </a:pPr>
-            <a:r>
-              <a:t>Guidelines on Member of Parliament Local Area Development Scheme (MPLADS) — Statutory provisions on Para 3.12 (Tender procedures), Para 5.2 (45-Day Sanction SLA), and Para 2.11 (Permissible works). URL: mplads.gov.in</a:t>
-            </a:r>
-          </a:p>
-        </p:txBody>
-      </p:sp>
-      <p:sp>
-        <p:nvSpPr>
-          <p:cNvPr id="12" name="Rounded Rectangle 11"/>
+              <a:defRPr sz="850">
+                <a:solidFill>
+                  <a:srgbClr val="1E293B"/>
+                </a:solidFill>
+              </a:defRPr>
+            </a:pPr>
+            <a:r>
+              <a:t>Leaflet India</a:t>
+            </a:r>
+            <a:br/>
+            <a:r>
+              <a:t>anomaly heatmap</a:t>
+            </a:r>
+          </a:p>
+        </p:txBody>
+      </p:sp>
+      <p:sp>
+        <p:nvSpPr>
+          <p:cNvPr id="31" name="Rounded Rectangle 30"/>
           <p:cNvSpPr/>
           <p:nvPr/>
         </p:nvSpPr>
         <p:spPr>
           <a:xfrm>
-            <a:off x="548640" y="2688336"/>
-            <a:ext cx="10972800" cy="621792"/>
+            <a:off x="4617720" y="4892040"/>
+            <a:ext cx="1600200" cy="1188720"/>
           </a:xfrm>
           <a:prstGeom prst="roundRect">
             <a:avLst/>
@@ -6749,14 +7382,14 @@
       </p:sp>
       <p:sp>
         <p:nvSpPr>
-          <p:cNvPr id="13" name="TextBox 12"/>
+          <p:cNvPr id="32" name="TextBox 31"/>
           <p:cNvSpPr txBox="1"/>
           <p:nvPr/>
         </p:nvSpPr>
         <p:spPr>
           <a:xfrm>
-            <a:off x="685800" y="2724912"/>
-            <a:ext cx="10698480" cy="548640"/>
+            <a:off x="4663440" y="4965192"/>
+            <a:ext cx="1508760" cy="1042416"/>
           </a:xfrm>
           <a:prstGeom prst="rect">
             <a:avLst/>
@@ -6769,45 +7402,48 @@
           </a:bodyPr>
           <a:lstStyle/>
           <a:p>
-            <a:pPr>
-              <a:defRPr sz="1100" b="1">
-                <a:solidFill>
-                  <a:srgbClr val="1D4477"/>
-                </a:solidFill>
-                <a:latin typeface="Times New Roman"/>
-              </a:defRPr>
-            </a:pPr>
-            <a:r>
-              <a:t>2. Office of the Comptroller and Auditor General of India (CAG)</a:t>
-            </a:r>
-          </a:p>
-          <a:p>
-            <a:pPr>
+            <a:pPr algn="ctr">
+              <a:defRPr sz="950" b="1">
+                <a:solidFill>
+                  <a:srgbClr val="145DA0"/>
+                </a:solidFill>
+              </a:defRPr>
+            </a:pPr>
+            <a:r>
+              <a:t>EXPLORER</a:t>
+            </a:r>
+          </a:p>
+          <a:p>
+            <a:pPr algn="ctr">
               <a:spcBef>
-                <a:spcPts val="100"/>
+                <a:spcPts val="300"/>
               </a:spcBef>
-              <a:defRPr sz="950">
-                <a:solidFill>
-                  <a:srgbClr val="0F172A"/>
-                </a:solidFill>
-              </a:defRPr>
-            </a:pPr>
-            <a:r>
-              <a:t>Performance Audit Report on Member of Parliament Local Area Development Scheme — Reports detailing chronic fund dormancy, contract splitting, March Rush fiscal dumps, and unspent constituency balances. URL: cag.gov.in</a:t>
-            </a:r>
-          </a:p>
-        </p:txBody>
-      </p:sp>
-      <p:sp>
-        <p:nvSpPr>
-          <p:cNvPr id="14" name="Rounded Rectangle 13"/>
+              <a:defRPr sz="850">
+                <a:solidFill>
+                  <a:srgbClr val="1E293B"/>
+                </a:solidFill>
+              </a:defRPr>
+            </a:pPr>
+            <a:r>
+              <a:t>105k searchable</a:t>
+            </a:r>
+            <a:br/>
+            <a:r>
+              <a:t>works grid</a:t>
+            </a:r>
+          </a:p>
+        </p:txBody>
+      </p:sp>
+      <p:sp>
+        <p:nvSpPr>
+          <p:cNvPr id="33" name="Rounded Rectangle 32"/>
           <p:cNvSpPr/>
           <p:nvPr/>
         </p:nvSpPr>
         <p:spPr>
           <a:xfrm>
-            <a:off x="548640" y="3364992"/>
-            <a:ext cx="10972800" cy="621792"/>
+            <a:off x="6309360" y="4892040"/>
+            <a:ext cx="1600200" cy="1188720"/>
           </a:xfrm>
           <a:prstGeom prst="roundRect">
             <a:avLst/>
@@ -6845,14 +7481,14 @@
       </p:sp>
       <p:sp>
         <p:nvSpPr>
-          <p:cNvPr id="15" name="TextBox 14"/>
+          <p:cNvPr id="34" name="TextBox 33"/>
           <p:cNvSpPr txBox="1"/>
           <p:nvPr/>
         </p:nvSpPr>
         <p:spPr>
           <a:xfrm>
-            <a:off x="685800" y="3401568"/>
-            <a:ext cx="10698480" cy="548640"/>
+            <a:off x="6355080" y="4965192"/>
+            <a:ext cx="1508760" cy="1042416"/>
           </a:xfrm>
           <a:prstGeom prst="rect">
             <a:avLst/>
@@ -6865,45 +7501,48 @@
           </a:bodyPr>
           <a:lstStyle/>
           <a:p>
-            <a:pPr>
-              <a:defRPr sz="1100" b="1">
-                <a:solidFill>
-                  <a:srgbClr val="1D4477"/>
-                </a:solidFill>
-                <a:latin typeface="Times New Roman"/>
-              </a:defRPr>
-            </a:pPr>
-            <a:r>
-              <a:t>3. Ministry of Finance, Department of Expenditure, Government of India</a:t>
-            </a:r>
-          </a:p>
-          <a:p>
-            <a:pPr>
+            <a:pPr algn="ctr">
+              <a:defRPr sz="950" b="1">
+                <a:solidFill>
+                  <a:srgbClr val="145DA0"/>
+                </a:solidFill>
+              </a:defRPr>
+            </a:pPr>
+            <a:r>
+              <a:t>SIMULATOR</a:t>
+            </a:r>
+          </a:p>
+          <a:p>
+            <a:pPr algn="ctr">
               <a:spcBef>
-                <a:spcPts val="100"/>
+                <a:spcPts val="300"/>
               </a:spcBef>
-              <a:defRPr sz="950">
-                <a:solidFill>
-                  <a:srgbClr val="0F172A"/>
-                </a:solidFill>
-              </a:defRPr>
-            </a:pPr>
-            <a:r>
-              <a:t>General Financial Rules (GFR 2017) — Rule 149 governing mandatory procurement of goods &amp; services through Government e-Marketplace (GeM) and statutory e-tendering thresholds (₹5 Lakh / ₹10 Lakh).</a:t>
-            </a:r>
-          </a:p>
-        </p:txBody>
-      </p:sp>
-      <p:sp>
-        <p:nvSpPr>
-          <p:cNvPr id="16" name="Rounded Rectangle 15"/>
+              <a:defRPr sz="850">
+                <a:solidFill>
+                  <a:srgbClr val="1E293B"/>
+                </a:solidFill>
+              </a:defRPr>
+            </a:pPr>
+            <a:r>
+              <a:t>Live what-if risk</a:t>
+            </a:r>
+            <a:br/>
+            <a:r>
+              <a:t>recalculation</a:t>
+            </a:r>
+          </a:p>
+        </p:txBody>
+      </p:sp>
+      <p:sp>
+        <p:nvSpPr>
+          <p:cNvPr id="35" name="Rounded Rectangle 34"/>
           <p:cNvSpPr/>
           <p:nvPr/>
         </p:nvSpPr>
         <p:spPr>
           <a:xfrm>
-            <a:off x="548640" y="4041648"/>
-            <a:ext cx="10972800" cy="621792"/>
+            <a:off x="8001000" y="4892040"/>
+            <a:ext cx="1600200" cy="1188720"/>
           </a:xfrm>
           <a:prstGeom prst="roundRect">
             <a:avLst/>
@@ -6941,14 +7580,14 @@
       </p:sp>
       <p:sp>
         <p:nvSpPr>
-          <p:cNvPr id="17" name="TextBox 16"/>
+          <p:cNvPr id="36" name="TextBox 35"/>
           <p:cNvSpPr txBox="1"/>
           <p:nvPr/>
         </p:nvSpPr>
         <p:spPr>
           <a:xfrm>
-            <a:off x="685800" y="4078224"/>
-            <a:ext cx="10698480" cy="548640"/>
+            <a:off x="8046720" y="4965192"/>
+            <a:ext cx="1508760" cy="1042416"/>
           </a:xfrm>
           <a:prstGeom prst="rect">
             <a:avLst/>
@@ -6961,45 +7600,48 @@
           </a:bodyPr>
           <a:lstStyle/>
           <a:p>
-            <a:pPr>
-              <a:defRPr sz="1100" b="1">
-                <a:solidFill>
-                  <a:srgbClr val="1D4477"/>
-                </a:solidFill>
-                <a:latin typeface="Times New Roman"/>
-              </a:defRPr>
-            </a:pPr>
-            <a:r>
-              <a:t>4. Liu, F. T., Ting, K. M., &amp; Zhou, Z. H. (IEEE ICDM)</a:t>
-            </a:r>
-          </a:p>
-          <a:p>
-            <a:pPr>
+            <a:pPr algn="ctr">
+              <a:defRPr sz="950" b="1">
+                <a:solidFill>
+                  <a:srgbClr val="145DA0"/>
+                </a:solidFill>
+              </a:defRPr>
+            </a:pPr>
+            <a:r>
+              <a:t>QUEUE</a:t>
+            </a:r>
+          </a:p>
+          <a:p>
+            <a:pPr algn="ctr">
               <a:spcBef>
-                <a:spcPts val="100"/>
+                <a:spcPts val="300"/>
               </a:spcBef>
-              <a:defRPr sz="950">
-                <a:solidFill>
-                  <a:srgbClr val="0F172A"/>
-                </a:solidFill>
-              </a:defRPr>
-            </a:pPr>
-            <a:r>
-              <a:t>'Isolation Forest' — Foundations of unsupervised isolation tree algorithms for multi-dimensional anomaly detection without normality assumptions. IEEE International Conference on Data Mining.</a:t>
-            </a:r>
-          </a:p>
-        </p:txBody>
-      </p:sp>
-      <p:sp>
-        <p:nvSpPr>
-          <p:cNvPr id="18" name="Rounded Rectangle 17"/>
+              <a:defRPr sz="850">
+                <a:solidFill>
+                  <a:srgbClr val="1E293B"/>
+                </a:solidFill>
+              </a:defRPr>
+            </a:pPr>
+            <a:r>
+              <a:t>UNDER REVIEW /</a:t>
+            </a:r>
+            <a:br/>
+            <a:r>
+              <a:t>SITE INSPECTION</a:t>
+            </a:r>
+          </a:p>
+        </p:txBody>
+      </p:sp>
+      <p:sp>
+        <p:nvSpPr>
+          <p:cNvPr id="37" name="Rounded Rectangle 36"/>
           <p:cNvSpPr/>
           <p:nvPr/>
         </p:nvSpPr>
         <p:spPr>
           <a:xfrm>
-            <a:off x="548640" y="4718304"/>
-            <a:ext cx="10972800" cy="621792"/>
+            <a:off x="9692640" y="4892040"/>
+            <a:ext cx="1600200" cy="1188720"/>
           </a:xfrm>
           <a:prstGeom prst="roundRect">
             <a:avLst/>
@@ -7037,14 +7679,14 @@
       </p:sp>
       <p:sp>
         <p:nvSpPr>
-          <p:cNvPr id="19" name="TextBox 18"/>
+          <p:cNvPr id="38" name="TextBox 37"/>
           <p:cNvSpPr txBox="1"/>
           <p:nvPr/>
         </p:nvSpPr>
         <p:spPr>
           <a:xfrm>
-            <a:off x="685800" y="4754880"/>
-            <a:ext cx="10698480" cy="548640"/>
+            <a:off x="9738360" y="4965192"/>
+            <a:ext cx="1508760" cy="1042416"/>
           </a:xfrm>
           <a:prstGeom prst="rect">
             <a:avLst/>
@@ -7057,127 +7699,34 @@
           </a:bodyPr>
           <a:lstStyle/>
           <a:p>
-            <a:pPr>
-              <a:defRPr sz="1100" b="1">
-                <a:solidFill>
-                  <a:srgbClr val="1D4477"/>
-                </a:solidFill>
-                <a:latin typeface="Times New Roman"/>
-              </a:defRPr>
-            </a:pPr>
-            <a:r>
-              <a:t>5. Breunig, M. M., Kriegel, H. P., Ng, R. T., &amp; Sander, J. (ACM SIGMOD)</a:t>
-            </a:r>
-          </a:p>
-          <a:p>
-            <a:pPr>
+            <a:pPr algn="ctr">
+              <a:defRPr sz="950" b="1">
+                <a:solidFill>
+                  <a:srgbClr val="145DA0"/>
+                </a:solidFill>
+              </a:defRPr>
+            </a:pPr>
+            <a:r>
+              <a:t>DOSSIER</a:t>
+            </a:r>
+          </a:p>
+          <a:p>
+            <a:pPr algn="ctr">
               <a:spcBef>
-                <a:spcPts val="100"/>
+                <a:spcPts val="300"/>
               </a:spcBef>
-              <a:defRPr sz="950">
-                <a:solidFill>
-                  <a:srgbClr val="0F172A"/>
-                </a:solidFill>
-              </a:defRPr>
-            </a:pPr>
-            <a:r>
-              <a:t>'LOF: Identifying Density-Based Local Outliers' — Formulations of Local Outlier Factor and local reachability density metrics in spatial data structures.</a:t>
-            </a:r>
-          </a:p>
-        </p:txBody>
-      </p:sp>
-      <p:sp>
-        <p:nvSpPr>
-          <p:cNvPr id="20" name="Rounded Rectangle 19"/>
-          <p:cNvSpPr/>
-          <p:nvPr/>
-        </p:nvSpPr>
-        <p:spPr>
-          <a:xfrm>
-            <a:off x="548640" y="5394960"/>
-            <a:ext cx="10972800" cy="621792"/>
-          </a:xfrm>
-          <a:prstGeom prst="roundRect">
-            <a:avLst/>
-          </a:prstGeom>
-          <a:solidFill>
-            <a:srgbClr val="F8FAFC"/>
-          </a:solidFill>
-          <a:ln w="12700">
-            <a:solidFill>
-              <a:srgbClr val="CBD5E1"/>
-            </a:solidFill>
-          </a:ln>
-        </p:spPr>
-        <p:style>
-          <a:lnRef idx="1">
-            <a:schemeClr val="accent1"/>
-          </a:lnRef>
-          <a:fillRef idx="3">
-            <a:schemeClr val="accent1"/>
-          </a:fillRef>
-          <a:effectRef idx="2">
-            <a:schemeClr val="accent1"/>
-          </a:effectRef>
-          <a:fontRef idx="minor">
-            <a:schemeClr val="lt1"/>
-          </a:fontRef>
-        </p:style>
-        <p:txBody>
-          <a:bodyPr rtlCol="0" anchor="ctr"/>
-          <a:lstStyle/>
-          <a:p>
-            <a:pPr algn="ctr"/>
-          </a:p>
-        </p:txBody>
-      </p:sp>
-      <p:sp>
-        <p:nvSpPr>
-          <p:cNvPr id="21" name="TextBox 20"/>
-          <p:cNvSpPr txBox="1"/>
-          <p:nvPr/>
-        </p:nvSpPr>
-        <p:spPr>
-          <a:xfrm>
-            <a:off x="685800" y="5431536"/>
-            <a:ext cx="10698480" cy="548640"/>
-          </a:xfrm>
-          <a:prstGeom prst="rect">
-            <a:avLst/>
-          </a:prstGeom>
-          <a:noFill/>
-        </p:spPr>
-        <p:txBody>
-          <a:bodyPr wrap="square">
-            <a:spAutoFit/>
-          </a:bodyPr>
-          <a:lstStyle/>
-          <a:p>
-            <a:pPr>
-              <a:defRPr sz="1100" b="1">
-                <a:solidFill>
-                  <a:srgbClr val="1D4477"/>
-                </a:solidFill>
-                <a:latin typeface="Times New Roman"/>
-              </a:defRPr>
-            </a:pPr>
-            <a:r>
-              <a:t>6. Open Government Data (OGD) Platform India (data.gov.in)</a:t>
-            </a:r>
-          </a:p>
-          <a:p>
-            <a:pPr>
-              <a:spcBef>
-                <a:spcPts val="100"/>
-              </a:spcBef>
-              <a:defRPr sz="950">
-                <a:solidFill>
-                  <a:srgbClr val="0F172A"/>
-                </a:solidFill>
-              </a:defRPr>
-            </a:pPr>
-            <a:r>
-              <a:t>Authenticated datasets on MPLADS physical progress, financial release vs expenditure, and constituency-wise project archives (2019–2024).</a:t>
+              <a:defRPr sz="850">
+                <a:solidFill>
+                  <a:srgbClr val="1E293B"/>
+                </a:solidFill>
+              </a:defRPr>
+            </a:pPr>
+            <a:r>
+              <a:t>Printable audit</a:t>
+            </a:r>
+            <a:br/>
+            <a:r>
+              <a:t>screening report</a:t>
             </a:r>
           </a:p>
         </p:txBody>
@@ -7193,6 +7742,14 @@
 <file path=ppt/slides/slide7.xml><?xml version="1.0" encoding="utf-8"?>
 <p:sld xmlns:a="http://schemas.openxmlformats.org/drawingml/2006/main" xmlns:p="http://schemas.openxmlformats.org/presentationml/2006/main" xmlns:r="http://schemas.openxmlformats.org/officeDocument/2006/relationships">
   <p:cSld>
+    <p:bg>
+      <p:bgPr>
+        <a:solidFill>
+          <a:srgbClr val="FFFFFF"/>
+        </a:solidFill>
+        <a:effectLst/>
+      </p:bgPr>
+    </p:bg>
     <p:spTree>
       <p:nvGrpSpPr>
         <p:cNvPr id="1" name=""/>
@@ -7202,23 +7759,25 @@
       <p:grpSpPr/>
       <p:sp>
         <p:nvSpPr>
-          <p:cNvPr id="2" name="Rectangle 1"/>
+          <p:cNvPr id="2" name="Oval 1"/>
           <p:cNvSpPr/>
           <p:nvPr/>
         </p:nvSpPr>
         <p:spPr>
           <a:xfrm>
-            <a:off x="0" y="0"/>
-            <a:ext cx="12191695" cy="6858000"/>
-          </a:xfrm>
-          <a:prstGeom prst="rect">
+            <a:off x="548640" y="182880"/>
+            <a:ext cx="1280160" cy="960120"/>
+          </a:xfrm>
+          <a:prstGeom prst="ellipse">
             <a:avLst/>
           </a:prstGeom>
           <a:solidFill>
             <a:srgbClr val="FFFFFF"/>
           </a:solidFill>
-          <a:ln>
-            <a:noFill/>
+          <a:ln w="31750">
+            <a:solidFill>
+              <a:srgbClr val="5B21B6"/>
+            </a:solidFill>
           </a:ln>
         </p:spPr>
         <p:style>
@@ -7236,86 +7795,41 @@
           </a:fontRef>
         </p:style>
         <p:txBody>
-          <a:bodyPr rtlCol="0" anchor="ctr"/>
-          <a:lstStyle/>
-          <a:p>
-            <a:pPr algn="ctr"/>
-          </a:p>
-        </p:txBody>
-      </p:sp>
-      <p:sp>
-        <p:nvSpPr>
-          <p:cNvPr id="3" name="Oval 2"/>
-          <p:cNvSpPr/>
-          <p:nvPr/>
-        </p:nvSpPr>
-        <p:spPr>
-          <a:xfrm>
-            <a:off x="548640" y="320040"/>
-            <a:ext cx="1188720" cy="960120"/>
-          </a:xfrm>
-          <a:prstGeom prst="ellipse">
-            <a:avLst/>
-          </a:prstGeom>
-          <a:solidFill>
-            <a:srgbClr val="FFFFFF"/>
-          </a:solidFill>
-          <a:ln w="25400">
-            <a:solidFill>
-              <a:srgbClr val="5B3E84"/>
-            </a:solidFill>
-          </a:ln>
-        </p:spPr>
-        <p:style>
-          <a:lnRef idx="1">
-            <a:schemeClr val="accent1"/>
-          </a:lnRef>
-          <a:fillRef idx="3">
-            <a:schemeClr val="accent1"/>
-          </a:fillRef>
-          <a:effectRef idx="2">
-            <a:schemeClr val="accent1"/>
-          </a:effectRef>
-          <a:fontRef idx="minor">
-            <a:schemeClr val="lt1"/>
-          </a:fontRef>
-        </p:style>
-        <p:txBody>
           <a:bodyPr rtlCol="0" anchor="ctr" wrap="square"/>
           <a:lstStyle/>
           <a:p>
             <a:pPr algn="ctr">
-              <a:defRPr sz="1000">
-                <a:solidFill>
-                  <a:srgbClr val="0F172A"/>
-                </a:solidFill>
-                <a:latin typeface="Times New Roman"/>
-              </a:defRPr>
-            </a:pPr>
-            <a:r>
-              <a:t>Your</a:t>
+              <a:defRPr sz="950" b="1">
+                <a:solidFill>
+                  <a:srgbClr val="1E293B"/>
+                </a:solidFill>
+                <a:latin typeface="Times New Roman"/>
+              </a:defRPr>
+            </a:pPr>
+            <a:r>
+              <a:t>Team</a:t>
             </a:r>
             <a:br/>
             <a:r>
-              <a:t>Team</a:t>
+              <a:t>RunTime</a:t>
             </a:r>
             <a:br/>
             <a:r>
-              <a:t>Name</a:t>
-            </a:r>
-          </a:p>
-        </p:txBody>
-      </p:sp>
-      <p:sp>
-        <p:nvSpPr>
-          <p:cNvPr id="4" name="TextBox 3"/>
+              <a:t>Terror</a:t>
+            </a:r>
+          </a:p>
+        </p:txBody>
+      </p:sp>
+      <p:sp>
+        <p:nvSpPr>
+          <p:cNvPr id="3" name="TextBox 2"/>
           <p:cNvSpPr txBox="1"/>
           <p:nvPr/>
         </p:nvSpPr>
         <p:spPr>
           <a:xfrm>
-            <a:off x="2286000" y="365760"/>
-            <a:ext cx="6858000" cy="731520"/>
+            <a:off x="2011680" y="228600"/>
+            <a:ext cx="8046720" cy="822960"/>
           </a:xfrm>
           <a:prstGeom prst="rect">
             <a:avLst/>
@@ -7337,14 +7851,14 @@
               </a:defRPr>
             </a:pPr>
             <a:r>
-              <a:t>WORKING PROTOTYPE &amp; TEAM</a:t>
+              <a:t>RESEARCH REFERENCES &amp; TEAM</a:t>
             </a:r>
           </a:p>
         </p:txBody>
       </p:sp>
       <p:pic>
         <p:nvPicPr>
-          <p:cNvPr id="5" name="Picture 4" descr="sih_logo.png"/>
+          <p:cNvPr id="4" name="Picture 3" descr="sih_logo_transparent.png"/>
           <p:cNvPicPr>
             <a:picLocks noChangeAspect="1"/>
           </p:cNvPicPr>
@@ -7358,8 +7872,8 @@
         </p:blipFill>
         <p:spPr>
           <a:xfrm>
-            <a:off x="9601200" y="228600"/>
-            <a:ext cx="2194560" cy="640080"/>
+            <a:off x="10881360" y="109728"/>
+            <a:ext cx="868680" cy="1371600"/>
           </a:xfrm>
           <a:prstGeom prst="rect">
             <a:avLst/>
@@ -7368,23 +7882,25 @@
       </p:pic>
       <p:sp>
         <p:nvSpPr>
-          <p:cNvPr id="6" name="Rectangle 5"/>
+          <p:cNvPr id="5" name="Rectangle 4"/>
           <p:cNvSpPr/>
           <p:nvPr/>
         </p:nvSpPr>
         <p:spPr>
           <a:xfrm>
-            <a:off x="0" y="6217920"/>
-            <a:ext cx="12191695" cy="640080"/>
+            <a:off x="0" y="6446520"/>
+            <a:ext cx="12191695" cy="411480"/>
           </a:xfrm>
           <a:prstGeom prst="rect">
             <a:avLst/>
           </a:prstGeom>
           <a:solidFill>
-            <a:srgbClr val="0F62AC"/>
+            <a:srgbClr val="145DA0"/>
           </a:solidFill>
           <a:ln>
-            <a:noFill/>
+            <a:solidFill>
+              <a:srgbClr val="145DA0"/>
+            </a:solidFill>
           </a:ln>
         </p:spPr>
         <p:style>
@@ -7402,93 +7918,33 @@
           </a:fontRef>
         </p:style>
         <p:txBody>
-          <a:bodyPr rtlCol="0" anchor="ctr"/>
-          <a:lstStyle/>
-          <a:p>
-            <a:pPr algn="ctr"/>
-          </a:p>
-        </p:txBody>
-      </p:sp>
-      <p:sp>
-        <p:nvSpPr>
-          <p:cNvPr id="7" name="TextBox 6"/>
-          <p:cNvSpPr txBox="1"/>
-          <p:nvPr/>
-        </p:nvSpPr>
-        <p:spPr>
-          <a:xfrm>
-            <a:off x="2743200" y="6291072"/>
-            <a:ext cx="6705295" cy="457200"/>
-          </a:xfrm>
-          <a:prstGeom prst="rect">
-            <a:avLst/>
-          </a:prstGeom>
-          <a:noFill/>
-        </p:spPr>
-        <p:txBody>
-          <a:bodyPr wrap="square">
-            <a:spAutoFit/>
-          </a:bodyPr>
-          <a:lstStyle/>
-          <a:p>
-            <a:pPr algn="ctr">
-              <a:defRPr sz="1100">
+          <a:bodyPr rtlCol="0" anchor="ctr" wrap="square"/>
+          <a:lstStyle/>
+          <a:p>
+            <a:pPr algn="l">
+              <a:defRPr sz="1100" b="1">
                 <a:solidFill>
                   <a:srgbClr val="FFFFFF"/>
                 </a:solidFill>
-              </a:defRPr>
-            </a:pPr>
-            <a:r>
-              <a:t>@SIH Idea submission- Template</a:t>
-            </a:r>
-          </a:p>
-        </p:txBody>
-      </p:sp>
-      <p:sp>
-        <p:nvSpPr>
-          <p:cNvPr id="8" name="TextBox 7"/>
-          <p:cNvSpPr txBox="1"/>
-          <p:nvPr/>
-        </p:nvSpPr>
-        <p:spPr>
-          <a:xfrm>
-            <a:off x="10972800" y="6291072"/>
-            <a:ext cx="914400" cy="457200"/>
-          </a:xfrm>
-          <a:prstGeom prst="rect">
-            <a:avLst/>
-          </a:prstGeom>
-          <a:noFill/>
-        </p:spPr>
-        <p:txBody>
-          <a:bodyPr wrap="none">
-            <a:spAutoFit/>
-          </a:bodyPr>
-          <a:lstStyle/>
-          <a:p>
-            <a:pPr algn="r">
-              <a:defRPr sz="1200" b="1">
-                <a:solidFill>
-                  <a:srgbClr val="FFFFFF"/>
-                </a:solidFill>
-              </a:defRPr>
-            </a:pPr>
-            <a:r>
-              <a:t>7</a:t>
-            </a:r>
-          </a:p>
-        </p:txBody>
-      </p:sp>
-      <p:sp>
-        <p:nvSpPr>
-          <p:cNvPr id="9" name="Rounded Rectangle 8"/>
+                <a:latin typeface="Arial"/>
+              </a:defRPr>
+            </a:pPr>
+            <a:r>
+              <a:t>Team ID: T106  |  Team Name: RunTime Terror                                                                                               7</a:t>
+            </a:r>
+          </a:p>
+        </p:txBody>
+      </p:sp>
+      <p:sp>
+        <p:nvSpPr>
+          <p:cNvPr id="6" name="Rounded Rectangle 5"/>
           <p:cNvSpPr/>
           <p:nvPr/>
         </p:nvSpPr>
         <p:spPr>
           <a:xfrm>
-            <a:off x="548640" y="1371600"/>
-            <a:ext cx="5303520" cy="4572000"/>
+            <a:off x="548640" y="1280160"/>
+            <a:ext cx="5303520" cy="4297680"/>
           </a:xfrm>
           <a:prstGeom prst="roundRect">
             <a:avLst/>
@@ -7496,7 +7952,7 @@
           <a:solidFill>
             <a:srgbClr val="F8FAFC"/>
           </a:solidFill>
-          <a:ln w="12700">
+          <a:ln w="15240">
             <a:solidFill>
               <a:srgbClr val="CBD5E1"/>
             </a:solidFill>
@@ -7526,14 +7982,14 @@
       </p:sp>
       <p:sp>
         <p:nvSpPr>
-          <p:cNvPr id="10" name="TextBox 9"/>
+          <p:cNvPr id="7" name="TextBox 6"/>
           <p:cNvSpPr txBox="1"/>
           <p:nvPr/>
         </p:nvSpPr>
         <p:spPr>
           <a:xfrm>
-            <a:off x="731520" y="1508760"/>
-            <a:ext cx="4937760" cy="4297680"/>
+            <a:off x="685800" y="1371600"/>
+            <a:ext cx="5029200" cy="4114800"/>
           </a:xfrm>
           <a:prstGeom prst="rect">
             <a:avLst/>
@@ -7547,7 +8003,7 @@
           <a:lstStyle/>
           <a:p>
             <a:pPr>
-              <a:defRPr sz="1400" b="1">
+              <a:defRPr sz="1300" b="1">
                 <a:solidFill>
                   <a:srgbClr val="1D4477"/>
                 </a:solidFill>
@@ -7555,7 +8011,7 @@
               </a:defRPr>
             </a:pPr>
             <a:r>
-              <a:t>🖥️ Live Functional Prototype Modules</a:t>
+              <a:t>• Statutory Governance &amp; Academic Citations</a:t>
             </a:r>
           </a:p>
           <a:p>
@@ -7563,26 +8019,28 @@
               <a:spcBef>
                 <a:spcPts val="600"/>
               </a:spcBef>
-              <a:defRPr sz="1100" b="1">
-                <a:solidFill>
-                  <a:srgbClr val="0F62AC"/>
-                </a:solidFill>
-              </a:defRPr>
-            </a:pPr>
-            <a:r>
-              <a:t>• Geospatial GIS Anomaly Heatmap: </a:t>
+              <a:defRPr sz="1050" b="1">
+                <a:solidFill>
+                  <a:srgbClr val="145DA0"/>
+                </a:solidFill>
+                <a:latin typeface="Times New Roman"/>
+              </a:defRPr>
+            </a:pPr>
+            <a:r>
+              <a:t>1. MoSPI, Government of India (Guidelines on MPLADS)</a:t>
             </a:r>
           </a:p>
           <a:p>
             <a:pPr>
-              <a:defRPr sz="1000">
-                <a:solidFill>
-                  <a:srgbClr val="0F172A"/>
-                </a:solidFill>
-              </a:defRPr>
-            </a:pPr>
-            <a:r>
-              <a:t>Interactive Leaflet India map rendering risk intensity across all 33 States/UTs with constituency-level audit drill-downs.</a:t>
+              <a:defRPr sz="950">
+                <a:solidFill>
+                  <a:srgbClr val="1E293B"/>
+                </a:solidFill>
+                <a:latin typeface="Times New Roman"/>
+              </a:defRPr>
+            </a:pPr>
+            <a:r>
+              <a:t>Para 3.12 (Tendering procedures), Para 5.2 (45-Day Sanction SLA), and Para 2.11 (Permissible public community assets).</a:t>
             </a:r>
           </a:p>
           <a:p>
@@ -7590,26 +8048,28 @@
               <a:spcBef>
                 <a:spcPts val="600"/>
               </a:spcBef>
-              <a:defRPr sz="1100" b="1">
-                <a:solidFill>
-                  <a:srgbClr val="0F62AC"/>
-                </a:solidFill>
-              </a:defRPr>
-            </a:pPr>
-            <a:r>
-              <a:t>• Works Anomaly Explorer (105k): </a:t>
+              <a:defRPr sz="1050" b="1">
+                <a:solidFill>
+                  <a:srgbClr val="145DA0"/>
+                </a:solidFill>
+                <a:latin typeface="Times New Roman"/>
+              </a:defRPr>
+            </a:pPr>
+            <a:r>
+              <a:t>2. Office of the Comptroller &amp; Auditor General of India (CAG)</a:t>
             </a:r>
           </a:p>
           <a:p>
             <a:pPr>
-              <a:defRPr sz="1000">
-                <a:solidFill>
-                  <a:srgbClr val="0F172A"/>
-                </a:solidFill>
-              </a:defRPr>
-            </a:pPr>
-            <a:r>
-              <a:t>Full-text searchable, paginated table with real-time ML vs CAG score comparisons and multi-year temporal filtering (2019-2024).</a:t>
+              <a:defRPr sz="950">
+                <a:solidFill>
+                  <a:srgbClr val="1E293B"/>
+                </a:solidFill>
+                <a:latin typeface="Times New Roman"/>
+              </a:defRPr>
+            </a:pPr>
+            <a:r>
+              <a:t>Performance Audit Reports on MPLADS: Fund dormancy, tender splitting, and March Rush fiscal dump analyses.</a:t>
             </a:r>
           </a:p>
           <a:p>
@@ -7617,26 +8077,28 @@
               <a:spcBef>
                 <a:spcPts val="600"/>
               </a:spcBef>
-              <a:defRPr sz="1100" b="1">
-                <a:solidFill>
-                  <a:srgbClr val="0F62AC"/>
-                </a:solidFill>
-              </a:defRPr>
-            </a:pPr>
-            <a:r>
-              <a:t>• Live AI Audit Simulator: </a:t>
+              <a:defRPr sz="1050" b="1">
+                <a:solidFill>
+                  <a:srgbClr val="145DA0"/>
+                </a:solidFill>
+                <a:latin typeface="Times New Roman"/>
+              </a:defRPr>
+            </a:pPr>
+            <a:r>
+              <a:t>3. Ministry of Finance, Department of Expenditure (GFR 2017)</a:t>
             </a:r>
           </a:p>
           <a:p>
             <a:pPr>
-              <a:defRPr sz="1000">
-                <a:solidFill>
-                  <a:srgbClr val="0F172A"/>
-                </a:solidFill>
-              </a:defRPr>
-            </a:pPr>
-            <a:r>
-              <a:t>Interactive 'What-If' sandbox allowing evaluators to adjust project budget, delay, and village duplication to test ML risk recalculation live.</a:t>
+              <a:defRPr sz="950">
+                <a:solidFill>
+                  <a:srgbClr val="1E293B"/>
+                </a:solidFill>
+                <a:latin typeface="Times New Roman"/>
+              </a:defRPr>
+            </a:pPr>
+            <a:r>
+              <a:t>Rule 149: Mandatory GeM public procurement thresholds (&lt;₹5 Lakh / ₹10 Lakh) preventing artificial work fragmentation.</a:t>
             </a:r>
           </a:p>
           <a:p>
@@ -7644,67 +8106,42 @@
               <a:spcBef>
                 <a:spcPts val="600"/>
               </a:spcBef>
-              <a:defRPr sz="1100" b="1">
-                <a:solidFill>
-                  <a:srgbClr val="0F62AC"/>
-                </a:solidFill>
-              </a:defRPr>
-            </a:pPr>
-            <a:r>
-              <a:t>• Officer Case Management Queue: </a:t>
+              <a:defRPr sz="1050" b="1">
+                <a:solidFill>
+                  <a:srgbClr val="145DA0"/>
+                </a:solidFill>
+                <a:latin typeface="Times New Roman"/>
+              </a:defRPr>
+            </a:pPr>
+            <a:r>
+              <a:t>4. Liu, F. T., Ting, K. M., &amp; Zhou, Z. H. (IEEE ICDM)</a:t>
             </a:r>
           </a:p>
           <a:p>
             <a:pPr>
-              <a:defRPr sz="1000">
-                <a:solidFill>
-                  <a:srgbClr val="0F172A"/>
-                </a:solidFill>
-              </a:defRPr>
-            </a:pPr>
-            <a:r>
-              <a:t>Field-ready case tracking (UNDER REVIEW, SITE INSPECTION, FALSE POSITIVE) logging auditor observations.</a:t>
-            </a:r>
-          </a:p>
-          <a:p>
-            <a:pPr>
-              <a:spcBef>
-                <a:spcPts val="600"/>
-              </a:spcBef>
-              <a:defRPr sz="1100" b="1">
-                <a:solidFill>
-                  <a:srgbClr val="0F62AC"/>
-                </a:solidFill>
-              </a:defRPr>
-            </a:pPr>
-            <a:r>
-              <a:t>• Official Printable CAG Dossiers: </a:t>
-            </a:r>
-          </a:p>
-          <a:p>
-            <a:pPr>
-              <a:defRPr sz="1000">
-                <a:solidFill>
-                  <a:srgbClr val="0F172A"/>
-                </a:solidFill>
-              </a:defRPr>
-            </a:pPr>
-            <a:r>
-              <a:t>One-click printable audit screening reports with formal case IDs, checklists, and sign/stamp fields.</a:t>
-            </a:r>
-          </a:p>
-        </p:txBody>
-      </p:sp>
-      <p:sp>
-        <p:nvSpPr>
-          <p:cNvPr id="11" name="Rounded Rectangle 10"/>
+              <a:defRPr sz="950">
+                <a:solidFill>
+                  <a:srgbClr val="1E293B"/>
+                </a:solidFill>
+                <a:latin typeface="Times New Roman"/>
+              </a:defRPr>
+            </a:pPr>
+            <a:r>
+              <a:t>'Isolation Forest' — Foundations of unsupervised isolation tree algorithms for multi-dimensional anomaly detection.</a:t>
+            </a:r>
+          </a:p>
+        </p:txBody>
+      </p:sp>
+      <p:sp>
+        <p:nvSpPr>
+          <p:cNvPr id="8" name="Rounded Rectangle 7"/>
           <p:cNvSpPr/>
           <p:nvPr/>
         </p:nvSpPr>
         <p:spPr>
           <a:xfrm>
-            <a:off x="6217920" y="1371600"/>
-            <a:ext cx="5303520" cy="4572000"/>
+            <a:off x="6217920" y="1280160"/>
+            <a:ext cx="5394960" cy="4297680"/>
           </a:xfrm>
           <a:prstGeom prst="roundRect">
             <a:avLst/>
@@ -7712,7 +8149,7 @@
           <a:solidFill>
             <a:srgbClr val="F8FAFC"/>
           </a:solidFill>
-          <a:ln w="12700">
+          <a:ln w="15240">
             <a:solidFill>
               <a:srgbClr val="CBD5E1"/>
             </a:solidFill>
@@ -7742,14 +8179,14 @@
       </p:sp>
       <p:sp>
         <p:nvSpPr>
-          <p:cNvPr id="12" name="TextBox 11"/>
+          <p:cNvPr id="9" name="TextBox 8"/>
           <p:cNvSpPr txBox="1"/>
           <p:nvPr/>
         </p:nvSpPr>
         <p:spPr>
           <a:xfrm>
-            <a:off x="6400800" y="1508760"/>
-            <a:ext cx="4937760" cy="4297680"/>
+            <a:off x="6355080" y="1371600"/>
+            <a:ext cx="5120640" cy="4114800"/>
           </a:xfrm>
           <a:prstGeom prst="rect">
             <a:avLst/>
@@ -7763,7 +8200,7 @@
           <a:lstStyle/>
           <a:p>
             <a:pPr>
-              <a:defRPr sz="1400" b="1">
+              <a:defRPr sz="1300" b="1">
                 <a:solidFill>
                   <a:srgbClr val="1D4477"/>
                 </a:solidFill>
@@ -7771,169 +8208,235 @@
               </a:defRPr>
             </a:pPr>
             <a:r>
-              <a:t>👥 Team Members &amp; Project Responsibilities</a:t>
+              <a:t>• Team RunTime Terror (T106) Roster</a:t>
             </a:r>
           </a:p>
           <a:p>
             <a:pPr>
               <a:spcBef>
-                <a:spcPts val="600"/>
+                <a:spcPts val="500"/>
               </a:spcBef>
-              <a:defRPr sz="1100" b="1">
-                <a:solidFill>
-                  <a:srgbClr val="0F62AC"/>
-                </a:solidFill>
-              </a:defRPr>
-            </a:pPr>
-            <a:r>
-              <a:t>• Team Leader: [Leader Name]</a:t>
+              <a:defRPr sz="1050" b="1">
+                <a:solidFill>
+                  <a:srgbClr val="145DA0"/>
+                </a:solidFill>
+                <a:latin typeface="Times New Roman"/>
+              </a:defRPr>
+            </a:pPr>
+            <a:r>
+              <a:t>• Team Leader: Akshat Mittal</a:t>
             </a:r>
           </a:p>
           <a:p>
             <a:pPr>
               <a:defRPr sz="950">
                 <a:solidFill>
-                  <a:srgbClr val="0F172A"/>
-                </a:solidFill>
-              </a:defRPr>
-            </a:pPr>
-            <a:r>
-              <a:t>  Role: Lead AI/ML Architect &amp; Backend Engine (FastAPI)</a:t>
+                  <a:srgbClr val="1E293B"/>
+                </a:solidFill>
+                <a:latin typeface="Times New Roman"/>
+              </a:defRPr>
+            </a:pPr>
+            <a:r>
+              <a:t>  Lead AI/ML Architect &amp; Backend Engine (FastAPI, Scikit-Learn)</a:t>
             </a:r>
           </a:p>
           <a:p>
             <a:pPr>
               <a:spcBef>
-                <a:spcPts val="600"/>
+                <a:spcPts val="500"/>
               </a:spcBef>
-              <a:defRPr sz="1100" b="1">
-                <a:solidFill>
-                  <a:srgbClr val="0F62AC"/>
-                </a:solidFill>
-              </a:defRPr>
-            </a:pPr>
-            <a:r>
-              <a:t>• Member 2: [Member Name]</a:t>
+              <a:defRPr sz="1050" b="1">
+                <a:solidFill>
+                  <a:srgbClr val="145DA0"/>
+                </a:solidFill>
+                <a:latin typeface="Times New Roman"/>
+              </a:defRPr>
+            </a:pPr>
+            <a:r>
+              <a:t>• Member 2: Khushi</a:t>
             </a:r>
           </a:p>
           <a:p>
             <a:pPr>
               <a:defRPr sz="950">
                 <a:solidFill>
-                  <a:srgbClr val="0F172A"/>
-                </a:solidFill>
-              </a:defRPr>
-            </a:pPr>
-            <a:r>
-              <a:t>  Role: Data Pipeline, Cleaning &amp; MoSPI Scraper (Python)</a:t>
+                  <a:srgbClr val="1E293B"/>
+                </a:solidFill>
+                <a:latin typeface="Times New Roman"/>
+              </a:defRPr>
+            </a:pPr>
+            <a:r>
+              <a:t>  Data Pipeline, MoSPI Scraper &amp; Schema Cleaning (Python)</a:t>
             </a:r>
           </a:p>
           <a:p>
             <a:pPr>
               <a:spcBef>
-                <a:spcPts val="600"/>
+                <a:spcPts val="500"/>
               </a:spcBef>
-              <a:defRPr sz="1100" b="1">
-                <a:solidFill>
-                  <a:srgbClr val="0F62AC"/>
-                </a:solidFill>
-              </a:defRPr>
-            </a:pPr>
-            <a:r>
-              <a:t>• Member 3: [Member Name]</a:t>
+              <a:defRPr sz="1050" b="1">
+                <a:solidFill>
+                  <a:srgbClr val="145DA0"/>
+                </a:solidFill>
+                <a:latin typeface="Times New Roman"/>
+              </a:defRPr>
+            </a:pPr>
+            <a:r>
+              <a:t>• Member 3: Aryan Shahi</a:t>
             </a:r>
           </a:p>
           <a:p>
             <a:pPr>
               <a:defRPr sz="950">
                 <a:solidFill>
-                  <a:srgbClr val="0F172A"/>
-                </a:solidFill>
-              </a:defRPr>
-            </a:pPr>
-            <a:r>
-              <a:t>  Role: Frontend Architecture, React 18 &amp; Recharts Visualizer</a:t>
+                  <a:srgbClr val="1E293B"/>
+                </a:solidFill>
+                <a:latin typeface="Times New Roman"/>
+              </a:defRPr>
+            </a:pPr>
+            <a:r>
+              <a:t>  Frontend Architecture, React 18 &amp; Recharts Data Visualizer</a:t>
             </a:r>
           </a:p>
           <a:p>
             <a:pPr>
               <a:spcBef>
-                <a:spcPts val="600"/>
+                <a:spcPts val="500"/>
               </a:spcBef>
-              <a:defRPr sz="1100" b="1">
-                <a:solidFill>
-                  <a:srgbClr val="0F62AC"/>
-                </a:solidFill>
-              </a:defRPr>
-            </a:pPr>
-            <a:r>
-              <a:t>• Member 4: [Member Name]</a:t>
+              <a:defRPr sz="1050" b="1">
+                <a:solidFill>
+                  <a:srgbClr val="145DA0"/>
+                </a:solidFill>
+                <a:latin typeface="Times New Roman"/>
+              </a:defRPr>
+            </a:pPr>
+            <a:r>
+              <a:t>• Member 4: Abhay Pratap</a:t>
             </a:r>
           </a:p>
           <a:p>
             <a:pPr>
               <a:defRPr sz="950">
                 <a:solidFill>
-                  <a:srgbClr val="0F172A"/>
-                </a:solidFill>
-              </a:defRPr>
-            </a:pPr>
-            <a:r>
-              <a:t>  Role: Geospatial GIS Mapping Specialist (Leaflet API)</a:t>
+                  <a:srgbClr val="1E293B"/>
+                </a:solidFill>
+                <a:latin typeface="Times New Roman"/>
+              </a:defRPr>
+            </a:pPr>
+            <a:r>
+              <a:t>  Geospatial GIS Specialist (Leaflet API &amp; Heatmap Engine)</a:t>
             </a:r>
           </a:p>
           <a:p>
             <a:pPr>
               <a:spcBef>
-                <a:spcPts val="600"/>
+                <a:spcPts val="500"/>
               </a:spcBef>
-              <a:defRPr sz="1100" b="1">
-                <a:solidFill>
-                  <a:srgbClr val="0F62AC"/>
-                </a:solidFill>
-              </a:defRPr>
-            </a:pPr>
-            <a:r>
-              <a:t>• Member 5: [Member Name]</a:t>
+              <a:defRPr sz="1050" b="1">
+                <a:solidFill>
+                  <a:srgbClr val="145DA0"/>
+                </a:solidFill>
+                <a:latin typeface="Times New Roman"/>
+              </a:defRPr>
+            </a:pPr>
+            <a:r>
+              <a:t>• Member 5: Gaurav Shukla</a:t>
             </a:r>
           </a:p>
           <a:p>
             <a:pPr>
               <a:defRPr sz="950">
                 <a:solidFill>
-                  <a:srgbClr val="0F172A"/>
-                </a:solidFill>
-              </a:defRPr>
-            </a:pPr>
-            <a:r>
-              <a:t>  Role: CAG Statutory Rules &amp; GFR Domain Compliance</a:t>
+                  <a:srgbClr val="1E293B"/>
+                </a:solidFill>
+                <a:latin typeface="Times New Roman"/>
+              </a:defRPr>
+            </a:pPr>
+            <a:r>
+              <a:t>  CAG Statutory Rules &amp; GFR Domain Compliance Engineering</a:t>
             </a:r>
           </a:p>
           <a:p>
             <a:pPr>
               <a:spcBef>
-                <a:spcPts val="600"/>
+                <a:spcPts val="500"/>
               </a:spcBef>
-              <a:defRPr sz="1100" b="1">
-                <a:solidFill>
-                  <a:srgbClr val="0F62AC"/>
-                </a:solidFill>
-              </a:defRPr>
-            </a:pPr>
-            <a:r>
-              <a:t>• Member 6 / Mentor: [Mentor / Name]</a:t>
+              <a:defRPr sz="1050" b="1">
+                <a:solidFill>
+                  <a:srgbClr val="145DA0"/>
+                </a:solidFill>
+                <a:latin typeface="Times New Roman"/>
+              </a:defRPr>
+            </a:pPr>
+            <a:r>
+              <a:t>• Member 6: Shreya Srivastava</a:t>
             </a:r>
           </a:p>
           <a:p>
             <a:pPr>
               <a:defRPr sz="950">
                 <a:solidFill>
-                  <a:srgbClr val="0F172A"/>
-                </a:solidFill>
-              </a:defRPr>
-            </a:pPr>
-            <a:r>
-              <a:t>  Role: Quality Assurance, Audit Testing &amp; Evaluation</a:t>
+                  <a:srgbClr val="1E293B"/>
+                </a:solidFill>
+                <a:latin typeface="Times New Roman"/>
+              </a:defRPr>
+            </a:pPr>
+            <a:r>
+              <a:t>  Quality Assurance, Audit Testing &amp; Evaluation Lead</a:t>
+            </a:r>
+          </a:p>
+        </p:txBody>
+      </p:sp>
+      <p:sp>
+        <p:nvSpPr>
+          <p:cNvPr id="10" name="Rounded Rectangle 9"/>
+          <p:cNvSpPr/>
+          <p:nvPr/>
+        </p:nvSpPr>
+        <p:spPr>
+          <a:xfrm>
+            <a:off x="548640" y="5715000"/>
+            <a:ext cx="11064240" cy="384048"/>
+          </a:xfrm>
+          <a:prstGeom prst="roundRect">
+            <a:avLst/>
+          </a:prstGeom>
+          <a:solidFill>
+            <a:srgbClr val="ECFDF5"/>
+          </a:solidFill>
+          <a:ln w="19050">
+            <a:solidFill>
+              <a:srgbClr val="10B981"/>
+            </a:solidFill>
+          </a:ln>
+        </p:spPr>
+        <p:style>
+          <a:lnRef idx="1">
+            <a:schemeClr val="accent1"/>
+          </a:lnRef>
+          <a:fillRef idx="3">
+            <a:schemeClr val="accent1"/>
+          </a:fillRef>
+          <a:effectRef idx="2">
+            <a:schemeClr val="accent1"/>
+          </a:effectRef>
+          <a:fontRef idx="minor">
+            <a:schemeClr val="lt1"/>
+          </a:fontRef>
+        </p:style>
+        <p:txBody>
+          <a:bodyPr rtlCol="0" anchor="ctr"/>
+          <a:lstStyle/>
+          <a:p>
+            <a:pPr algn="ctr">
+              <a:defRPr sz="1000" b="1">
+                <a:solidFill>
+                  <a:srgbClr val="047857"/>
+                </a:solidFill>
+              </a:defRPr>
+            </a:pPr>
+            <a:r>
+              <a:t>🎯 100% FUNCTIONAL PROTOTYPE • VALIDATED ON 105,000 REAL MOSPI WORKS ACROSS ALL 33 STATES &amp; UTs</a:t>
             </a:r>
           </a:p>
         </p:txBody>

--- a/SIH2026_IDEA_Presentation_SIH26102.pptx
+++ b/SIH2026_IDEA_Presentation_SIH26102.pptx
@@ -3118,8 +3118,8 @@
         </p:blipFill>
         <p:spPr>
           <a:xfrm>
-            <a:off x="10789920" y="182880"/>
-            <a:ext cx="914400" cy="1508760"/>
+            <a:off x="9875520" y="164592"/>
+            <a:ext cx="1920240" cy="891752"/>
           </a:xfrm>
           <a:prstGeom prst="rect">
             <a:avLst/>
@@ -3214,8 +3214,8 @@
         </p:blipFill>
         <p:spPr>
           <a:xfrm>
-            <a:off x="7132320" y="1554480"/>
-            <a:ext cx="4206240" cy="4206240"/>
+            <a:off x="7863840" y="1645920"/>
+            <a:ext cx="3091586" cy="4480560"/>
           </a:xfrm>
           <a:prstGeom prst="rect">
             <a:avLst/>
@@ -3641,8 +3641,8 @@
         </p:blipFill>
         <p:spPr>
           <a:xfrm>
-            <a:off x="10881360" y="109728"/>
-            <a:ext cx="868680" cy="1371600"/>
+            <a:off x="9875520" y="164592"/>
+            <a:ext cx="1920240" cy="891752"/>
           </a:xfrm>
           <a:prstGeom prst="rect">
             <a:avLst/>
@@ -4527,8 +4527,8 @@
         </p:blipFill>
         <p:spPr>
           <a:xfrm>
-            <a:off x="10881360" y="109728"/>
-            <a:ext cx="868680" cy="1371600"/>
+            <a:off x="9875520" y="164592"/>
+            <a:ext cx="1920240" cy="891752"/>
           </a:xfrm>
           <a:prstGeom prst="rect">
             <a:avLst/>
@@ -4992,8 +4992,8 @@
         </p:blipFill>
         <p:spPr>
           <a:xfrm>
-            <a:off x="10881360" y="109728"/>
-            <a:ext cx="868680" cy="1371600"/>
+            <a:off x="9875520" y="164592"/>
+            <a:ext cx="1920240" cy="891752"/>
           </a:xfrm>
           <a:prstGeom prst="rect">
             <a:avLst/>
@@ -5529,8 +5529,8 @@
         </p:blipFill>
         <p:spPr>
           <a:xfrm>
-            <a:off x="10881360" y="109728"/>
-            <a:ext cx="868680" cy="1371600"/>
+            <a:off x="9875520" y="164592"/>
+            <a:ext cx="1920240" cy="891752"/>
           </a:xfrm>
           <a:prstGeom prst="rect">
             <a:avLst/>
@@ -6018,8 +6018,8 @@
         </p:blipFill>
         <p:spPr>
           <a:xfrm>
-            <a:off x="10881360" y="109728"/>
-            <a:ext cx="868680" cy="1371600"/>
+            <a:off x="9875520" y="164592"/>
+            <a:ext cx="1920240" cy="891752"/>
           </a:xfrm>
           <a:prstGeom prst="rect">
             <a:avLst/>
@@ -7872,8 +7872,8 @@
         </p:blipFill>
         <p:spPr>
           <a:xfrm>
-            <a:off x="10881360" y="109728"/>
-            <a:ext cx="868680" cy="1371600"/>
+            <a:off x="9875520" y="164592"/>
+            <a:ext cx="1920240" cy="891752"/>
           </a:xfrm>
           <a:prstGeom prst="rect">
             <a:avLst/>
